--- a/docs/project presentation.pptx
+++ b/docs/project presentation.pptx
@@ -20,6 +20,7 @@
     <p:sldId id="265" r:id="rId13"/>
     <p:sldId id="266" r:id="rId14"/>
     <p:sldId id="267" r:id="rId15"/>
+    <p:sldId id="268" r:id="rId16"/>
   </p:sldIdLst>
   <p:sldSz cx="12192000" cy="6858000"/>
   <p:notesSz cx="6858000" cy="12192000"/>
@@ -375,7 +376,7 @@
             <a:pPr indent="0" algn="r">
               <a:buNone/>
             </a:pPr>
-            <a:fld id="{6B8D9210-E7FB-40B1-A8F0-845E2368FE5B}" type="slidenum">
+            <a:fld id="{E3B8442F-F501-4B35-A9D9-B248928EC3D9}" type="slidenum">
               <a:rPr lang="uk-UA" sz="1400" b="0" u="none" strike="noStrike">
                 <a:solidFill>
                   <a:srgbClr val="000000"/>
@@ -422,7 +423,7 @@
       </p:grpSpPr>
       <p:sp>
         <p:nvSpPr>
-          <p:cNvPr id="167" name="PlaceHolder 1"/>
+          <p:cNvPr id="173" name="PlaceHolder 1"/>
           <p:cNvSpPr>
             <a:spLocks noGrp="1"/>
           </p:cNvSpPr>
@@ -445,7 +446,7 @@
       </p:sp>
       <p:sp>
         <p:nvSpPr>
-          <p:cNvPr id="168" name="PlaceHolder 2"/>
+          <p:cNvPr id="174" name="PlaceHolder 2"/>
           <p:cNvSpPr>
             <a:spLocks noGrp="1"/>
           </p:cNvSpPr>
@@ -501,7 +502,7 @@
       </p:sp>
       <p:sp>
         <p:nvSpPr>
-          <p:cNvPr id="169" name="PlaceHolder 3"/>
+          <p:cNvPr id="175" name="PlaceHolder 3"/>
           <p:cNvSpPr>
             <a:spLocks noGrp="1"/>
           </p:cNvSpPr>
@@ -550,7 +551,7 @@
               </a:lnSpc>
               <a:buNone/>
             </a:pPr>
-            <a:fld id="{5927CB10-7FAB-4DD5-9740-4CD2CA778A06}" type="slidenum">
+            <a:fld id="{BF49E0FC-3F77-436A-9756-1408F7CFB897}" type="slidenum">
               <a:rPr lang="en-US" sz="1200" b="0" u="none" strike="noStrike">
                 <a:solidFill>
                   <a:schemeClr val="dk1"/>
@@ -560,7 +561,7 @@
                 <a:latin typeface="+mn-lt"/>
                 <a:ea typeface="+mn-ea"/>
               </a:rPr>
-              <a:t>12</a:t>
+              <a:t>13</a:t>
             </a:fld>
             <a:endParaRPr lang="uk-UA" sz="1200" b="0" u="none" strike="noStrike">
               <a:solidFill>
@@ -597,7 +598,7 @@
       </p:grpSpPr>
       <p:sp>
         <p:nvSpPr>
-          <p:cNvPr id="194" name="PlaceHolder 1"/>
+          <p:cNvPr id="200" name="PlaceHolder 1"/>
           <p:cNvSpPr>
             <a:spLocks noGrp="1"/>
           </p:cNvSpPr>
@@ -620,7 +621,7 @@
       </p:sp>
       <p:sp>
         <p:nvSpPr>
-          <p:cNvPr id="195" name="PlaceHolder 2"/>
+          <p:cNvPr id="201" name="PlaceHolder 2"/>
           <p:cNvSpPr>
             <a:spLocks noGrp="1"/>
           </p:cNvSpPr>
@@ -661,7 +662,7 @@
                 <a:uFillTx/>
                 <a:latin typeface="Arial"/>
               </a:rPr>
-              <a:t>Отже, в межах проєкту: розроблено пристрій, який показує карту тривог по всіх областях України і подає звуковий сигнал для вибраної області; побудовано багатозадачну архітектуру на FreeRTOS із сімома задачами; реалізовано захист від зависань, збоїв мережі й некоректних даних; зроблено налаштування через веб-інтерфейс без перепрошивки; покрито ключову логіку автоматичними тестами. [Сюди варто додати виміряні на платі числа: час запиту, навантаження процесора з логу monitor_task, використання RAM і flash.]</a:t>
+              <a:t>Ключову логіку винесено в «чисті» функції, які не залежать від обладнання. Тому їх можна тестувати на звичайному комп'ютері фреймворком Unity, тим самим, що вбудований в ESP-IDF. 16 тестів парсера відповіді API: пошкоджені дані, граничні випадки, відображення міст Київ і Севастополь на області. 9 тестів регулятора яскравості: збіжність, межі, anti-windup, поведінка при відмові датчика. Усі тести проходять успішно. Окремо підготовано набір тестів, які запускаються безпосередньо на мікроконтролері.</a:t>
             </a:r>
             <a:endParaRPr lang="uk-UA" sz="2000" b="0" u="none" strike="noStrike">
               <a:solidFill>
@@ -676,7 +677,7 @@
       </p:sp>
       <p:sp>
         <p:nvSpPr>
-          <p:cNvPr id="196" name="PlaceHolder 3"/>
+          <p:cNvPr id="202" name="PlaceHolder 3"/>
           <p:cNvSpPr>
             <a:spLocks noGrp="1"/>
           </p:cNvSpPr>
@@ -725,7 +726,7 @@
               </a:lnSpc>
               <a:buNone/>
             </a:pPr>
-            <a:fld id="{9DD07760-2CF4-4851-9098-139B7A62D7BC}" type="slidenum">
+            <a:fld id="{58A024EF-719E-48B4-B2D3-8B0EB2219E10}" type="slidenum">
               <a:rPr lang="en-US" sz="1200" b="0" u="none" strike="noStrike">
                 <a:solidFill>
                   <a:schemeClr val="dk1"/>
@@ -735,7 +736,7 @@
                 <a:latin typeface="+mn-lt"/>
                 <a:ea typeface="+mn-ea"/>
               </a:rPr>
-              <a:t>12</a:t>
+              <a:t>13</a:t>
             </a:fld>
             <a:endParaRPr lang="uk-UA" sz="1200" b="0" u="none" strike="noStrike">
               <a:solidFill>
@@ -772,7 +773,7 @@
       </p:grpSpPr>
       <p:sp>
         <p:nvSpPr>
-          <p:cNvPr id="197" name="PlaceHolder 1"/>
+          <p:cNvPr id="203" name="PlaceHolder 1"/>
           <p:cNvSpPr>
             <a:spLocks noGrp="1"/>
           </p:cNvSpPr>
@@ -795,7 +796,7 @@
       </p:sp>
       <p:sp>
         <p:nvSpPr>
-          <p:cNvPr id="198" name="PlaceHolder 2"/>
+          <p:cNvPr id="204" name="PlaceHolder 2"/>
           <p:cNvSpPr>
             <a:spLocks noGrp="1"/>
           </p:cNvSpPr>
@@ -836,7 +837,7 @@
                 <a:uFillTx/>
                 <a:latin typeface="Arial"/>
               </a:rPr>
-              <a:t>Проєкт можна розвивати далі: доступ до сторінки налаштувань у звичайному режимі роботи, за IP-адресою в домашній мережі; оновлення прошивки «по повітрю» (OTA); відображення інших типів загроз; власна друкована плата й корпус для серійного виготовлення.</a:t>
+              <a:t>Отже, в межах проєкту: розроблено пристрій, який показує карту тривог по всіх областях України і подає звуковий сигнал для вибраної області; побудовано багатозадачну архітектуру на FreeRTOS із сімома задачами; реалізовано захист від зависань, збоїв мережі й некоректних даних; зроблено налаштування через веб-інтерфейс без перепрошивки; покрито ключову логіку автоматичними тестами. [Сюди варто додати виміряні на платі числа: час запиту, навантаження процесора з логу monitor_task, використання RAM і flash.]</a:t>
             </a:r>
             <a:endParaRPr lang="uk-UA" sz="2000" b="0" u="none" strike="noStrike">
               <a:solidFill>
@@ -851,7 +852,7 @@
       </p:sp>
       <p:sp>
         <p:nvSpPr>
-          <p:cNvPr id="199" name="PlaceHolder 3"/>
+          <p:cNvPr id="205" name="PlaceHolder 3"/>
           <p:cNvSpPr>
             <a:spLocks noGrp="1"/>
           </p:cNvSpPr>
@@ -900,7 +901,7 @@
               </a:lnSpc>
               <a:buNone/>
             </a:pPr>
-            <a:fld id="{1BD83D97-B159-41D3-AAD7-6244313A187F}" type="slidenum">
+            <a:fld id="{9C439132-C2E3-45F3-9D6D-77A9E6343EEF}" type="slidenum">
               <a:rPr lang="en-US" sz="1200" b="0" u="none" strike="noStrike">
                 <a:solidFill>
                   <a:schemeClr val="dk1"/>
@@ -910,7 +911,7 @@
                 <a:latin typeface="+mn-lt"/>
                 <a:ea typeface="+mn-ea"/>
               </a:rPr>
-              <a:t>12</a:t>
+              <a:t>13</a:t>
             </a:fld>
             <a:endParaRPr lang="uk-UA" sz="1200" b="0" u="none" strike="noStrike">
               <a:solidFill>
@@ -947,7 +948,7 @@
       </p:grpSpPr>
       <p:sp>
         <p:nvSpPr>
-          <p:cNvPr id="200" name="PlaceHolder 1"/>
+          <p:cNvPr id="206" name="PlaceHolder 1"/>
           <p:cNvSpPr>
             <a:spLocks noGrp="1"/>
           </p:cNvSpPr>
@@ -970,7 +971,7 @@
       </p:sp>
       <p:sp>
         <p:nvSpPr>
-          <p:cNvPr id="201" name="PlaceHolder 2"/>
+          <p:cNvPr id="207" name="PlaceHolder 2"/>
           <p:cNvSpPr>
             <a:spLocks noGrp="1"/>
           </p:cNvSpPr>
@@ -1011,7 +1012,7 @@
                 <a:uFillTx/>
                 <a:latin typeface="Arial"/>
               </a:rPr>
-              <a:t>Дякую за увагу! Готовий відповісти на ваші запитання. Можливі запитання: чому ESP32, а не Raspberry Pi; що буде, якщо API недоступний; як часто оновлюються дані; чому сирена лише при тривозі на всю область; як вирішено синхронізацію задач; навіщо ПІ-регулятор. Відповіді — у документі з промовою.</a:t>
+              <a:t>Проєкт можна розвивати далі: доступ до сторінки налаштувань у звичайному режимі роботи, за IP-адресою в домашній мережі; оновлення прошивки «по повітрю» (OTA); відображення інших типів загроз; власна друкована плата й корпус для серійного виготовлення.</a:t>
             </a:r>
             <a:endParaRPr lang="uk-UA" sz="2000" b="0" u="none" strike="noStrike">
               <a:solidFill>
@@ -1026,7 +1027,7 @@
       </p:sp>
       <p:sp>
         <p:nvSpPr>
-          <p:cNvPr id="202" name="PlaceHolder 3"/>
+          <p:cNvPr id="208" name="PlaceHolder 3"/>
           <p:cNvSpPr>
             <a:spLocks noGrp="1"/>
           </p:cNvSpPr>
@@ -1075,7 +1076,182 @@
               </a:lnSpc>
               <a:buNone/>
             </a:pPr>
-            <a:fld id="{D58C7AB3-2528-4329-B334-920866CDB05D}" type="slidenum">
+            <a:fld id="{442809D1-0252-448E-8D4F-C704DDD05EFD}" type="slidenum">
+              <a:rPr lang="en-US" sz="1200" b="0" u="none" strike="noStrike">
+                <a:solidFill>
+                  <a:schemeClr val="dk1"/>
+                </a:solidFill>
+                <a:effectLst/>
+                <a:uFillTx/>
+                <a:latin typeface="+mn-lt"/>
+                <a:ea typeface="+mn-ea"/>
+              </a:rPr>
+              <a:t>13</a:t>
+            </a:fld>
+            <a:endParaRPr lang="uk-UA" sz="1200" b="0" u="none" strike="noStrike">
+              <a:solidFill>
+                <a:srgbClr val="000000"/>
+              </a:solidFill>
+              <a:effectLst/>
+              <a:uFillTx/>
+              <a:latin typeface="Times New Roman"/>
+            </a:endParaRPr>
+          </a:p>
+        </p:txBody>
+      </p:sp>
+    </p:spTree>
+  </p:cSld>
+</p:notes>
+</file>
+
+<file path=ppt/notesSlides/notesSlide13.xml><?xml version="1.0" encoding="utf-8"?>
+<p:notes xmlns:a="http://schemas.openxmlformats.org/drawingml/2006/main" xmlns:p="http://schemas.openxmlformats.org/presentationml/2006/main" xmlns:r="http://schemas.openxmlformats.org/officeDocument/2006/relationships" xmlns:p14="http://schemas.microsoft.com/office/powerpoint/2010/main" xmlns:p15="http://schemas.microsoft.com/office/powerpoint/2012/main" xmlns:mc="http://schemas.openxmlformats.org/markup-compatibility/2006">
+  <p:cSld>
+    <p:spTree>
+      <p:nvGrpSpPr>
+        <p:cNvPr id="1" name=""/>
+        <p:cNvGrpSpPr/>
+        <p:nvPr/>
+      </p:nvGrpSpPr>
+      <p:grpSpPr>
+        <a:xfrm>
+          <a:off x="0" y="0"/>
+          <a:ext cx="0" cy="0"/>
+          <a:chOff x="0" y="0"/>
+          <a:chExt cx="0" cy="0"/>
+        </a:xfrm>
+      </p:grpSpPr>
+      <p:sp>
+        <p:nvSpPr>
+          <p:cNvPr id="209" name="PlaceHolder 1"/>
+          <p:cNvSpPr>
+            <a:spLocks noGrp="1"/>
+          </p:cNvSpPr>
+          <p:nvPr>
+            <p:ph type="sldImg"/>
+          </p:nvPr>
+        </p:nvSpPr>
+        <p:spPr>
+          <a:xfrm>
+            <a:off x="685800" y="1143000"/>
+            <a:ext cx="5486040" cy="3085920"/>
+          </a:xfrm>
+          <a:prstGeom prst="rect">
+            <a:avLst/>
+          </a:prstGeom>
+          <a:ln w="0">
+            <a:noFill/>
+          </a:ln>
+        </p:spPr>
+      </p:sp>
+      <p:sp>
+        <p:nvSpPr>
+          <p:cNvPr id="210" name="PlaceHolder 2"/>
+          <p:cNvSpPr>
+            <a:spLocks noGrp="1"/>
+          </p:cNvSpPr>
+          <p:nvPr>
+            <p:ph type="body"/>
+          </p:nvPr>
+        </p:nvSpPr>
+        <p:spPr>
+          <a:xfrm>
+            <a:off x="685800" y="4400640"/>
+            <a:ext cx="5486040" cy="3600000"/>
+          </a:xfrm>
+          <a:prstGeom prst="rect">
+            <a:avLst/>
+          </a:prstGeom>
+          <a:noFill/>
+          <a:ln w="0">
+            <a:noFill/>
+          </a:ln>
+        </p:spPr>
+        <p:txBody>
+          <a:bodyPr lIns="91440" tIns="45720" rIns="91440" bIns="45720" anchor="t">
+            <a:noAutofit/>
+          </a:bodyPr>
+          <a:p>
+            <a:pPr indent="0" algn="l">
+              <a:lnSpc>
+                <a:spcPct val="100000"/>
+              </a:lnSpc>
+              <a:buNone/>
+            </a:pPr>
+            <a:r>
+              <a:rPr lang="en-US" sz="2000" b="0" u="none" strike="noStrike">
+                <a:solidFill>
+                  <a:srgbClr val="000000"/>
+                </a:solidFill>
+                <a:effectLst/>
+                <a:uFillTx/>
+                <a:latin typeface="Arial"/>
+              </a:rPr>
+              <a:t>Дякую за увагу! Готовий відповісти на ваші запитання. Можливі запитання: чому ESP32, а не Raspberry Pi; що буде, якщо API недоступний; як часто оновлюються дані; чому сирена лише при тривозі на всю область; як вирішено синхронізацію задач; навіщо ПІ-регулятор. Відповіді — у документі з промовою.</a:t>
+            </a:r>
+            <a:endParaRPr lang="uk-UA" sz="2000" b="0" u="none" strike="noStrike">
+              <a:solidFill>
+                <a:srgbClr val="000000"/>
+              </a:solidFill>
+              <a:effectLst/>
+              <a:uFillTx/>
+              <a:latin typeface="Arial"/>
+            </a:endParaRPr>
+          </a:p>
+        </p:txBody>
+      </p:sp>
+      <p:sp>
+        <p:nvSpPr>
+          <p:cNvPr id="211" name="PlaceHolder 3"/>
+          <p:cNvSpPr>
+            <a:spLocks noGrp="1"/>
+          </p:cNvSpPr>
+          <p:nvPr>
+            <p:ph type="sldNum" idx="16"/>
+          </p:nvPr>
+        </p:nvSpPr>
+        <p:spPr>
+          <a:xfrm>
+            <a:off x="3884760" y="8685360"/>
+            <a:ext cx="2971440" cy="458280"/>
+          </a:xfrm>
+          <a:prstGeom prst="rect">
+            <a:avLst/>
+          </a:prstGeom>
+          <a:noFill/>
+          <a:ln w="0">
+            <a:noFill/>
+          </a:ln>
+        </p:spPr>
+        <p:txBody>
+          <a:bodyPr lIns="91440" tIns="45720" rIns="91440" bIns="45720" anchor="b">
+            <a:noAutofit/>
+          </a:bodyPr>
+          <a:lstStyle>
+            <a:lvl1pPr indent="0" algn="r" defTabSz="914400">
+              <a:lnSpc>
+                <a:spcPct val="100000"/>
+              </a:lnSpc>
+              <a:buNone/>
+              <a:defRPr lang="en-US" sz="1200" b="0" u="none" strike="noStrike">
+                <a:solidFill>
+                  <a:schemeClr val="dk1"/>
+                </a:solidFill>
+                <a:effectLst/>
+                <a:uFillTx/>
+                <a:latin typeface="+mn-lt"/>
+                <a:ea typeface="+mn-ea"/>
+              </a:defRPr>
+            </a:lvl1pPr>
+          </a:lstStyle>
+          <a:p>
+            <a:pPr indent="0" algn="r" defTabSz="914400">
+              <a:lnSpc>
+                <a:spcPct val="100000"/>
+              </a:lnSpc>
+              <a:buNone/>
+            </a:pPr>
+            <a:fld id="{D23BB0A8-79DE-4B84-80E9-1B367E20C098}" type="slidenum">
               <a:rPr lang="en-US" sz="1200" b="0" u="none" strike="noStrike">
                 <a:solidFill>
                   <a:schemeClr val="dk1"/>
@@ -1122,7 +1298,7 @@
       </p:grpSpPr>
       <p:sp>
         <p:nvSpPr>
-          <p:cNvPr id="170" name="PlaceHolder 1"/>
+          <p:cNvPr id="176" name="PlaceHolder 1"/>
           <p:cNvSpPr>
             <a:spLocks noGrp="1"/>
           </p:cNvSpPr>
@@ -1145,7 +1321,7 @@
       </p:sp>
       <p:sp>
         <p:nvSpPr>
-          <p:cNvPr id="171" name="PlaceHolder 2"/>
+          <p:cNvPr id="177" name="PlaceHolder 2"/>
           <p:cNvSpPr>
             <a:spLocks noGrp="1"/>
           </p:cNvSpPr>
@@ -1201,7 +1377,7 @@
       </p:sp>
       <p:sp>
         <p:nvSpPr>
-          <p:cNvPr id="172" name="PlaceHolder 3"/>
+          <p:cNvPr id="178" name="PlaceHolder 3"/>
           <p:cNvSpPr>
             <a:spLocks noGrp="1"/>
           </p:cNvSpPr>
@@ -1250,7 +1426,7 @@
               </a:lnSpc>
               <a:buNone/>
             </a:pPr>
-            <a:fld id="{45B03586-A962-4926-AD17-67CEA288D1D9}" type="slidenum">
+            <a:fld id="{9ED638A5-19F9-44B5-A025-23DB113146F4}" type="slidenum">
               <a:rPr lang="en-US" sz="1200" b="0" u="none" strike="noStrike">
                 <a:solidFill>
                   <a:schemeClr val="dk1"/>
@@ -1260,7 +1436,7 @@
                 <a:latin typeface="+mn-lt"/>
                 <a:ea typeface="+mn-ea"/>
               </a:rPr>
-              <a:t>12</a:t>
+              <a:t>13</a:t>
             </a:fld>
             <a:endParaRPr lang="uk-UA" sz="1200" b="0" u="none" strike="noStrike">
               <a:solidFill>
@@ -1297,7 +1473,7 @@
       </p:grpSpPr>
       <p:sp>
         <p:nvSpPr>
-          <p:cNvPr id="173" name="PlaceHolder 1"/>
+          <p:cNvPr id="179" name="PlaceHolder 1"/>
           <p:cNvSpPr>
             <a:spLocks noGrp="1"/>
           </p:cNvSpPr>
@@ -1320,7 +1496,7 @@
       </p:sp>
       <p:sp>
         <p:nvSpPr>
-          <p:cNvPr id="174" name="PlaceHolder 2"/>
+          <p:cNvPr id="180" name="PlaceHolder 2"/>
           <p:cNvSpPr>
             <a:spLocks noGrp="1"/>
           </p:cNvSpPr>
@@ -1376,7 +1552,7 @@
       </p:sp>
       <p:sp>
         <p:nvSpPr>
-          <p:cNvPr id="175" name="PlaceHolder 3"/>
+          <p:cNvPr id="181" name="PlaceHolder 3"/>
           <p:cNvSpPr>
             <a:spLocks noGrp="1"/>
           </p:cNvSpPr>
@@ -1425,7 +1601,7 @@
               </a:lnSpc>
               <a:buNone/>
             </a:pPr>
-            <a:fld id="{C1542553-528C-4AAD-881A-F54BE1580DA7}" type="slidenum">
+            <a:fld id="{DB837ED2-53AE-47B5-88CD-387D80BD8866}" type="slidenum">
               <a:rPr lang="en-US" sz="1200" b="0" u="none" strike="noStrike">
                 <a:solidFill>
                   <a:schemeClr val="dk1"/>
@@ -1435,7 +1611,7 @@
                 <a:latin typeface="+mn-lt"/>
                 <a:ea typeface="+mn-ea"/>
               </a:rPr>
-              <a:t>12</a:t>
+              <a:t>13</a:t>
             </a:fld>
             <a:endParaRPr lang="uk-UA" sz="1200" b="0" u="none" strike="noStrike">
               <a:solidFill>
@@ -1472,7 +1648,7 @@
       </p:grpSpPr>
       <p:sp>
         <p:nvSpPr>
-          <p:cNvPr id="176" name="PlaceHolder 1"/>
+          <p:cNvPr id="182" name="PlaceHolder 1"/>
           <p:cNvSpPr>
             <a:spLocks noGrp="1"/>
           </p:cNvSpPr>
@@ -1495,7 +1671,7 @@
       </p:sp>
       <p:sp>
         <p:nvSpPr>
-          <p:cNvPr id="177" name="PlaceHolder 2"/>
+          <p:cNvPr id="183" name="PlaceHolder 2"/>
           <p:cNvSpPr>
             <a:spLocks noGrp="1"/>
           </p:cNvSpPr>
@@ -1536,7 +1712,7 @@
                 <a:uFillTx/>
                 <a:latin typeface="Arial"/>
               </a:rPr>
-              <a:t>Основа пристрою — плата LILYGO T-Display з мікроконтролером ESP32 і кольоровим дисплеєм ST7789 на 240×135 пікселів. ESP32 я вибрав, бо він має вбудований Wi-Fi, два ядра й апаратну підтримку TLS за невисокої ціни. До плати підключено: п'єзозумер для сирени, що керується через ШІМ (модуль LEDC); фоторезистор на вході АЦП для автоматичного регулювання яскравості; два світлодіоди для індикації стану системи й Wi-Fi; вбудовану кнопку BOOT, через яку вмикається режим налаштування.</a:t>
+              <a:t>Основа пристрою — плата LILYGO T-Display з мікроконтролером ESP32 і кольоровим дисплеєм ST7789 на 240×135 пікселів. ESP32 я вибрав, бо він має вбудований Wi-Fi, два ядра й апаратну підтримку TLS за невисокої ціни. До плати підключено: п'єзозумер для сирени, що керується через ШІМ (модуль LEDC); фоторезистор на вході АЦП для автоматичного регулювання яскравості; два світлодіоди для індикації стану системи й Wi-Fi; вбудовану кнопку BOOT, через яку вмикається режим налаштування; акумулятор Li-Pol 602030 на 3.7 В і 300 мА·год із платою захисту — у штатний роз'єм плати, його заряд плата вимірює на GPIO34 і показує на веб-сторінці.</a:t>
             </a:r>
             <a:endParaRPr lang="uk-UA" sz="2000" b="0" u="none" strike="noStrike">
               <a:solidFill>
@@ -1551,7 +1727,7 @@
       </p:sp>
       <p:sp>
         <p:nvSpPr>
-          <p:cNvPr id="178" name="PlaceHolder 3"/>
+          <p:cNvPr id="184" name="PlaceHolder 3"/>
           <p:cNvSpPr>
             <a:spLocks noGrp="1"/>
           </p:cNvSpPr>
@@ -1600,7 +1776,7 @@
               </a:lnSpc>
               <a:buNone/>
             </a:pPr>
-            <a:fld id="{18EBC3C5-EE79-488D-A895-B20518810BCB}" type="slidenum">
+            <a:fld id="{A6103F5E-7E20-45A7-BF61-A851F7410AA4}" type="slidenum">
               <a:rPr lang="en-US" sz="1200" b="0" u="none" strike="noStrike">
                 <a:solidFill>
                   <a:schemeClr val="dk1"/>
@@ -1610,7 +1786,7 @@
                 <a:latin typeface="+mn-lt"/>
                 <a:ea typeface="+mn-ea"/>
               </a:rPr>
-              <a:t>12</a:t>
+              <a:t>13</a:t>
             </a:fld>
             <a:endParaRPr lang="uk-UA" sz="1200" b="0" u="none" strike="noStrike">
               <a:solidFill>
@@ -1647,7 +1823,7 @@
       </p:grpSpPr>
       <p:sp>
         <p:nvSpPr>
-          <p:cNvPr id="179" name="PlaceHolder 1"/>
+          <p:cNvPr id="185" name="PlaceHolder 1"/>
           <p:cNvSpPr>
             <a:spLocks noGrp="1"/>
           </p:cNvSpPr>
@@ -1670,7 +1846,7 @@
       </p:sp>
       <p:sp>
         <p:nvSpPr>
-          <p:cNvPr id="180" name="PlaceHolder 2"/>
+          <p:cNvPr id="186" name="PlaceHolder 2"/>
           <p:cNvSpPr>
             <a:spLocks noGrp="1"/>
           </p:cNvSpPr>
@@ -1711,7 +1887,7 @@
                 <a:uFillTx/>
                 <a:latin typeface="Arial"/>
               </a:rPr>
-              <a:t>Програмне забезпечення написано мовою C на фреймворку ESP-IDF у середовищі PlatformIO. В основі — операційна система реального часу FreeRTOS. Чому не простий нескінченний цикл? Пристрій має одночасно тримати Wi-Fi, робити мережеві запити, що можуть тривати секунди, малювати на дисплеї, реагувати на кнопку і регулювати яскравість. В одному циклі повільний HTTP-запит блокував би все інше. Тому систему розбито на сім задач FreeRTOS, у кожної своя відповідальність. Головний потік даних: fetch_task отримує дані з API й кладе результат у чергу, render_task забирає його, малює карту і за потреби вмикає сирену. Паралельно працюють задачі Wi-Fi, сирени, кнопки, яскравості та моніторингу. Задачі обмінюються даними через черги FreeRTOS, а спільний стан захищено м'ютексом. Код поділено на незалежні компоненти: драйвери обладнання окремо, задачі окремо.</a:t>
+              <a:t>Зовнішніх деталей небагато. Дисплей, його підсвітка й кнопка BOOT уже є на самій платі. Ліворуч, біля GPIO2 і GPIO15, — світлодіоди: тривоги через резистор 330 Ом на GPIO2 і Wi-Fi через 330 Ом на GPIO15. Праворуч — датчик освітлення і зумер. Фоторезистор і резистор 10 кОм утворюють дільник напруги, середня точка йде на GPIO33 — це вхід ADC1, бо АЦП другого блоку під час роботи Wi-Fi недоступний. Живлення 3V3 для дільника береться з лівого боку плати. Пасивний п'єзозумер підключено через резистор 220 Ом до GPIO25 (ШІМ). Знизу — акумулятор Li-Pol 602030, 3.7 В, 300 мА·год із платою захисту. Він вставляється у штатний роз'єм BAT, заряджається від USB вбудованим контролером. Напругу батареї плата подає на GPIO34 через дільник, тож для показника заряду додаткові дроти не потрібні. У розриві червоного проводу «+» стоїть вимикач живлення з фіксацією SW2: ним пристрій вимикається, коли працює від батареї.</a:t>
             </a:r>
             <a:endParaRPr lang="uk-UA" sz="2000" b="0" u="none" strike="noStrike">
               <a:solidFill>
@@ -1726,7 +1902,7 @@
       </p:sp>
       <p:sp>
         <p:nvSpPr>
-          <p:cNvPr id="181" name="PlaceHolder 3"/>
+          <p:cNvPr id="187" name="PlaceHolder 3"/>
           <p:cNvSpPr>
             <a:spLocks noGrp="1"/>
           </p:cNvSpPr>
@@ -1775,7 +1951,7 @@
               </a:lnSpc>
               <a:buNone/>
             </a:pPr>
-            <a:fld id="{430E273F-12D4-47F0-96F5-69F9BA982108}" type="slidenum">
+            <a:fld id="{48E2BC08-4B51-433A-933B-0C28A5E86D3C}" type="slidenum">
               <a:rPr lang="en-US" sz="1200" b="0" u="none" strike="noStrike">
                 <a:solidFill>
                   <a:schemeClr val="dk1"/>
@@ -1785,7 +1961,7 @@
                 <a:latin typeface="+mn-lt"/>
                 <a:ea typeface="+mn-ea"/>
               </a:rPr>
-              <a:t>12</a:t>
+              <a:t>13</a:t>
             </a:fld>
             <a:endParaRPr lang="uk-UA" sz="1200" b="0" u="none" strike="noStrike">
               <a:solidFill>
@@ -1822,7 +1998,7 @@
       </p:grpSpPr>
       <p:sp>
         <p:nvSpPr>
-          <p:cNvPr id="182" name="PlaceHolder 1"/>
+          <p:cNvPr id="188" name="PlaceHolder 1"/>
           <p:cNvSpPr>
             <a:spLocks noGrp="1"/>
           </p:cNvSpPr>
@@ -1845,7 +2021,7 @@
       </p:sp>
       <p:sp>
         <p:nvSpPr>
-          <p:cNvPr id="183" name="PlaceHolder 2"/>
+          <p:cNvPr id="189" name="PlaceHolder 2"/>
           <p:cNvSpPr>
             <a:spLocks noGrp="1"/>
           </p:cNvSpPr>
@@ -1886,7 +2062,7 @@
                 <a:uFillTx/>
                 <a:latin typeface="Arial"/>
               </a:rPr>
-              <a:t>Спершу я використовував загальний ендпоінт API, який повертає повний список тривог у форматі JSON. Під час масових тривог така відповідь виявилася завеликою для пам'яті мікроконтролера. До того ж вона містила й інші типи загроз, наприклад загрозу артобстрілу. Тому я перейшов на спеціальний IoT-ендпоінт alerts.in.ua. Він повертає рядок лише з 27 символів, по одному на кожну область: A — тривога по всій області, P — у частині області, N — тривоги немає. Відповідь займає близько 30 байт замість кількох десятків кілобайт. На дисплеї червоним позначено області, де тривога на всю територію, янтарним — області з частковою тривогою. Якщо дані отримати не вдалося, на екрані напис ERR. Важливе рішення: кожен кадр малюється з нуля. Застарілі дані не лишаються на екрані після помилки, бо показати користувачу стару «відсутність тривоги» небезпечніше, ніж чесно показати помилку.</a:t>
+              <a:t>Програмне забезпечення написано мовою C на фреймворку ESP-IDF у середовищі PlatformIO. В основі — операційна система реального часу FreeRTOS. Чому не простий нескінченний цикл? Пристрій має одночасно тримати Wi-Fi, робити мережеві запити, що можуть тривати секунди, малювати на дисплеї, реагувати на кнопку і регулювати яскравість. В одному циклі повільний HTTP-запит блокував би все інше. Тому систему розбито на сім задач FreeRTOS, у кожної своя відповідальність. Головний потік даних: fetch_task отримує дані з API й кладе результат у чергу, render_task забирає його, малює карту і за потреби вмикає сирену. Паралельно працюють задачі Wi-Fi, сирени, кнопки, яскравості та моніторингу. Задачі обмінюються даними через черги FreeRTOS, а спільний стан захищено м'ютексом. Код поділено на незалежні компоненти: драйвери обладнання окремо, задачі окремо.</a:t>
             </a:r>
             <a:endParaRPr lang="uk-UA" sz="2000" b="0" u="none" strike="noStrike">
               <a:solidFill>
@@ -1901,7 +2077,7 @@
       </p:sp>
       <p:sp>
         <p:nvSpPr>
-          <p:cNvPr id="184" name="PlaceHolder 3"/>
+          <p:cNvPr id="190" name="PlaceHolder 3"/>
           <p:cNvSpPr>
             <a:spLocks noGrp="1"/>
           </p:cNvSpPr>
@@ -1950,7 +2126,7 @@
               </a:lnSpc>
               <a:buNone/>
             </a:pPr>
-            <a:fld id="{C533FD65-1CE3-4A5E-A437-C79BFDA26F66}" type="slidenum">
+            <a:fld id="{54166EBC-7826-4961-9873-23702444F635}" type="slidenum">
               <a:rPr lang="en-US" sz="1200" b="0" u="none" strike="noStrike">
                 <a:solidFill>
                   <a:schemeClr val="dk1"/>
@@ -1960,7 +2136,7 @@
                 <a:latin typeface="+mn-lt"/>
                 <a:ea typeface="+mn-ea"/>
               </a:rPr>
-              <a:t>12</a:t>
+              <a:t>13</a:t>
             </a:fld>
             <a:endParaRPr lang="uk-UA" sz="1200" b="0" u="none" strike="noStrike">
               <a:solidFill>
@@ -1997,7 +2173,7 @@
       </p:grpSpPr>
       <p:sp>
         <p:nvSpPr>
-          <p:cNvPr id="185" name="PlaceHolder 1"/>
+          <p:cNvPr id="191" name="PlaceHolder 1"/>
           <p:cNvSpPr>
             <a:spLocks noGrp="1"/>
           </p:cNvSpPr>
@@ -2020,7 +2196,7 @@
       </p:sp>
       <p:sp>
         <p:nvSpPr>
-          <p:cNvPr id="186" name="PlaceHolder 2"/>
+          <p:cNvPr id="192" name="PlaceHolder 2"/>
           <p:cNvSpPr>
             <a:spLocks noGrp="1"/>
           </p:cNvSpPr>
@@ -2061,7 +2237,7 @@
                 <a:uFillTx/>
                 <a:latin typeface="Arial"/>
               </a:rPr>
-              <a:t>Надійності я приділив найбільше уваги. Watchdog-таймер: кожна задача підписана на апаратний сторожовий таймер. Якщо будь-яка задача зависне, пристрій сам перезавантажиться. Усі довгі очікування розбито на короткі інтервали, щоб таймер не спрацьовував хибно. Валідація даних: парсер відхиляє будь-яку некоректну відповідь — неправильну довжину, невідомий символ, зіпсований JSON. Мережа: перепідключення з експоненційною затримкою від 2 до 60 секунд, щоб не перевантажувати мережу. Після серії невдач пристрій сам переходить у режим налаштування. Безпека: з'єднання з API захищене TLS з перевіркою сертифіката. API-токен зберігається у файлі .env, який не потрапляє в систему контролю версій.</a:t>
+              <a:t>Спершу я використовував загальний ендпоінт API, який повертає повний список тривог у форматі JSON. Під час масових тривог така відповідь виявилася завеликою для пам'яті мікроконтролера. До того ж вона містила й інші типи загроз, наприклад загрозу артобстрілу. Тому я перейшов на спеціальний IoT-ендпоінт alerts.in.ua. Він повертає рядок лише з 27 символів, по одному на кожну область: A — тривога по всій області, P — у частині області, N — тривоги немає. Відповідь займає близько 30 байт замість кількох десятків кілобайт. На дисплеї червоним позначено області, де тривога на всю територію, янтарним — області з частковою тривогою. Якщо дані отримати не вдалося, на екрані напис ERR. Важливе рішення: кожен кадр малюється з нуля. Застарілі дані не лишаються на екрані після помилки, бо показати користувачу стару «відсутність тривоги» небезпечніше, ніж чесно показати помилку.</a:t>
             </a:r>
             <a:endParaRPr lang="uk-UA" sz="2000" b="0" u="none" strike="noStrike">
               <a:solidFill>
@@ -2076,7 +2252,7 @@
       </p:sp>
       <p:sp>
         <p:nvSpPr>
-          <p:cNvPr id="187" name="PlaceHolder 3"/>
+          <p:cNvPr id="193" name="PlaceHolder 3"/>
           <p:cNvSpPr>
             <a:spLocks noGrp="1"/>
           </p:cNvSpPr>
@@ -2125,7 +2301,7 @@
               </a:lnSpc>
               <a:buNone/>
             </a:pPr>
-            <a:fld id="{5789C1E8-2AAF-483A-89DC-8725CF6D504F}" type="slidenum">
+            <a:fld id="{5E7A60A4-4CE0-4AB7-BA24-ED51D7ECADF3}" type="slidenum">
               <a:rPr lang="en-US" sz="1200" b="0" u="none" strike="noStrike">
                 <a:solidFill>
                   <a:schemeClr val="dk1"/>
@@ -2135,7 +2311,7 @@
                 <a:latin typeface="+mn-lt"/>
                 <a:ea typeface="+mn-ea"/>
               </a:rPr>
-              <a:t>12</a:t>
+              <a:t>13</a:t>
             </a:fld>
             <a:endParaRPr lang="uk-UA" sz="1200" b="0" u="none" strike="noStrike">
               <a:solidFill>
@@ -2172,7 +2348,7 @@
       </p:grpSpPr>
       <p:sp>
         <p:nvSpPr>
-          <p:cNvPr id="188" name="PlaceHolder 1"/>
+          <p:cNvPr id="194" name="PlaceHolder 1"/>
           <p:cNvSpPr>
             <a:spLocks noGrp="1"/>
           </p:cNvSpPr>
@@ -2195,7 +2371,7 @@
       </p:sp>
       <p:sp>
         <p:nvSpPr>
-          <p:cNvPr id="189" name="PlaceHolder 2"/>
+          <p:cNvPr id="195" name="PlaceHolder 2"/>
           <p:cNvSpPr>
             <a:spLocks noGrp="1"/>
           </p:cNvSpPr>
@@ -2236,7 +2412,7 @@
                 <a:uFillTx/>
                 <a:latin typeface="Arial"/>
               </a:rPr>
-              <a:t>Налаштувати пристрій може будь-хто без програмування. Досить утримати кнопку три секунди, і пристрій створить власну Wi-Fi-мережу з веб-сторінкою. На ній можна вибрати свою область і домашню мережу. Налаштування зберігаються в енергонезалежній пам'яті (NVS). Яскравість підсвітки регулюється замкненим контуром керування: ПІ-регулятор з обмеженням інтегральної складової (anti-windup) порівнює бажану яскравість, яка залежить від освітлення, з поточною і плавно її коригує. Вночі дисплей не сліпить, а вдень його добре видно.</a:t>
+              <a:t>Надійності я приділив найбільше уваги. Watchdog-таймер: кожна задача підписана на апаратний сторожовий таймер. Якщо будь-яка задача зависне, пристрій сам перезавантажиться. Усі довгі очікування розбито на короткі інтервали, щоб таймер не спрацьовував хибно. Валідація даних: парсер відхиляє будь-яку некоректну відповідь — неправильну довжину, невідомий символ, зіпсований JSON. Мережа: перепідключення з експоненційною затримкою від 2 до 60 секунд, щоб не перевантажувати мережу. Після серії невдач пристрій сам переходить у режим налаштування. Безпека: з'єднання з API захищене TLS з перевіркою сертифіката. API-токен зберігається у файлі .env, який не потрапляє в систему контролю версій.</a:t>
             </a:r>
             <a:endParaRPr lang="uk-UA" sz="2000" b="0" u="none" strike="noStrike">
               <a:solidFill>
@@ -2251,7 +2427,7 @@
       </p:sp>
       <p:sp>
         <p:nvSpPr>
-          <p:cNvPr id="190" name="PlaceHolder 3"/>
+          <p:cNvPr id="196" name="PlaceHolder 3"/>
           <p:cNvSpPr>
             <a:spLocks noGrp="1"/>
           </p:cNvSpPr>
@@ -2300,7 +2476,7 @@
               </a:lnSpc>
               <a:buNone/>
             </a:pPr>
-            <a:fld id="{324D9632-1CEC-447A-B26F-5E99D3009B22}" type="slidenum">
+            <a:fld id="{03CD336D-FEC9-45AB-A9AD-06B35D996C05}" type="slidenum">
               <a:rPr lang="en-US" sz="1200" b="0" u="none" strike="noStrike">
                 <a:solidFill>
                   <a:schemeClr val="dk1"/>
@@ -2310,7 +2486,7 @@
                 <a:latin typeface="+mn-lt"/>
                 <a:ea typeface="+mn-ea"/>
               </a:rPr>
-              <a:t>12</a:t>
+              <a:t>13</a:t>
             </a:fld>
             <a:endParaRPr lang="uk-UA" sz="1200" b="0" u="none" strike="noStrike">
               <a:solidFill>
@@ -2347,7 +2523,7 @@
       </p:grpSpPr>
       <p:sp>
         <p:nvSpPr>
-          <p:cNvPr id="191" name="PlaceHolder 1"/>
+          <p:cNvPr id="197" name="PlaceHolder 1"/>
           <p:cNvSpPr>
             <a:spLocks noGrp="1"/>
           </p:cNvSpPr>
@@ -2370,7 +2546,7 @@
       </p:sp>
       <p:sp>
         <p:nvSpPr>
-          <p:cNvPr id="192" name="PlaceHolder 2"/>
+          <p:cNvPr id="198" name="PlaceHolder 2"/>
           <p:cNvSpPr>
             <a:spLocks noGrp="1"/>
           </p:cNvSpPr>
@@ -2411,7 +2587,7 @@
                 <a:uFillTx/>
                 <a:latin typeface="Arial"/>
               </a:rPr>
-              <a:t>Ключову логіку винесено в «чисті» функції, які не залежать від обладнання. Тому їх можна тестувати на звичайному комп'ютері фреймворком Unity, тим самим, що вбудований в ESP-IDF. 16 тестів парсера відповіді API: пошкоджені дані, граничні випадки, відображення міст Київ і Севастополь на області. 9 тестів регулятора яскравості: збіжність, межі, anti-windup, поведінка при відмові датчика. Усі тести проходять успішно. Окремо підготовано набір тестів, які запускаються безпосередньо на мікроконтролері.</a:t>
+              <a:t>Налаштувати пристрій може будь-хто без програмування. Досить утримати кнопку три секунди, і пристрій створить власну Wi-Fi-мережу з веб-сторінкою. На ній можна вибрати свою область і домашню мережу. Налаштування зберігаються в енергонезалежній пам'яті (NVS). Яскравість підсвітки регулюється замкненим контуром керування: ПІ-регулятор з обмеженням інтегральної складової (anti-windup) порівнює бажану яскравість, яка залежить від освітлення, з поточною і плавно її коригує. Вночі дисплей не сліпить, а вдень його добре видно.</a:t>
             </a:r>
             <a:endParaRPr lang="uk-UA" sz="2000" b="0" u="none" strike="noStrike">
               <a:solidFill>
@@ -2426,7 +2602,7 @@
       </p:sp>
       <p:sp>
         <p:nvSpPr>
-          <p:cNvPr id="193" name="PlaceHolder 3"/>
+          <p:cNvPr id="199" name="PlaceHolder 3"/>
           <p:cNvSpPr>
             <a:spLocks noGrp="1"/>
           </p:cNvSpPr>
@@ -2475,7 +2651,7 @@
               </a:lnSpc>
               <a:buNone/>
             </a:pPr>
-            <a:fld id="{FFD77AE0-D270-4E44-B0CE-C99E690DB824}" type="slidenum">
+            <a:fld id="{3FEC0D54-ACDB-4260-B2E6-4C9E3D286C42}" type="slidenum">
               <a:rPr lang="en-US" sz="1200" b="0" u="none" strike="noStrike">
                 <a:solidFill>
                   <a:schemeClr val="dk1"/>
@@ -2485,7 +2661,7 @@
                 <a:latin typeface="+mn-lt"/>
                 <a:ea typeface="+mn-ea"/>
               </a:rPr>
-              <a:t>12</a:t>
+              <a:t>13</a:t>
             </a:fld>
             <a:endParaRPr lang="uk-UA" sz="1200" b="0" u="none" strike="noStrike">
               <a:solidFill>
@@ -3346,7 +3522,7 @@
     <p:bg>
       <p:bgPr>
         <a:solidFill>
-          <a:srgbClr val="F5F2EC"/>
+          <a:srgbClr val="121821"/>
         </a:solidFill>
       </p:bgPr>
     </p:bg>
@@ -3366,7 +3542,7 @@
       </p:grpSpPr>
       <p:sp>
         <p:nvSpPr>
-          <p:cNvPr id="138" name="Text 0"/>
+          <p:cNvPr id="133" name="Text 0"/>
           <p:cNvSpPr/>
           <p:nvPr/>
         </p:nvSpPr>
@@ -3405,29 +3581,29 @@
             <a:r>
               <a:rPr lang="en-US" sz="1200" b="0" u="none" spc="99" strike="noStrike">
                 <a:solidFill>
-                  <a:srgbClr val="B8322B"/>
+                  <a:srgbClr val="E8A33D"/>
                 </a:solidFill>
                 <a:effectLst/>
                 <a:uFillTx/>
                 <a:latin typeface="JetBrains Mono"/>
                 <a:ea typeface="JetBrains Mono"/>
               </a:rPr>
-              <a:t>РЕЗУЛЬТАТИ</a:t>
+              <a:t>ТЕСТУВАННЯ</a:t>
             </a:r>
             <a:endParaRPr lang="uk-UA" sz="1200" b="0" u="none" strike="noStrike">
               <a:solidFill>
-                <a:srgbClr val="000000"/>
-              </a:solidFill>
-              <a:effectLst/>
-              <a:uFillTx/>
-              <a:latin typeface="Arial"/>
-            </a:endParaRPr>
-          </a:p>
-        </p:txBody>
-      </p:sp>
-      <p:sp>
-        <p:nvSpPr>
-          <p:cNvPr id="139" name="Text 1"/>
+                <a:srgbClr val="FFFFFF"/>
+              </a:solidFill>
+              <a:effectLst/>
+              <a:uFillTx/>
+              <a:latin typeface="Arial"/>
+            </a:endParaRPr>
+          </a:p>
+        </p:txBody>
+      </p:sp>
+      <p:sp>
+        <p:nvSpPr>
+          <p:cNvPr id="134" name="Text 1"/>
           <p:cNvSpPr/>
           <p:nvPr/>
         </p:nvSpPr>
@@ -3466,67 +3642,45 @@
             <a:r>
               <a:rPr lang="en-US" sz="3600" b="1" u="none" strike="noStrike">
                 <a:solidFill>
-                  <a:srgbClr val="121821"/>
+                  <a:srgbClr val="F5F2EC"/>
                 </a:solidFill>
                 <a:effectLst/>
                 <a:uFillTx/>
                 <a:latin typeface="IBM Plex Sans"/>
                 <a:ea typeface="IBM Plex Sans"/>
               </a:rPr>
-              <a:t>Що зроблено</a:t>
+              <a:t>Ключова логіка покрита тестами Unity</a:t>
             </a:r>
             <a:endParaRPr lang="uk-UA" sz="3600" b="0" u="none" strike="noStrike">
               <a:solidFill>
-                <a:srgbClr val="000000"/>
-              </a:solidFill>
-              <a:effectLst/>
-              <a:uFillTx/>
-              <a:latin typeface="Arial"/>
-            </a:endParaRPr>
-          </a:p>
-        </p:txBody>
-      </p:sp>
-      <p:pic>
-        <p:nvPicPr>
-          <p:cNvPr id="140" name="Image 0" descr="CheckCircle"/>
-          <p:cNvPicPr/>
-          <p:nvPr/>
-        </p:nvPicPr>
-        <p:blipFill>
-          <a:blip r:embed="rId1"/>
-          <a:stretch/>
-        </p:blipFill>
-        <p:spPr>
-          <a:xfrm>
-            <a:off x="812880" y="1935360"/>
-            <a:ext cx="304560" cy="304560"/>
-          </a:xfrm>
-          <a:prstGeom prst="rect">
-            <a:avLst/>
-          </a:prstGeom>
-          <a:noFill/>
-          <a:ln w="0">
-            <a:noFill/>
-          </a:ln>
-        </p:spPr>
-      </p:pic>
-      <p:sp>
-        <p:nvSpPr>
-          <p:cNvPr id="141" name="Text 2"/>
+                <a:srgbClr val="FFFFFF"/>
+              </a:solidFill>
+              <a:effectLst/>
+              <a:uFillTx/>
+              <a:latin typeface="Arial"/>
+            </a:endParaRPr>
+          </a:p>
+        </p:txBody>
+      </p:sp>
+      <p:sp>
+        <p:nvSpPr>
+          <p:cNvPr id="135" name="Shape 2"/>
           <p:cNvSpPr/>
           <p:nvPr/>
         </p:nvSpPr>
         <p:spPr>
           <a:xfrm>
-            <a:off x="1295280" y="1955880"/>
-            <a:ext cx="10386000" cy="289080"/>
-          </a:xfrm>
-          <a:prstGeom prst="rect">
-            <a:avLst/>
-          </a:prstGeom>
-          <a:noFill/>
-          <a:ln w="0">
-            <a:noFill/>
+            <a:off x="812520" y="1998720"/>
+            <a:ext cx="3386880" cy="360"/>
+          </a:xfrm>
+          <a:prstGeom prst="line">
+            <a:avLst/>
+          </a:prstGeom>
+          <a:ln w="25400">
+            <a:solidFill>
+              <a:srgbClr val="E8A33D"/>
+            </a:solidFill>
+            <a:round/>
           </a:ln>
         </p:spPr>
         <p:style>
@@ -3536,75 +3690,32 @@
           <a:fontRef idx="minor"/>
         </p:style>
         <p:txBody>
-          <a:bodyPr lIns="0" tIns="0" rIns="0" bIns="0" anchor="t">
-            <a:normAutofit/>
-          </a:bodyPr>
-          <a:p>
-            <a:pPr defTabSz="914400">
-              <a:lnSpc>
-                <a:spcPts val="2081"/>
-              </a:lnSpc>
-              <a:tabLst>
-                <a:tab pos="0" algn="l"/>
-              </a:tabLst>
-            </a:pPr>
-            <a:r>
-              <a:rPr lang="en-US" sz="1600" b="0" u="none" strike="noStrike">
-                <a:solidFill>
-                  <a:srgbClr val="121821"/>
-                </a:solidFill>
-                <a:effectLst/>
-                <a:uFillTx/>
-                <a:latin typeface="IBM Plex Sans"/>
-                <a:ea typeface="IBM Plex Sans"/>
-              </a:rPr>
-              <a:t>Пристрій показує карту тривог по всіх областях і подає сигнал для вибраної</a:t>
-            </a:r>
-            <a:endParaRPr lang="uk-UA" sz="1600" b="0" u="none" strike="noStrike">
-              <a:solidFill>
-                <a:srgbClr val="000000"/>
-              </a:solidFill>
-              <a:effectLst/>
-              <a:uFillTx/>
-              <a:latin typeface="Arial"/>
-            </a:endParaRPr>
-          </a:p>
-        </p:txBody>
-      </p:sp>
-      <p:pic>
-        <p:nvPicPr>
-          <p:cNvPr id="142" name="Image 1" descr="CheckCircle"/>
-          <p:cNvPicPr/>
-          <p:nvPr/>
-        </p:nvPicPr>
-        <p:blipFill>
-          <a:blip r:embed="rId2"/>
-          <a:stretch/>
-        </p:blipFill>
-        <p:spPr>
-          <a:xfrm>
-            <a:off x="812880" y="2418120"/>
-            <a:ext cx="304560" cy="304560"/>
-          </a:xfrm>
-          <a:prstGeom prst="rect">
-            <a:avLst/>
-          </a:prstGeom>
-          <a:noFill/>
-          <a:ln w="0">
-            <a:noFill/>
-          </a:ln>
-        </p:spPr>
-      </p:pic>
-      <p:sp>
-        <p:nvSpPr>
-          <p:cNvPr id="143" name="Text 3"/>
+          <a:bodyPr lIns="90000" tIns="-44640" rIns="90000" bIns="-44640" anchor="t" anchorCtr="1">
+            <a:noAutofit/>
+          </a:bodyPr>
+          <a:p>
+            <a:pPr/>
+            <a:endParaRPr lang="uk-UA" sz="1800" b="0" u="none" strike="noStrike">
+              <a:solidFill>
+                <a:srgbClr val="FFFFFF"/>
+              </a:solidFill>
+              <a:effectLst/>
+              <a:uFillTx/>
+              <a:latin typeface="Arial"/>
+            </a:endParaRPr>
+          </a:p>
+        </p:txBody>
+      </p:sp>
+      <p:sp>
+        <p:nvSpPr>
+          <p:cNvPr id="136" name="Text 3"/>
           <p:cNvSpPr/>
           <p:nvPr/>
         </p:nvSpPr>
         <p:spPr>
           <a:xfrm>
-            <a:off x="1295280" y="2438280"/>
-            <a:ext cx="10386000" cy="289080"/>
+            <a:off x="812880" y="2214720"/>
+            <a:ext cx="3488040" cy="1041120"/>
           </a:xfrm>
           <a:prstGeom prst="rect">
             <a:avLst/>
@@ -3627,69 +3738,45 @@
           <a:p>
             <a:pPr defTabSz="914400">
               <a:lnSpc>
-                <a:spcPts val="2081"/>
+                <a:spcPts val="7999"/>
               </a:lnSpc>
               <a:tabLst>
                 <a:tab pos="0" algn="l"/>
               </a:tabLst>
             </a:pPr>
             <a:r>
-              <a:rPr lang="en-US" sz="1600" b="0" u="none" strike="noStrike">
-                <a:solidFill>
-                  <a:srgbClr val="121821"/>
+              <a:rPr lang="en-US" sz="8000" b="1" u="none" strike="noStrike">
+                <a:solidFill>
+                  <a:srgbClr val="E8A33D"/>
                 </a:solidFill>
                 <a:effectLst/>
                 <a:uFillTx/>
                 <a:latin typeface="IBM Plex Sans"/>
                 <a:ea typeface="IBM Plex Sans"/>
               </a:rPr>
-              <a:t>Багатозадачна архітектура на FreeRTOS із сімома задачами</a:t>
+              <a:t>16</a:t>
             </a:r>
-            <a:endParaRPr lang="uk-UA" sz="1600" b="0" u="none" strike="noStrike">
-              <a:solidFill>
-                <a:srgbClr val="000000"/>
-              </a:solidFill>
-              <a:effectLst/>
-              <a:uFillTx/>
-              <a:latin typeface="Arial"/>
-            </a:endParaRPr>
-          </a:p>
-        </p:txBody>
-      </p:sp>
-      <p:pic>
-        <p:nvPicPr>
-          <p:cNvPr id="144" name="Image 2" descr="CheckCircle"/>
-          <p:cNvPicPr/>
-          <p:nvPr/>
-        </p:nvPicPr>
-        <p:blipFill>
-          <a:blip r:embed="rId3"/>
-          <a:stretch/>
-        </p:blipFill>
-        <p:spPr>
-          <a:xfrm>
-            <a:off x="812880" y="2900520"/>
-            <a:ext cx="304560" cy="304560"/>
-          </a:xfrm>
-          <a:prstGeom prst="rect">
-            <a:avLst/>
-          </a:prstGeom>
-          <a:noFill/>
-          <a:ln w="0">
-            <a:noFill/>
-          </a:ln>
-        </p:spPr>
-      </p:pic>
-      <p:sp>
-        <p:nvSpPr>
-          <p:cNvPr id="145" name="Text 4"/>
+            <a:endParaRPr lang="uk-UA" sz="8000" b="0" u="none" strike="noStrike">
+              <a:solidFill>
+                <a:srgbClr val="FFFFFF"/>
+              </a:solidFill>
+              <a:effectLst/>
+              <a:uFillTx/>
+              <a:latin typeface="Arial"/>
+            </a:endParaRPr>
+          </a:p>
+        </p:txBody>
+      </p:sp>
+      <p:sp>
+        <p:nvSpPr>
+          <p:cNvPr id="137" name="Text 4"/>
           <p:cNvSpPr/>
           <p:nvPr/>
         </p:nvSpPr>
         <p:spPr>
           <a:xfrm>
-            <a:off x="1295280" y="2921040"/>
-            <a:ext cx="10386000" cy="289080"/>
+            <a:off x="812880" y="3306960"/>
+            <a:ext cx="3488040" cy="289080"/>
           </a:xfrm>
           <a:prstGeom prst="rect">
             <a:avLst/>
@@ -3721,67 +3808,45 @@
             <a:r>
               <a:rPr lang="en-US" sz="1600" b="0" u="none" strike="noStrike">
                 <a:solidFill>
-                  <a:srgbClr val="121821"/>
+                  <a:srgbClr val="C9D1DC"/>
                 </a:solidFill>
                 <a:effectLst/>
                 <a:uFillTx/>
                 <a:latin typeface="IBM Plex Sans"/>
                 <a:ea typeface="IBM Plex Sans"/>
               </a:rPr>
-              <a:t>Захист від зависань, збоїв мережі й некоректних даних</a:t>
+              <a:t>тестів парсера відповіді API</a:t>
             </a:r>
             <a:endParaRPr lang="uk-UA" sz="1600" b="0" u="none" strike="noStrike">
               <a:solidFill>
-                <a:srgbClr val="000000"/>
-              </a:solidFill>
-              <a:effectLst/>
-              <a:uFillTx/>
-              <a:latin typeface="Arial"/>
-            </a:endParaRPr>
-          </a:p>
-        </p:txBody>
-      </p:sp>
-      <p:pic>
-        <p:nvPicPr>
-          <p:cNvPr id="146" name="Image 3" descr="CheckCircle"/>
-          <p:cNvPicPr/>
-          <p:nvPr/>
-        </p:nvPicPr>
-        <p:blipFill>
-          <a:blip r:embed="rId4"/>
-          <a:stretch/>
-        </p:blipFill>
-        <p:spPr>
-          <a:xfrm>
-            <a:off x="812880" y="3383280"/>
-            <a:ext cx="304560" cy="304560"/>
-          </a:xfrm>
-          <a:prstGeom prst="rect">
-            <a:avLst/>
-          </a:prstGeom>
-          <a:noFill/>
-          <a:ln w="0">
-            <a:noFill/>
-          </a:ln>
-        </p:spPr>
-      </p:pic>
-      <p:sp>
-        <p:nvSpPr>
-          <p:cNvPr id="147" name="Text 5"/>
+                <a:srgbClr val="FFFFFF"/>
+              </a:solidFill>
+              <a:effectLst/>
+              <a:uFillTx/>
+              <a:latin typeface="Arial"/>
+            </a:endParaRPr>
+          </a:p>
+        </p:txBody>
+      </p:sp>
+      <p:sp>
+        <p:nvSpPr>
+          <p:cNvPr id="138" name="Shape 5"/>
           <p:cNvSpPr/>
           <p:nvPr/>
         </p:nvSpPr>
         <p:spPr>
           <a:xfrm>
-            <a:off x="1295280" y="3403440"/>
-            <a:ext cx="10386000" cy="289080"/>
-          </a:xfrm>
-          <a:prstGeom prst="rect">
-            <a:avLst/>
-          </a:prstGeom>
-          <a:noFill/>
-          <a:ln w="0">
-            <a:noFill/>
+            <a:off x="4402440" y="1998720"/>
+            <a:ext cx="3386880" cy="360"/>
+          </a:xfrm>
+          <a:prstGeom prst="line">
+            <a:avLst/>
+          </a:prstGeom>
+          <a:ln w="25400">
+            <a:solidFill>
+              <a:srgbClr val="E8A33D"/>
+            </a:solidFill>
+            <a:round/>
           </a:ln>
         </p:spPr>
         <p:style>
@@ -3791,75 +3856,32 @@
           <a:fontRef idx="minor"/>
         </p:style>
         <p:txBody>
-          <a:bodyPr lIns="0" tIns="0" rIns="0" bIns="0" anchor="t">
-            <a:normAutofit/>
-          </a:bodyPr>
-          <a:p>
-            <a:pPr defTabSz="914400">
-              <a:lnSpc>
-                <a:spcPts val="2081"/>
-              </a:lnSpc>
-              <a:tabLst>
-                <a:tab pos="0" algn="l"/>
-              </a:tabLst>
-            </a:pPr>
-            <a:r>
-              <a:rPr lang="en-US" sz="1600" b="0" u="none" strike="noStrike">
-                <a:solidFill>
-                  <a:srgbClr val="121821"/>
-                </a:solidFill>
-                <a:effectLst/>
-                <a:uFillTx/>
-                <a:latin typeface="IBM Plex Sans"/>
-                <a:ea typeface="IBM Plex Sans"/>
-              </a:rPr>
-              <a:t>Налаштування через веб-інтерфейс без перепрошивки</a:t>
-            </a:r>
-            <a:endParaRPr lang="uk-UA" sz="1600" b="0" u="none" strike="noStrike">
-              <a:solidFill>
-                <a:srgbClr val="000000"/>
-              </a:solidFill>
-              <a:effectLst/>
-              <a:uFillTx/>
-              <a:latin typeface="Arial"/>
-            </a:endParaRPr>
-          </a:p>
-        </p:txBody>
-      </p:sp>
-      <p:pic>
-        <p:nvPicPr>
-          <p:cNvPr id="148" name="Image 4" descr="CheckCircle"/>
-          <p:cNvPicPr/>
-          <p:nvPr/>
-        </p:nvPicPr>
-        <p:blipFill>
-          <a:blip r:embed="rId5"/>
-          <a:stretch/>
-        </p:blipFill>
-        <p:spPr>
-          <a:xfrm>
-            <a:off x="812880" y="3865680"/>
-            <a:ext cx="304560" cy="304560"/>
-          </a:xfrm>
-          <a:prstGeom prst="rect">
-            <a:avLst/>
-          </a:prstGeom>
-          <a:noFill/>
-          <a:ln w="0">
-            <a:noFill/>
-          </a:ln>
-        </p:spPr>
-      </p:pic>
-      <p:sp>
-        <p:nvSpPr>
-          <p:cNvPr id="149" name="Text 6"/>
+          <a:bodyPr lIns="90000" tIns="-44640" rIns="90000" bIns="-44640" anchor="t" anchorCtr="1">
+            <a:noAutofit/>
+          </a:bodyPr>
+          <a:p>
+            <a:pPr/>
+            <a:endParaRPr lang="uk-UA" sz="1800" b="0" u="none" strike="noStrike">
+              <a:solidFill>
+                <a:srgbClr val="FFFFFF"/>
+              </a:solidFill>
+              <a:effectLst/>
+              <a:uFillTx/>
+              <a:latin typeface="Arial"/>
+            </a:endParaRPr>
+          </a:p>
+        </p:txBody>
+      </p:sp>
+      <p:sp>
+        <p:nvSpPr>
+          <p:cNvPr id="139" name="Text 6"/>
           <p:cNvSpPr/>
           <p:nvPr/>
         </p:nvSpPr>
         <p:spPr>
           <a:xfrm>
-            <a:off x="1295280" y="3886200"/>
-            <a:ext cx="10386000" cy="289080"/>
+            <a:off x="4402800" y="2214720"/>
+            <a:ext cx="3488040" cy="1041120"/>
           </a:xfrm>
           <a:prstGeom prst="rect">
             <a:avLst/>
@@ -3882,27 +3904,315 @@
           <a:p>
             <a:pPr defTabSz="914400">
               <a:lnSpc>
-                <a:spcPts val="2081"/>
+                <a:spcPts val="7999"/>
               </a:lnSpc>
               <a:tabLst>
                 <a:tab pos="0" algn="l"/>
               </a:tabLst>
             </a:pPr>
             <a:r>
-              <a:rPr lang="en-US" sz="1600" b="0" u="none" strike="noStrike">
-                <a:solidFill>
-                  <a:srgbClr val="121821"/>
+              <a:rPr lang="en-US" sz="8000" b="1" u="none" strike="noStrike">
+                <a:solidFill>
+                  <a:srgbClr val="E8A33D"/>
                 </a:solidFill>
                 <a:effectLst/>
                 <a:uFillTx/>
                 <a:latin typeface="IBM Plex Sans"/>
                 <a:ea typeface="IBM Plex Sans"/>
               </a:rPr>
-              <a:t>Ключова логіка покрита автоматичними тестами</a:t>
+              <a:t>9</a:t>
+            </a:r>
+            <a:endParaRPr lang="uk-UA" sz="8000" b="0" u="none" strike="noStrike">
+              <a:solidFill>
+                <a:srgbClr val="FFFFFF"/>
+              </a:solidFill>
+              <a:effectLst/>
+              <a:uFillTx/>
+              <a:latin typeface="Arial"/>
+            </a:endParaRPr>
+          </a:p>
+        </p:txBody>
+      </p:sp>
+      <p:sp>
+        <p:nvSpPr>
+          <p:cNvPr id="140" name="Text 7"/>
+          <p:cNvSpPr/>
+          <p:nvPr/>
+        </p:nvSpPr>
+        <p:spPr>
+          <a:xfrm>
+            <a:off x="4402800" y="3306960"/>
+            <a:ext cx="3488040" cy="289080"/>
+          </a:xfrm>
+          <a:prstGeom prst="rect">
+            <a:avLst/>
+          </a:prstGeom>
+          <a:noFill/>
+          <a:ln w="0">
+            <a:noFill/>
+          </a:ln>
+        </p:spPr>
+        <p:style>
+          <a:lnRef idx="0"/>
+          <a:fillRef idx="0"/>
+          <a:effectRef idx="0"/>
+          <a:fontRef idx="minor"/>
+        </p:style>
+        <p:txBody>
+          <a:bodyPr lIns="0" tIns="0" rIns="0" bIns="0" anchor="t">
+            <a:normAutofit/>
+          </a:bodyPr>
+          <a:p>
+            <a:pPr defTabSz="914400">
+              <a:lnSpc>
+                <a:spcPts val="2081"/>
+              </a:lnSpc>
+              <a:tabLst>
+                <a:tab pos="0" algn="l"/>
+              </a:tabLst>
+            </a:pPr>
+            <a:r>
+              <a:rPr lang="en-US" sz="1600" b="0" u="none" strike="noStrike">
+                <a:solidFill>
+                  <a:srgbClr val="C9D1DC"/>
+                </a:solidFill>
+                <a:effectLst/>
+                <a:uFillTx/>
+                <a:latin typeface="IBM Plex Sans"/>
+                <a:ea typeface="IBM Plex Sans"/>
+              </a:rPr>
+              <a:t>тестів ПІ-регулятора яскравості</a:t>
             </a:r>
             <a:endParaRPr lang="uk-UA" sz="1600" b="0" u="none" strike="noStrike">
               <a:solidFill>
-                <a:srgbClr val="000000"/>
+                <a:srgbClr val="FFFFFF"/>
+              </a:solidFill>
+              <a:effectLst/>
+              <a:uFillTx/>
+              <a:latin typeface="Arial"/>
+            </a:endParaRPr>
+          </a:p>
+        </p:txBody>
+      </p:sp>
+      <p:sp>
+        <p:nvSpPr>
+          <p:cNvPr id="141" name="Shape 8"/>
+          <p:cNvSpPr/>
+          <p:nvPr/>
+        </p:nvSpPr>
+        <p:spPr>
+          <a:xfrm>
+            <a:off x="7992360" y="1998720"/>
+            <a:ext cx="3386520" cy="360"/>
+          </a:xfrm>
+          <a:prstGeom prst="line">
+            <a:avLst/>
+          </a:prstGeom>
+          <a:ln w="25400">
+            <a:solidFill>
+              <a:srgbClr val="E8A33D"/>
+            </a:solidFill>
+            <a:round/>
+          </a:ln>
+        </p:spPr>
+        <p:style>
+          <a:lnRef idx="0"/>
+          <a:fillRef idx="0"/>
+          <a:effectRef idx="0"/>
+          <a:fontRef idx="minor"/>
+        </p:style>
+        <p:txBody>
+          <a:bodyPr lIns="90000" tIns="-44640" rIns="90000" bIns="-44640" anchor="t" anchorCtr="1">
+            <a:noAutofit/>
+          </a:bodyPr>
+          <a:p>
+            <a:pPr/>
+            <a:endParaRPr lang="uk-UA" sz="1800" b="0" u="none" strike="noStrike">
+              <a:solidFill>
+                <a:srgbClr val="FFFFFF"/>
+              </a:solidFill>
+              <a:effectLst/>
+              <a:uFillTx/>
+              <a:latin typeface="Arial"/>
+            </a:endParaRPr>
+          </a:p>
+        </p:txBody>
+      </p:sp>
+      <p:sp>
+        <p:nvSpPr>
+          <p:cNvPr id="142" name="Text 9"/>
+          <p:cNvSpPr/>
+          <p:nvPr/>
+        </p:nvSpPr>
+        <p:spPr>
+          <a:xfrm>
+            <a:off x="7992720" y="2214720"/>
+            <a:ext cx="3488040" cy="1041120"/>
+          </a:xfrm>
+          <a:prstGeom prst="rect">
+            <a:avLst/>
+          </a:prstGeom>
+          <a:noFill/>
+          <a:ln w="0">
+            <a:noFill/>
+          </a:ln>
+        </p:spPr>
+        <p:style>
+          <a:lnRef idx="0"/>
+          <a:fillRef idx="0"/>
+          <a:effectRef idx="0"/>
+          <a:fontRef idx="minor"/>
+        </p:style>
+        <p:txBody>
+          <a:bodyPr lIns="0" tIns="0" rIns="0" bIns="0" anchor="t">
+            <a:normAutofit/>
+          </a:bodyPr>
+          <a:p>
+            <a:pPr defTabSz="914400">
+              <a:lnSpc>
+                <a:spcPts val="7999"/>
+              </a:lnSpc>
+              <a:tabLst>
+                <a:tab pos="0" algn="l"/>
+              </a:tabLst>
+            </a:pPr>
+            <a:r>
+              <a:rPr lang="en-US" sz="8000" b="1" u="none" strike="noStrike">
+                <a:solidFill>
+                  <a:srgbClr val="E8A33D"/>
+                </a:solidFill>
+                <a:effectLst/>
+                <a:uFillTx/>
+                <a:latin typeface="IBM Plex Sans"/>
+                <a:ea typeface="IBM Plex Sans"/>
+              </a:rPr>
+              <a:t>25/25</a:t>
+            </a:r>
+            <a:endParaRPr lang="uk-UA" sz="8000" b="0" u="none" strike="noStrike">
+              <a:solidFill>
+                <a:srgbClr val="FFFFFF"/>
+              </a:solidFill>
+              <a:effectLst/>
+              <a:uFillTx/>
+              <a:latin typeface="Arial"/>
+            </a:endParaRPr>
+          </a:p>
+        </p:txBody>
+      </p:sp>
+      <p:sp>
+        <p:nvSpPr>
+          <p:cNvPr id="143" name="Text 10"/>
+          <p:cNvSpPr/>
+          <p:nvPr/>
+        </p:nvSpPr>
+        <p:spPr>
+          <a:xfrm>
+            <a:off x="7992720" y="3306960"/>
+            <a:ext cx="3488040" cy="289080"/>
+          </a:xfrm>
+          <a:prstGeom prst="rect">
+            <a:avLst/>
+          </a:prstGeom>
+          <a:noFill/>
+          <a:ln w="0">
+            <a:noFill/>
+          </a:ln>
+        </p:spPr>
+        <p:style>
+          <a:lnRef idx="0"/>
+          <a:fillRef idx="0"/>
+          <a:effectRef idx="0"/>
+          <a:fontRef idx="minor"/>
+        </p:style>
+        <p:txBody>
+          <a:bodyPr lIns="0" tIns="0" rIns="0" bIns="0" anchor="t">
+            <a:normAutofit/>
+          </a:bodyPr>
+          <a:p>
+            <a:pPr defTabSz="914400">
+              <a:lnSpc>
+                <a:spcPts val="2081"/>
+              </a:lnSpc>
+              <a:tabLst>
+                <a:tab pos="0" algn="l"/>
+              </a:tabLst>
+            </a:pPr>
+            <a:r>
+              <a:rPr lang="en-US" sz="1600" b="0" u="none" strike="noStrike">
+                <a:solidFill>
+                  <a:srgbClr val="C9D1DC"/>
+                </a:solidFill>
+                <a:effectLst/>
+                <a:uFillTx/>
+                <a:latin typeface="IBM Plex Sans"/>
+                <a:ea typeface="IBM Plex Sans"/>
+              </a:rPr>
+              <a:t>проходять успішно</a:t>
+            </a:r>
+            <a:endParaRPr lang="uk-UA" sz="1600" b="0" u="none" strike="noStrike">
+              <a:solidFill>
+                <a:srgbClr val="FFFFFF"/>
+              </a:solidFill>
+              <a:effectLst/>
+              <a:uFillTx/>
+              <a:latin typeface="Arial"/>
+            </a:endParaRPr>
+          </a:p>
+        </p:txBody>
+      </p:sp>
+      <p:sp>
+        <p:nvSpPr>
+          <p:cNvPr id="144" name="Text 11"/>
+          <p:cNvSpPr/>
+          <p:nvPr/>
+        </p:nvSpPr>
+        <p:spPr>
+          <a:xfrm>
+            <a:off x="812880" y="3926520"/>
+            <a:ext cx="10883160" cy="273960"/>
+          </a:xfrm>
+          <a:prstGeom prst="rect">
+            <a:avLst/>
+          </a:prstGeom>
+          <a:noFill/>
+          <a:ln w="0">
+            <a:noFill/>
+          </a:ln>
+        </p:spPr>
+        <p:style>
+          <a:lnRef idx="0"/>
+          <a:fillRef idx="0"/>
+          <a:effectRef idx="0"/>
+          <a:fontRef idx="minor"/>
+        </p:style>
+        <p:txBody>
+          <a:bodyPr lIns="0" tIns="0" rIns="0" bIns="0" anchor="t">
+            <a:normAutofit/>
+          </a:bodyPr>
+          <a:p>
+            <a:pPr defTabSz="914400">
+              <a:lnSpc>
+                <a:spcPts val="1959"/>
+              </a:lnSpc>
+              <a:tabLst>
+                <a:tab pos="0" algn="l"/>
+              </a:tabLst>
+            </a:pPr>
+            <a:r>
+              <a:rPr lang="en-US" sz="1400" b="0" u="none" strike="noStrike">
+                <a:solidFill>
+                  <a:srgbClr val="9AA5B4"/>
+                </a:solidFill>
+                <a:effectLst/>
+                <a:uFillTx/>
+                <a:latin typeface="IBM Plex Sans"/>
+                <a:ea typeface="IBM Plex Sans"/>
+              </a:rPr>
+              <a:t>Логіка винесена в «чисті» функції без залежності від обладнання: тести йдуть на комп'ютері, окремий набір — на самій платі.</a:t>
+            </a:r>
+            <a:endParaRPr lang="uk-UA" sz="1400" b="0" u="none" strike="noStrike">
+              <a:solidFill>
+                <a:srgbClr val="FFFFFF"/>
               </a:solidFill>
               <a:effectLst/>
               <a:uFillTx/>
@@ -3950,7 +4260,7 @@
       </p:grpSpPr>
       <p:sp>
         <p:nvSpPr>
-          <p:cNvPr id="150" name="Text 0"/>
+          <p:cNvPr id="145" name="Text 0"/>
           <p:cNvSpPr/>
           <p:nvPr/>
         </p:nvSpPr>
@@ -3996,7 +4306,7 @@
                 <a:latin typeface="JetBrains Mono"/>
                 <a:ea typeface="JetBrains Mono"/>
               </a:rPr>
-              <a:t>ПЕРСПЕКТИВИ</a:t>
+              <a:t>РЕЗУЛЬТАТИ</a:t>
             </a:r>
             <a:endParaRPr lang="uk-UA" sz="1200" b="0" u="none" strike="noStrike">
               <a:solidFill>
@@ -4011,7 +4321,7 @@
       </p:sp>
       <p:sp>
         <p:nvSpPr>
-          <p:cNvPr id="151" name="Text 1"/>
+          <p:cNvPr id="146" name="Text 1"/>
           <p:cNvSpPr/>
           <p:nvPr/>
         </p:nvSpPr>
@@ -4057,7 +4367,7 @@
                 <a:latin typeface="IBM Plex Sans"/>
                 <a:ea typeface="IBM Plex Sans"/>
               </a:rPr>
-              <a:t>Куди розвивати далі</a:t>
+              <a:t>Що зроблено</a:t>
             </a:r>
             <a:endParaRPr lang="uk-UA" sz="3600" b="0" u="none" strike="noStrike">
               <a:solidFill>
@@ -4070,30 +4380,47 @@
           </a:p>
         </p:txBody>
       </p:sp>
-      <p:sp>
-        <p:nvSpPr>
-          <p:cNvPr id="152" name="Shape 2"/>
+      <p:pic>
+        <p:nvPicPr>
+          <p:cNvPr id="147" name="Image 0" descr="CheckCircle"/>
+          <p:cNvPicPr/>
+          <p:nvPr/>
+        </p:nvPicPr>
+        <p:blipFill>
+          <a:blip r:embed="rId1"/>
+          <a:stretch/>
+        </p:blipFill>
+        <p:spPr>
+          <a:xfrm>
+            <a:off x="812880" y="1935360"/>
+            <a:ext cx="304560" cy="304560"/>
+          </a:xfrm>
+          <a:prstGeom prst="rect">
+            <a:avLst/>
+          </a:prstGeom>
+          <a:noFill/>
+          <a:ln w="0">
+            <a:noFill/>
+          </a:ln>
+        </p:spPr>
+      </p:pic>
+      <p:sp>
+        <p:nvSpPr>
+          <p:cNvPr id="148" name="Text 2"/>
           <p:cNvSpPr/>
           <p:nvPr/>
         </p:nvSpPr>
         <p:spPr>
           <a:xfrm>
-            <a:off x="816120" y="1938600"/>
-            <a:ext cx="5175000" cy="1062360"/>
-          </a:xfrm>
-          <a:prstGeom prst="roundRect">
-            <a:avLst>
-              <a:gd name="adj" fmla="val 9261"/>
-            </a:avLst>
-          </a:prstGeom>
-          <a:solidFill>
-            <a:srgbClr val="FFFDF8"/>
-          </a:solidFill>
-          <a:ln w="6350">
-            <a:solidFill>
-              <a:srgbClr val="DDD7CB"/>
-            </a:solidFill>
-            <a:round/>
+            <a:off x="1295280" y="1955880"/>
+            <a:ext cx="10386000" cy="289080"/>
+          </a:xfrm>
+          <a:prstGeom prst="rect">
+            <a:avLst/>
+          </a:prstGeom>
+          <a:noFill/>
+          <a:ln w="0">
+            <a:noFill/>
           </a:ln>
         </p:spPr>
         <p:style>
@@ -4103,12 +4430,31 @@
           <a:fontRef idx="minor"/>
         </p:style>
         <p:txBody>
-          <a:bodyPr lIns="90000" tIns="45000" rIns="90000" bIns="45000" anchor="t">
-            <a:noAutofit/>
-          </a:bodyPr>
-          <a:p>
-            <a:pPr/>
-            <a:endParaRPr lang="uk-UA" sz="1800" b="0" u="none" strike="noStrike">
+          <a:bodyPr lIns="0" tIns="0" rIns="0" bIns="0" anchor="t">
+            <a:normAutofit/>
+          </a:bodyPr>
+          <a:p>
+            <a:pPr defTabSz="914400">
+              <a:lnSpc>
+                <a:spcPts val="2081"/>
+              </a:lnSpc>
+              <a:tabLst>
+                <a:tab pos="0" algn="l"/>
+              </a:tabLst>
+            </a:pPr>
+            <a:r>
+              <a:rPr lang="en-US" sz="1600" b="0" u="none" strike="noStrike">
+                <a:solidFill>
+                  <a:srgbClr val="121821"/>
+                </a:solidFill>
+                <a:effectLst/>
+                <a:uFillTx/>
+                <a:latin typeface="IBM Plex Sans"/>
+                <a:ea typeface="IBM Plex Sans"/>
+              </a:rPr>
+              <a:t>Пристрій показує карту тривог по всіх областях і подає сигнал для вибраної</a:t>
+            </a:r>
+            <a:endParaRPr lang="uk-UA" sz="1600" b="0" u="none" strike="noStrike">
               <a:solidFill>
                 <a:srgbClr val="000000"/>
               </a:solidFill>
@@ -4121,18 +4467,18 @@
       </p:sp>
       <p:pic>
         <p:nvPicPr>
-          <p:cNvPr id="153" name="Image 0" descr="Home"/>
+          <p:cNvPr id="149" name="Image 1" descr="CheckCircle"/>
           <p:cNvPicPr/>
           <p:nvPr/>
         </p:nvPicPr>
         <p:blipFill>
-          <a:blip r:embed="rId1"/>
+          <a:blip r:embed="rId2"/>
           <a:stretch/>
         </p:blipFill>
         <p:spPr>
           <a:xfrm>
-            <a:off x="1073160" y="2292120"/>
-            <a:ext cx="355320" cy="355320"/>
+            <a:off x="812880" y="2418120"/>
+            <a:ext cx="304560" cy="304560"/>
           </a:xfrm>
           <a:prstGeom prst="rect">
             <a:avLst/>
@@ -4145,14 +4491,14 @@
       </p:pic>
       <p:sp>
         <p:nvSpPr>
-          <p:cNvPr id="154" name="Text 3"/>
+          <p:cNvPr id="150" name="Text 3"/>
           <p:cNvSpPr/>
           <p:nvPr/>
         </p:nvSpPr>
         <p:spPr>
           <a:xfrm>
-            <a:off x="1631880" y="2195640"/>
-            <a:ext cx="4224960" cy="573480"/>
+            <a:off x="1295280" y="2438280"/>
+            <a:ext cx="10386000" cy="289080"/>
           </a:xfrm>
           <a:prstGeom prst="rect">
             <a:avLst/>
@@ -4175,7 +4521,7 @@
           <a:p>
             <a:pPr defTabSz="914400">
               <a:lnSpc>
-                <a:spcPts val="2160"/>
+                <a:spcPts val="2081"/>
               </a:lnSpc>
               <a:tabLst>
                 <a:tab pos="0" algn="l"/>
@@ -4191,7 +4537,7 @@
                 <a:latin typeface="IBM Plex Sans"/>
                 <a:ea typeface="IBM Plex Sans"/>
               </a:rPr>
-              <a:t>Налаштування за IP-адресою в домашній мережі</a:t>
+              <a:t>Багатозадачна архітектура на FreeRTOS із сімома задачами</a:t>
             </a:r>
             <a:endParaRPr lang="uk-UA" sz="1600" b="0" u="none" strike="noStrike">
               <a:solidFill>
@@ -4204,30 +4550,47 @@
           </a:p>
         </p:txBody>
       </p:sp>
-      <p:sp>
-        <p:nvSpPr>
-          <p:cNvPr id="155" name="Shape 4"/>
+      <p:pic>
+        <p:nvPicPr>
+          <p:cNvPr id="151" name="Image 2" descr="CheckCircle"/>
+          <p:cNvPicPr/>
+          <p:nvPr/>
+        </p:nvPicPr>
+        <p:blipFill>
+          <a:blip r:embed="rId3"/>
+          <a:stretch/>
+        </p:blipFill>
+        <p:spPr>
+          <a:xfrm>
+            <a:off x="812880" y="2900520"/>
+            <a:ext cx="304560" cy="304560"/>
+          </a:xfrm>
+          <a:prstGeom prst="rect">
+            <a:avLst/>
+          </a:prstGeom>
+          <a:noFill/>
+          <a:ln w="0">
+            <a:noFill/>
+          </a:ln>
+        </p:spPr>
+      </p:pic>
+      <p:sp>
+        <p:nvSpPr>
+          <p:cNvPr id="152" name="Text 4"/>
           <p:cNvSpPr/>
           <p:nvPr/>
         </p:nvSpPr>
         <p:spPr>
           <a:xfrm>
-            <a:off x="6200640" y="1938600"/>
-            <a:ext cx="5175000" cy="1062360"/>
-          </a:xfrm>
-          <a:prstGeom prst="roundRect">
-            <a:avLst>
-              <a:gd name="adj" fmla="val 9261"/>
-            </a:avLst>
-          </a:prstGeom>
-          <a:solidFill>
-            <a:srgbClr val="FFFDF8"/>
-          </a:solidFill>
-          <a:ln w="6350">
-            <a:solidFill>
-              <a:srgbClr val="DDD7CB"/>
-            </a:solidFill>
-            <a:round/>
+            <a:off x="1295280" y="2921040"/>
+            <a:ext cx="10386000" cy="289080"/>
+          </a:xfrm>
+          <a:prstGeom prst="rect">
+            <a:avLst/>
+          </a:prstGeom>
+          <a:noFill/>
+          <a:ln w="0">
+            <a:noFill/>
           </a:ln>
         </p:spPr>
         <p:style>
@@ -4237,12 +4600,31 @@
           <a:fontRef idx="minor"/>
         </p:style>
         <p:txBody>
-          <a:bodyPr lIns="90000" tIns="45000" rIns="90000" bIns="45000" anchor="t">
-            <a:noAutofit/>
-          </a:bodyPr>
-          <a:p>
-            <a:pPr/>
-            <a:endParaRPr lang="uk-UA" sz="1800" b="0" u="none" strike="noStrike">
+          <a:bodyPr lIns="0" tIns="0" rIns="0" bIns="0" anchor="t">
+            <a:normAutofit/>
+          </a:bodyPr>
+          <a:p>
+            <a:pPr defTabSz="914400">
+              <a:lnSpc>
+                <a:spcPts val="2081"/>
+              </a:lnSpc>
+              <a:tabLst>
+                <a:tab pos="0" algn="l"/>
+              </a:tabLst>
+            </a:pPr>
+            <a:r>
+              <a:rPr lang="en-US" sz="1600" b="0" u="none" strike="noStrike">
+                <a:solidFill>
+                  <a:srgbClr val="121821"/>
+                </a:solidFill>
+                <a:effectLst/>
+                <a:uFillTx/>
+                <a:latin typeface="IBM Plex Sans"/>
+                <a:ea typeface="IBM Plex Sans"/>
+              </a:rPr>
+              <a:t>Захист від зависань, збоїв мережі й некоректних даних</a:t>
+            </a:r>
+            <a:endParaRPr lang="uk-UA" sz="1600" b="0" u="none" strike="noStrike">
               <a:solidFill>
                 <a:srgbClr val="000000"/>
               </a:solidFill>
@@ -4255,18 +4637,18 @@
       </p:sp>
       <p:pic>
         <p:nvPicPr>
-          <p:cNvPr id="156" name="Image 1" descr="Cloud"/>
+          <p:cNvPr id="153" name="Image 3" descr="CheckCircle"/>
           <p:cNvPicPr/>
           <p:nvPr/>
         </p:nvPicPr>
         <p:blipFill>
-          <a:blip r:embed="rId2"/>
+          <a:blip r:embed="rId4"/>
           <a:stretch/>
         </p:blipFill>
         <p:spPr>
           <a:xfrm>
-            <a:off x="6458040" y="2292120"/>
-            <a:ext cx="355320" cy="355320"/>
+            <a:off x="812880" y="3383280"/>
+            <a:ext cx="304560" cy="304560"/>
           </a:xfrm>
           <a:prstGeom prst="rect">
             <a:avLst/>
@@ -4279,14 +4661,14 @@
       </p:pic>
       <p:sp>
         <p:nvSpPr>
-          <p:cNvPr id="157" name="Text 5"/>
+          <p:cNvPr id="154" name="Text 5"/>
           <p:cNvSpPr/>
           <p:nvPr/>
         </p:nvSpPr>
         <p:spPr>
           <a:xfrm>
-            <a:off x="7016760" y="2332800"/>
-            <a:ext cx="4224960" cy="299160"/>
+            <a:off x="1295280" y="3403440"/>
+            <a:ext cx="10386000" cy="289080"/>
           </a:xfrm>
           <a:prstGeom prst="rect">
             <a:avLst/>
@@ -4309,7 +4691,7 @@
           <a:p>
             <a:pPr defTabSz="914400">
               <a:lnSpc>
-                <a:spcPts val="2160"/>
+                <a:spcPts val="2081"/>
               </a:lnSpc>
               <a:tabLst>
                 <a:tab pos="0" algn="l"/>
@@ -4325,7 +4707,7 @@
                 <a:latin typeface="IBM Plex Sans"/>
                 <a:ea typeface="IBM Plex Sans"/>
               </a:rPr>
-              <a:t>Оновлення прошивки «по повітрю» (OTA)</a:t>
+              <a:t>Налаштування через веб-інтерфейс без перепрошивки</a:t>
             </a:r>
             <a:endParaRPr lang="uk-UA" sz="1600" b="0" u="none" strike="noStrike">
               <a:solidFill>
@@ -4338,30 +4720,47 @@
           </a:p>
         </p:txBody>
       </p:sp>
-      <p:sp>
-        <p:nvSpPr>
-          <p:cNvPr id="158" name="Shape 6"/>
+      <p:pic>
+        <p:nvPicPr>
+          <p:cNvPr id="155" name="Image 4" descr="CheckCircle"/>
+          <p:cNvPicPr/>
+          <p:nvPr/>
+        </p:nvPicPr>
+        <p:blipFill>
+          <a:blip r:embed="rId5"/>
+          <a:stretch/>
+        </p:blipFill>
+        <p:spPr>
+          <a:xfrm>
+            <a:off x="812880" y="3865680"/>
+            <a:ext cx="304560" cy="304560"/>
+          </a:xfrm>
+          <a:prstGeom prst="rect">
+            <a:avLst/>
+          </a:prstGeom>
+          <a:noFill/>
+          <a:ln w="0">
+            <a:noFill/>
+          </a:ln>
+        </p:spPr>
+      </p:pic>
+      <p:sp>
+        <p:nvSpPr>
+          <p:cNvPr id="156" name="Text 6"/>
           <p:cNvSpPr/>
           <p:nvPr/>
         </p:nvSpPr>
         <p:spPr>
           <a:xfrm>
-            <a:off x="816120" y="3210840"/>
-            <a:ext cx="5175000" cy="869760"/>
-          </a:xfrm>
-          <a:prstGeom prst="roundRect">
-            <a:avLst>
-              <a:gd name="adj" fmla="val 11314"/>
-            </a:avLst>
-          </a:prstGeom>
-          <a:solidFill>
-            <a:srgbClr val="FFFDF8"/>
-          </a:solidFill>
-          <a:ln w="6350">
-            <a:solidFill>
-              <a:srgbClr val="DDD7CB"/>
-            </a:solidFill>
-            <a:round/>
+            <a:off x="1295280" y="3886200"/>
+            <a:ext cx="10386000" cy="289080"/>
+          </a:xfrm>
+          <a:prstGeom prst="rect">
+            <a:avLst/>
+          </a:prstGeom>
+          <a:noFill/>
+          <a:ln w="0">
+            <a:noFill/>
           </a:ln>
         </p:spPr>
         <p:style>
@@ -4371,79 +4770,13 @@
           <a:fontRef idx="minor"/>
         </p:style>
         <p:txBody>
-          <a:bodyPr lIns="90000" tIns="45000" rIns="90000" bIns="45000" anchor="t">
-            <a:noAutofit/>
-          </a:bodyPr>
-          <a:p>
-            <a:pPr/>
-            <a:endParaRPr lang="uk-UA" sz="1800" b="0" u="none" strike="noStrike">
-              <a:solidFill>
-                <a:srgbClr val="000000"/>
-              </a:solidFill>
-              <a:effectLst/>
-              <a:uFillTx/>
-              <a:latin typeface="Arial"/>
-            </a:endParaRPr>
-          </a:p>
-        </p:txBody>
-      </p:sp>
-      <p:pic>
-        <p:nvPicPr>
-          <p:cNvPr id="159" name="Image 2" descr="Warning"/>
-          <p:cNvPicPr/>
-          <p:nvPr/>
-        </p:nvPicPr>
-        <p:blipFill>
-          <a:blip r:embed="rId3"/>
-          <a:stretch/>
-        </p:blipFill>
-        <p:spPr>
-          <a:xfrm>
-            <a:off x="1073160" y="3468240"/>
-            <a:ext cx="355320" cy="355320"/>
-          </a:xfrm>
-          <a:prstGeom prst="rect">
-            <a:avLst/>
-          </a:prstGeom>
-          <a:noFill/>
-          <a:ln w="0">
-            <a:noFill/>
-          </a:ln>
-        </p:spPr>
-      </p:pic>
-      <p:sp>
-        <p:nvSpPr>
-          <p:cNvPr id="160" name="Text 7"/>
-          <p:cNvSpPr/>
-          <p:nvPr/>
-        </p:nvSpPr>
-        <p:spPr>
-          <a:xfrm>
-            <a:off x="1631880" y="3508920"/>
-            <a:ext cx="4224960" cy="299160"/>
-          </a:xfrm>
-          <a:prstGeom prst="rect">
-            <a:avLst/>
-          </a:prstGeom>
-          <a:noFill/>
-          <a:ln w="0">
-            <a:noFill/>
-          </a:ln>
-        </p:spPr>
-        <p:style>
-          <a:lnRef idx="0"/>
-          <a:fillRef idx="0"/>
-          <a:effectRef idx="0"/>
-          <a:fontRef idx="minor"/>
-        </p:style>
-        <p:txBody>
           <a:bodyPr lIns="0" tIns="0" rIns="0" bIns="0" anchor="t">
             <a:normAutofit/>
           </a:bodyPr>
           <a:p>
             <a:pPr defTabSz="914400">
               <a:lnSpc>
-                <a:spcPts val="2160"/>
+                <a:spcPts val="2081"/>
               </a:lnSpc>
               <a:tabLst>
                 <a:tab pos="0" algn="l"/>
@@ -4459,141 +4792,7 @@
                 <a:latin typeface="IBM Plex Sans"/>
                 <a:ea typeface="IBM Plex Sans"/>
               </a:rPr>
-              <a:t>Відображення інших типів загроз</a:t>
-            </a:r>
-            <a:endParaRPr lang="uk-UA" sz="1600" b="0" u="none" strike="noStrike">
-              <a:solidFill>
-                <a:srgbClr val="000000"/>
-              </a:solidFill>
-              <a:effectLst/>
-              <a:uFillTx/>
-              <a:latin typeface="Arial"/>
-            </a:endParaRPr>
-          </a:p>
-        </p:txBody>
-      </p:sp>
-      <p:sp>
-        <p:nvSpPr>
-          <p:cNvPr id="161" name="Shape 8"/>
-          <p:cNvSpPr/>
-          <p:nvPr/>
-        </p:nvSpPr>
-        <p:spPr>
-          <a:xfrm>
-            <a:off x="6200640" y="3210840"/>
-            <a:ext cx="5175000" cy="869760"/>
-          </a:xfrm>
-          <a:prstGeom prst="roundRect">
-            <a:avLst>
-              <a:gd name="adj" fmla="val 11314"/>
-            </a:avLst>
-          </a:prstGeom>
-          <a:solidFill>
-            <a:srgbClr val="FFFDF8"/>
-          </a:solidFill>
-          <a:ln w="6350">
-            <a:solidFill>
-              <a:srgbClr val="DDD7CB"/>
-            </a:solidFill>
-            <a:round/>
-          </a:ln>
-        </p:spPr>
-        <p:style>
-          <a:lnRef idx="0"/>
-          <a:fillRef idx="0"/>
-          <a:effectRef idx="0"/>
-          <a:fontRef idx="minor"/>
-        </p:style>
-        <p:txBody>
-          <a:bodyPr lIns="90000" tIns="45000" rIns="90000" bIns="45000" anchor="t">
-            <a:noAutofit/>
-          </a:bodyPr>
-          <a:p>
-            <a:pPr/>
-            <a:endParaRPr lang="uk-UA" sz="1800" b="0" u="none" strike="noStrike">
-              <a:solidFill>
-                <a:srgbClr val="000000"/>
-              </a:solidFill>
-              <a:effectLst/>
-              <a:uFillTx/>
-              <a:latin typeface="Arial"/>
-            </a:endParaRPr>
-          </a:p>
-        </p:txBody>
-      </p:sp>
-      <p:pic>
-        <p:nvPicPr>
-          <p:cNvPr id="162" name="Image 3" descr="Tool"/>
-          <p:cNvPicPr/>
-          <p:nvPr/>
-        </p:nvPicPr>
-        <p:blipFill>
-          <a:blip r:embed="rId4"/>
-          <a:stretch/>
-        </p:blipFill>
-        <p:spPr>
-          <a:xfrm>
-            <a:off x="6458040" y="3468240"/>
-            <a:ext cx="355320" cy="355320"/>
-          </a:xfrm>
-          <a:prstGeom prst="rect">
-            <a:avLst/>
-          </a:prstGeom>
-          <a:noFill/>
-          <a:ln w="0">
-            <a:noFill/>
-          </a:ln>
-        </p:spPr>
-      </p:pic>
-      <p:sp>
-        <p:nvSpPr>
-          <p:cNvPr id="163" name="Text 9"/>
-          <p:cNvSpPr/>
-          <p:nvPr/>
-        </p:nvSpPr>
-        <p:spPr>
-          <a:xfrm>
-            <a:off x="7016760" y="3508920"/>
-            <a:ext cx="4224960" cy="299160"/>
-          </a:xfrm>
-          <a:prstGeom prst="rect">
-            <a:avLst/>
-          </a:prstGeom>
-          <a:noFill/>
-          <a:ln w="0">
-            <a:noFill/>
-          </a:ln>
-        </p:spPr>
-        <p:style>
-          <a:lnRef idx="0"/>
-          <a:fillRef idx="0"/>
-          <a:effectRef idx="0"/>
-          <a:fontRef idx="minor"/>
-        </p:style>
-        <p:txBody>
-          <a:bodyPr lIns="0" tIns="0" rIns="0" bIns="0" anchor="t">
-            <a:normAutofit/>
-          </a:bodyPr>
-          <a:p>
-            <a:pPr defTabSz="914400">
-              <a:lnSpc>
-                <a:spcPts val="2160"/>
-              </a:lnSpc>
-              <a:tabLst>
-                <a:tab pos="0" algn="l"/>
-              </a:tabLst>
-            </a:pPr>
-            <a:r>
-              <a:rPr lang="en-US" sz="1600" b="0" u="none" strike="noStrike">
-                <a:solidFill>
-                  <a:srgbClr val="121821"/>
-                </a:solidFill>
-                <a:effectLst/>
-                <a:uFillTx/>
-                <a:latin typeface="IBM Plex Sans"/>
-                <a:ea typeface="IBM Plex Sans"/>
-              </a:rPr>
-              <a:t>Власна друкована плата й корпус</a:t>
+              <a:t>Ключова логіка покрита автоматичними тестами</a:t>
             </a:r>
             <a:endParaRPr lang="uk-UA" sz="1600" b="0" u="none" strike="noStrike">
               <a:solidFill>
@@ -4620,6 +4819,701 @@
 </file>
 
 <file path=ppt/slides/slide12.xml><?xml version="1.0" encoding="utf-8"?>
+<p:sld xmlns:a="http://schemas.openxmlformats.org/drawingml/2006/main" xmlns:p="http://schemas.openxmlformats.org/presentationml/2006/main" xmlns:r="http://schemas.openxmlformats.org/officeDocument/2006/relationships" xmlns:p14="http://schemas.microsoft.com/office/powerpoint/2010/main" xmlns:p15="http://schemas.microsoft.com/office/powerpoint/2012/main" xmlns:mc="http://schemas.openxmlformats.org/markup-compatibility/2006">
+  <p:cSld>
+    <p:bg>
+      <p:bgPr>
+        <a:solidFill>
+          <a:srgbClr val="F5F2EC"/>
+        </a:solidFill>
+      </p:bgPr>
+    </p:bg>
+    <p:spTree>
+      <p:nvGrpSpPr>
+        <p:cNvPr id="1" name=""/>
+        <p:cNvGrpSpPr/>
+        <p:nvPr/>
+      </p:nvGrpSpPr>
+      <p:grpSpPr>
+        <a:xfrm>
+          <a:off x="0" y="0"/>
+          <a:ext cx="0" cy="0"/>
+          <a:chOff x="0" y="0"/>
+          <a:chExt cx="0" cy="0"/>
+        </a:xfrm>
+      </p:grpSpPr>
+      <p:sp>
+        <p:nvSpPr>
+          <p:cNvPr id="157" name="Text 0"/>
+          <p:cNvSpPr/>
+          <p:nvPr/>
+        </p:nvSpPr>
+        <p:spPr>
+          <a:xfrm>
+            <a:off x="812880" y="812880"/>
+            <a:ext cx="10883160" cy="238320"/>
+          </a:xfrm>
+          <a:prstGeom prst="rect">
+            <a:avLst/>
+          </a:prstGeom>
+          <a:noFill/>
+          <a:ln w="0">
+            <a:noFill/>
+          </a:ln>
+        </p:spPr>
+        <p:style>
+          <a:lnRef idx="0"/>
+          <a:fillRef idx="0"/>
+          <a:effectRef idx="0"/>
+          <a:fontRef idx="minor"/>
+        </p:style>
+        <p:txBody>
+          <a:bodyPr lIns="0" tIns="0" rIns="0" bIns="0" anchor="t">
+            <a:normAutofit/>
+          </a:bodyPr>
+          <a:p>
+            <a:pPr defTabSz="914400">
+              <a:lnSpc>
+                <a:spcPts val="1681"/>
+              </a:lnSpc>
+              <a:tabLst>
+                <a:tab pos="0" algn="l"/>
+              </a:tabLst>
+            </a:pPr>
+            <a:r>
+              <a:rPr lang="en-US" sz="1200" b="0" u="none" spc="99" strike="noStrike">
+                <a:solidFill>
+                  <a:srgbClr val="B8322B"/>
+                </a:solidFill>
+                <a:effectLst/>
+                <a:uFillTx/>
+                <a:latin typeface="JetBrains Mono"/>
+                <a:ea typeface="JetBrains Mono"/>
+              </a:rPr>
+              <a:t>ПЕРСПЕКТИВИ</a:t>
+            </a:r>
+            <a:endParaRPr lang="uk-UA" sz="1200" b="0" u="none" strike="noStrike">
+              <a:solidFill>
+                <a:srgbClr val="000000"/>
+              </a:solidFill>
+              <a:effectLst/>
+              <a:uFillTx/>
+              <a:latin typeface="Arial"/>
+            </a:endParaRPr>
+          </a:p>
+        </p:txBody>
+      </p:sp>
+      <p:sp>
+        <p:nvSpPr>
+          <p:cNvPr id="158" name="Text 1"/>
+          <p:cNvSpPr/>
+          <p:nvPr/>
+        </p:nvSpPr>
+        <p:spPr>
+          <a:xfrm>
+            <a:off x="812880" y="1127880"/>
+            <a:ext cx="10883160" cy="527760"/>
+          </a:xfrm>
+          <a:prstGeom prst="rect">
+            <a:avLst/>
+          </a:prstGeom>
+          <a:noFill/>
+          <a:ln w="0">
+            <a:noFill/>
+          </a:ln>
+        </p:spPr>
+        <p:style>
+          <a:lnRef idx="0"/>
+          <a:fillRef idx="0"/>
+          <a:effectRef idx="0"/>
+          <a:fontRef idx="minor"/>
+        </p:style>
+        <p:txBody>
+          <a:bodyPr lIns="0" tIns="0" rIns="0" bIns="0" anchor="t">
+            <a:normAutofit/>
+          </a:bodyPr>
+          <a:p>
+            <a:pPr defTabSz="914400">
+              <a:lnSpc>
+                <a:spcPts val="3960"/>
+              </a:lnSpc>
+              <a:tabLst>
+                <a:tab pos="0" algn="l"/>
+              </a:tabLst>
+            </a:pPr>
+            <a:r>
+              <a:rPr lang="en-US" sz="3600" b="1" u="none" strike="noStrike">
+                <a:solidFill>
+                  <a:srgbClr val="121821"/>
+                </a:solidFill>
+                <a:effectLst/>
+                <a:uFillTx/>
+                <a:latin typeface="IBM Plex Sans"/>
+                <a:ea typeface="IBM Plex Sans"/>
+              </a:rPr>
+              <a:t>Куди розвивати далі</a:t>
+            </a:r>
+            <a:endParaRPr lang="uk-UA" sz="3600" b="0" u="none" strike="noStrike">
+              <a:solidFill>
+                <a:srgbClr val="000000"/>
+              </a:solidFill>
+              <a:effectLst/>
+              <a:uFillTx/>
+              <a:latin typeface="Arial"/>
+            </a:endParaRPr>
+          </a:p>
+        </p:txBody>
+      </p:sp>
+      <p:sp>
+        <p:nvSpPr>
+          <p:cNvPr id="159" name="Shape 2"/>
+          <p:cNvSpPr/>
+          <p:nvPr/>
+        </p:nvSpPr>
+        <p:spPr>
+          <a:xfrm>
+            <a:off x="816120" y="1938600"/>
+            <a:ext cx="5175000" cy="1062360"/>
+          </a:xfrm>
+          <a:prstGeom prst="roundRect">
+            <a:avLst>
+              <a:gd name="adj" fmla="val 9261"/>
+            </a:avLst>
+          </a:prstGeom>
+          <a:solidFill>
+            <a:srgbClr val="FFFDF8"/>
+          </a:solidFill>
+          <a:ln w="6350">
+            <a:solidFill>
+              <a:srgbClr val="DDD7CB"/>
+            </a:solidFill>
+            <a:round/>
+          </a:ln>
+        </p:spPr>
+        <p:style>
+          <a:lnRef idx="0"/>
+          <a:fillRef idx="0"/>
+          <a:effectRef idx="0"/>
+          <a:fontRef idx="minor"/>
+        </p:style>
+        <p:txBody>
+          <a:bodyPr lIns="90000" tIns="45000" rIns="90000" bIns="45000" anchor="t">
+            <a:noAutofit/>
+          </a:bodyPr>
+          <a:p>
+            <a:pPr/>
+            <a:endParaRPr lang="uk-UA" sz="1800" b="0" u="none" strike="noStrike">
+              <a:solidFill>
+                <a:srgbClr val="000000"/>
+              </a:solidFill>
+              <a:effectLst/>
+              <a:uFillTx/>
+              <a:latin typeface="Arial"/>
+            </a:endParaRPr>
+          </a:p>
+        </p:txBody>
+      </p:sp>
+      <p:pic>
+        <p:nvPicPr>
+          <p:cNvPr id="160" name="Image 0" descr="Home"/>
+          <p:cNvPicPr/>
+          <p:nvPr/>
+        </p:nvPicPr>
+        <p:blipFill>
+          <a:blip r:embed="rId1"/>
+          <a:stretch/>
+        </p:blipFill>
+        <p:spPr>
+          <a:xfrm>
+            <a:off x="1073160" y="2292120"/>
+            <a:ext cx="355320" cy="355320"/>
+          </a:xfrm>
+          <a:prstGeom prst="rect">
+            <a:avLst/>
+          </a:prstGeom>
+          <a:noFill/>
+          <a:ln w="0">
+            <a:noFill/>
+          </a:ln>
+        </p:spPr>
+      </p:pic>
+      <p:sp>
+        <p:nvSpPr>
+          <p:cNvPr id="161" name="Text 3"/>
+          <p:cNvSpPr/>
+          <p:nvPr/>
+        </p:nvSpPr>
+        <p:spPr>
+          <a:xfrm>
+            <a:off x="1631880" y="2195640"/>
+            <a:ext cx="4224960" cy="573480"/>
+          </a:xfrm>
+          <a:prstGeom prst="rect">
+            <a:avLst/>
+          </a:prstGeom>
+          <a:noFill/>
+          <a:ln w="0">
+            <a:noFill/>
+          </a:ln>
+        </p:spPr>
+        <p:style>
+          <a:lnRef idx="0"/>
+          <a:fillRef idx="0"/>
+          <a:effectRef idx="0"/>
+          <a:fontRef idx="minor"/>
+        </p:style>
+        <p:txBody>
+          <a:bodyPr lIns="0" tIns="0" rIns="0" bIns="0" anchor="t">
+            <a:normAutofit/>
+          </a:bodyPr>
+          <a:p>
+            <a:pPr defTabSz="914400">
+              <a:lnSpc>
+                <a:spcPts val="2160"/>
+              </a:lnSpc>
+              <a:tabLst>
+                <a:tab pos="0" algn="l"/>
+              </a:tabLst>
+            </a:pPr>
+            <a:r>
+              <a:rPr lang="en-US" sz="1600" b="0" u="none" strike="noStrike">
+                <a:solidFill>
+                  <a:srgbClr val="121821"/>
+                </a:solidFill>
+                <a:effectLst/>
+                <a:uFillTx/>
+                <a:latin typeface="IBM Plex Sans"/>
+                <a:ea typeface="IBM Plex Sans"/>
+              </a:rPr>
+              <a:t>Налаштування за IP-адресою в домашній мережі</a:t>
+            </a:r>
+            <a:endParaRPr lang="uk-UA" sz="1600" b="0" u="none" strike="noStrike">
+              <a:solidFill>
+                <a:srgbClr val="000000"/>
+              </a:solidFill>
+              <a:effectLst/>
+              <a:uFillTx/>
+              <a:latin typeface="Arial"/>
+            </a:endParaRPr>
+          </a:p>
+        </p:txBody>
+      </p:sp>
+      <p:sp>
+        <p:nvSpPr>
+          <p:cNvPr id="162" name="Shape 4"/>
+          <p:cNvSpPr/>
+          <p:nvPr/>
+        </p:nvSpPr>
+        <p:spPr>
+          <a:xfrm>
+            <a:off x="6200640" y="1938600"/>
+            <a:ext cx="5175000" cy="1062360"/>
+          </a:xfrm>
+          <a:prstGeom prst="roundRect">
+            <a:avLst>
+              <a:gd name="adj" fmla="val 9261"/>
+            </a:avLst>
+          </a:prstGeom>
+          <a:solidFill>
+            <a:srgbClr val="FFFDF8"/>
+          </a:solidFill>
+          <a:ln w="6350">
+            <a:solidFill>
+              <a:srgbClr val="DDD7CB"/>
+            </a:solidFill>
+            <a:round/>
+          </a:ln>
+        </p:spPr>
+        <p:style>
+          <a:lnRef idx="0"/>
+          <a:fillRef idx="0"/>
+          <a:effectRef idx="0"/>
+          <a:fontRef idx="minor"/>
+        </p:style>
+        <p:txBody>
+          <a:bodyPr lIns="90000" tIns="45000" rIns="90000" bIns="45000" anchor="t">
+            <a:noAutofit/>
+          </a:bodyPr>
+          <a:p>
+            <a:pPr/>
+            <a:endParaRPr lang="uk-UA" sz="1800" b="0" u="none" strike="noStrike">
+              <a:solidFill>
+                <a:srgbClr val="000000"/>
+              </a:solidFill>
+              <a:effectLst/>
+              <a:uFillTx/>
+              <a:latin typeface="Arial"/>
+            </a:endParaRPr>
+          </a:p>
+        </p:txBody>
+      </p:sp>
+      <p:pic>
+        <p:nvPicPr>
+          <p:cNvPr id="163" name="Image 1" descr="Cloud"/>
+          <p:cNvPicPr/>
+          <p:nvPr/>
+        </p:nvPicPr>
+        <p:blipFill>
+          <a:blip r:embed="rId2"/>
+          <a:stretch/>
+        </p:blipFill>
+        <p:spPr>
+          <a:xfrm>
+            <a:off x="6458040" y="2292120"/>
+            <a:ext cx="355320" cy="355320"/>
+          </a:xfrm>
+          <a:prstGeom prst="rect">
+            <a:avLst/>
+          </a:prstGeom>
+          <a:noFill/>
+          <a:ln w="0">
+            <a:noFill/>
+          </a:ln>
+        </p:spPr>
+      </p:pic>
+      <p:sp>
+        <p:nvSpPr>
+          <p:cNvPr id="164" name="Text 5"/>
+          <p:cNvSpPr/>
+          <p:nvPr/>
+        </p:nvSpPr>
+        <p:spPr>
+          <a:xfrm>
+            <a:off x="7016760" y="2332800"/>
+            <a:ext cx="4224960" cy="299160"/>
+          </a:xfrm>
+          <a:prstGeom prst="rect">
+            <a:avLst/>
+          </a:prstGeom>
+          <a:noFill/>
+          <a:ln w="0">
+            <a:noFill/>
+          </a:ln>
+        </p:spPr>
+        <p:style>
+          <a:lnRef idx="0"/>
+          <a:fillRef idx="0"/>
+          <a:effectRef idx="0"/>
+          <a:fontRef idx="minor"/>
+        </p:style>
+        <p:txBody>
+          <a:bodyPr lIns="0" tIns="0" rIns="0" bIns="0" anchor="t">
+            <a:normAutofit/>
+          </a:bodyPr>
+          <a:p>
+            <a:pPr defTabSz="914400">
+              <a:lnSpc>
+                <a:spcPts val="2160"/>
+              </a:lnSpc>
+              <a:tabLst>
+                <a:tab pos="0" algn="l"/>
+              </a:tabLst>
+            </a:pPr>
+            <a:r>
+              <a:rPr lang="en-US" sz="1600" b="0" u="none" strike="noStrike">
+                <a:solidFill>
+                  <a:srgbClr val="121821"/>
+                </a:solidFill>
+                <a:effectLst/>
+                <a:uFillTx/>
+                <a:latin typeface="IBM Plex Sans"/>
+                <a:ea typeface="IBM Plex Sans"/>
+              </a:rPr>
+              <a:t>Оновлення прошивки «по повітрю» (OTA)</a:t>
+            </a:r>
+            <a:endParaRPr lang="uk-UA" sz="1600" b="0" u="none" strike="noStrike">
+              <a:solidFill>
+                <a:srgbClr val="000000"/>
+              </a:solidFill>
+              <a:effectLst/>
+              <a:uFillTx/>
+              <a:latin typeface="Arial"/>
+            </a:endParaRPr>
+          </a:p>
+        </p:txBody>
+      </p:sp>
+      <p:sp>
+        <p:nvSpPr>
+          <p:cNvPr id="165" name="Shape 6"/>
+          <p:cNvSpPr/>
+          <p:nvPr/>
+        </p:nvSpPr>
+        <p:spPr>
+          <a:xfrm>
+            <a:off x="816120" y="3210840"/>
+            <a:ext cx="5175000" cy="869760"/>
+          </a:xfrm>
+          <a:prstGeom prst="roundRect">
+            <a:avLst>
+              <a:gd name="adj" fmla="val 11314"/>
+            </a:avLst>
+          </a:prstGeom>
+          <a:solidFill>
+            <a:srgbClr val="FFFDF8"/>
+          </a:solidFill>
+          <a:ln w="6350">
+            <a:solidFill>
+              <a:srgbClr val="DDD7CB"/>
+            </a:solidFill>
+            <a:round/>
+          </a:ln>
+        </p:spPr>
+        <p:style>
+          <a:lnRef idx="0"/>
+          <a:fillRef idx="0"/>
+          <a:effectRef idx="0"/>
+          <a:fontRef idx="minor"/>
+        </p:style>
+        <p:txBody>
+          <a:bodyPr lIns="90000" tIns="45000" rIns="90000" bIns="45000" anchor="t">
+            <a:noAutofit/>
+          </a:bodyPr>
+          <a:p>
+            <a:pPr/>
+            <a:endParaRPr lang="uk-UA" sz="1800" b="0" u="none" strike="noStrike">
+              <a:solidFill>
+                <a:srgbClr val="000000"/>
+              </a:solidFill>
+              <a:effectLst/>
+              <a:uFillTx/>
+              <a:latin typeface="Arial"/>
+            </a:endParaRPr>
+          </a:p>
+        </p:txBody>
+      </p:sp>
+      <p:pic>
+        <p:nvPicPr>
+          <p:cNvPr id="166" name="Image 2" descr="Warning"/>
+          <p:cNvPicPr/>
+          <p:nvPr/>
+        </p:nvPicPr>
+        <p:blipFill>
+          <a:blip r:embed="rId3"/>
+          <a:stretch/>
+        </p:blipFill>
+        <p:spPr>
+          <a:xfrm>
+            <a:off x="1073160" y="3468240"/>
+            <a:ext cx="355320" cy="355320"/>
+          </a:xfrm>
+          <a:prstGeom prst="rect">
+            <a:avLst/>
+          </a:prstGeom>
+          <a:noFill/>
+          <a:ln w="0">
+            <a:noFill/>
+          </a:ln>
+        </p:spPr>
+      </p:pic>
+      <p:sp>
+        <p:nvSpPr>
+          <p:cNvPr id="167" name="Text 7"/>
+          <p:cNvSpPr/>
+          <p:nvPr/>
+        </p:nvSpPr>
+        <p:spPr>
+          <a:xfrm>
+            <a:off x="1631880" y="3508920"/>
+            <a:ext cx="4224960" cy="299160"/>
+          </a:xfrm>
+          <a:prstGeom prst="rect">
+            <a:avLst/>
+          </a:prstGeom>
+          <a:noFill/>
+          <a:ln w="0">
+            <a:noFill/>
+          </a:ln>
+        </p:spPr>
+        <p:style>
+          <a:lnRef idx="0"/>
+          <a:fillRef idx="0"/>
+          <a:effectRef idx="0"/>
+          <a:fontRef idx="minor"/>
+        </p:style>
+        <p:txBody>
+          <a:bodyPr lIns="0" tIns="0" rIns="0" bIns="0" anchor="t">
+            <a:normAutofit/>
+          </a:bodyPr>
+          <a:p>
+            <a:pPr defTabSz="914400">
+              <a:lnSpc>
+                <a:spcPts val="2160"/>
+              </a:lnSpc>
+              <a:tabLst>
+                <a:tab pos="0" algn="l"/>
+              </a:tabLst>
+            </a:pPr>
+            <a:r>
+              <a:rPr lang="en-US" sz="1600" b="0" u="none" strike="noStrike">
+                <a:solidFill>
+                  <a:srgbClr val="121821"/>
+                </a:solidFill>
+                <a:effectLst/>
+                <a:uFillTx/>
+                <a:latin typeface="IBM Plex Sans"/>
+                <a:ea typeface="IBM Plex Sans"/>
+              </a:rPr>
+              <a:t>Відображення інших типів загроз</a:t>
+            </a:r>
+            <a:endParaRPr lang="uk-UA" sz="1600" b="0" u="none" strike="noStrike">
+              <a:solidFill>
+                <a:srgbClr val="000000"/>
+              </a:solidFill>
+              <a:effectLst/>
+              <a:uFillTx/>
+              <a:latin typeface="Arial"/>
+            </a:endParaRPr>
+          </a:p>
+        </p:txBody>
+      </p:sp>
+      <p:sp>
+        <p:nvSpPr>
+          <p:cNvPr id="168" name="Shape 8"/>
+          <p:cNvSpPr/>
+          <p:nvPr/>
+        </p:nvSpPr>
+        <p:spPr>
+          <a:xfrm>
+            <a:off x="6200640" y="3210840"/>
+            <a:ext cx="5175000" cy="869760"/>
+          </a:xfrm>
+          <a:prstGeom prst="roundRect">
+            <a:avLst>
+              <a:gd name="adj" fmla="val 11314"/>
+            </a:avLst>
+          </a:prstGeom>
+          <a:solidFill>
+            <a:srgbClr val="FFFDF8"/>
+          </a:solidFill>
+          <a:ln w="6350">
+            <a:solidFill>
+              <a:srgbClr val="DDD7CB"/>
+            </a:solidFill>
+            <a:round/>
+          </a:ln>
+        </p:spPr>
+        <p:style>
+          <a:lnRef idx="0"/>
+          <a:fillRef idx="0"/>
+          <a:effectRef idx="0"/>
+          <a:fontRef idx="minor"/>
+        </p:style>
+        <p:txBody>
+          <a:bodyPr lIns="90000" tIns="45000" rIns="90000" bIns="45000" anchor="t">
+            <a:noAutofit/>
+          </a:bodyPr>
+          <a:p>
+            <a:pPr/>
+            <a:endParaRPr lang="uk-UA" sz="1800" b="0" u="none" strike="noStrike">
+              <a:solidFill>
+                <a:srgbClr val="000000"/>
+              </a:solidFill>
+              <a:effectLst/>
+              <a:uFillTx/>
+              <a:latin typeface="Arial"/>
+            </a:endParaRPr>
+          </a:p>
+        </p:txBody>
+      </p:sp>
+      <p:pic>
+        <p:nvPicPr>
+          <p:cNvPr id="169" name="Image 3" descr="Tool"/>
+          <p:cNvPicPr/>
+          <p:nvPr/>
+        </p:nvPicPr>
+        <p:blipFill>
+          <a:blip r:embed="rId4"/>
+          <a:stretch/>
+        </p:blipFill>
+        <p:spPr>
+          <a:xfrm>
+            <a:off x="6458040" y="3468240"/>
+            <a:ext cx="355320" cy="355320"/>
+          </a:xfrm>
+          <a:prstGeom prst="rect">
+            <a:avLst/>
+          </a:prstGeom>
+          <a:noFill/>
+          <a:ln w="0">
+            <a:noFill/>
+          </a:ln>
+        </p:spPr>
+      </p:pic>
+      <p:sp>
+        <p:nvSpPr>
+          <p:cNvPr id="170" name="Text 9"/>
+          <p:cNvSpPr/>
+          <p:nvPr/>
+        </p:nvSpPr>
+        <p:spPr>
+          <a:xfrm>
+            <a:off x="7016760" y="3508920"/>
+            <a:ext cx="4224960" cy="299160"/>
+          </a:xfrm>
+          <a:prstGeom prst="rect">
+            <a:avLst/>
+          </a:prstGeom>
+          <a:noFill/>
+          <a:ln w="0">
+            <a:noFill/>
+          </a:ln>
+        </p:spPr>
+        <p:style>
+          <a:lnRef idx="0"/>
+          <a:fillRef idx="0"/>
+          <a:effectRef idx="0"/>
+          <a:fontRef idx="minor"/>
+        </p:style>
+        <p:txBody>
+          <a:bodyPr lIns="0" tIns="0" rIns="0" bIns="0" anchor="t">
+            <a:normAutofit/>
+          </a:bodyPr>
+          <a:p>
+            <a:pPr defTabSz="914400">
+              <a:lnSpc>
+                <a:spcPts val="2160"/>
+              </a:lnSpc>
+              <a:tabLst>
+                <a:tab pos="0" algn="l"/>
+              </a:tabLst>
+            </a:pPr>
+            <a:r>
+              <a:rPr lang="en-US" sz="1600" b="0" u="none" strike="noStrike">
+                <a:solidFill>
+                  <a:srgbClr val="121821"/>
+                </a:solidFill>
+                <a:effectLst/>
+                <a:uFillTx/>
+                <a:latin typeface="IBM Plex Sans"/>
+                <a:ea typeface="IBM Plex Sans"/>
+              </a:rPr>
+              <a:t>Власна друкована плата й корпус</a:t>
+            </a:r>
+            <a:endParaRPr lang="uk-UA" sz="1600" b="0" u="none" strike="noStrike">
+              <a:solidFill>
+                <a:srgbClr val="000000"/>
+              </a:solidFill>
+              <a:effectLst/>
+              <a:uFillTx/>
+              <a:latin typeface="Arial"/>
+            </a:endParaRPr>
+          </a:p>
+        </p:txBody>
+      </p:sp>
+    </p:spTree>
+  </p:cSld>
+  <mc:AlternateContent>
+    <mc:Choice Requires="p14">
+      <p:transition spd="slow" p14:dur="2000"/>
+    </mc:Choice>
+    <mc:Fallback>
+      <p:transition spd="slow"/>
+    </mc:Fallback>
+  </mc:AlternateContent>
+</p:sld>
+</file>
+
+<file path=ppt/slides/slide13.xml><?xml version="1.0" encoding="utf-8"?>
 <p:sld xmlns:a="http://schemas.openxmlformats.org/drawingml/2006/main" xmlns:p="http://schemas.openxmlformats.org/presentationml/2006/main" xmlns:r="http://schemas.openxmlformats.org/officeDocument/2006/relationships" xmlns:p14="http://schemas.microsoft.com/office/powerpoint/2010/main" xmlns:p15="http://schemas.microsoft.com/office/powerpoint/2012/main" xmlns:mc="http://schemas.openxmlformats.org/markup-compatibility/2006">
   <p:cSld>
     <p:bg>
@@ -4645,14 +5539,14 @@
       </p:grpSpPr>
       <p:sp>
         <p:nvSpPr>
-          <p:cNvPr id="164" name="Text 0"/>
+          <p:cNvPr id="171" name="Text 0"/>
           <p:cNvSpPr/>
           <p:nvPr/>
         </p:nvSpPr>
         <p:spPr>
           <a:xfrm>
-            <a:off x="2972880" y="1800000"/>
-            <a:ext cx="6927120" cy="825120"/>
+            <a:off x="812880" y="2720520"/>
+            <a:ext cx="10883160" cy="825120"/>
           </a:xfrm>
           <a:prstGeom prst="rect">
             <a:avLst/>
@@ -4682,7 +5576,7 @@
               </a:tabLst>
             </a:pPr>
             <a:r>
-              <a:rPr lang="en-US" sz="5400" b="1" u="none" strike="noStrike">
+              <a:rPr lang="en-US" sz="6000" b="1" u="none" strike="noStrike">
                 <a:solidFill>
                   <a:srgbClr val="F5F2EC"/>
                 </a:solidFill>
@@ -4693,7 +5587,7 @@
               </a:rPr>
               <a:t>Дякую за увагу!</a:t>
             </a:r>
-            <a:endParaRPr lang="uk-UA" sz="5400" b="0" u="none" strike="noStrike">
+            <a:endParaRPr lang="uk-UA" sz="6000" b="0" u="none" strike="noStrike">
               <a:solidFill>
                 <a:srgbClr val="FFFFFF"/>
               </a:solidFill>
@@ -4706,14 +5600,14 @@
       </p:sp>
       <p:sp>
         <p:nvSpPr>
-          <p:cNvPr id="165" name="Text 1"/>
+          <p:cNvPr id="172" name="Text 2"/>
           <p:cNvSpPr/>
           <p:nvPr/>
         </p:nvSpPr>
         <p:spPr>
           <a:xfrm>
-            <a:off x="3600000" y="3060000"/>
-            <a:ext cx="5040000" cy="388080"/>
+            <a:off x="812880" y="6238440"/>
+            <a:ext cx="10883160" cy="238320"/>
           </a:xfrm>
           <a:prstGeom prst="rect">
             <a:avLst/>
@@ -4736,73 +5630,24 @@
           <a:p>
             <a:pPr defTabSz="914400">
               <a:lnSpc>
-                <a:spcPts val="2860"/>
+                <a:spcPts val="1681"/>
               </a:lnSpc>
               <a:tabLst>
                 <a:tab pos="0" algn="l"/>
               </a:tabLst>
             </a:pPr>
             <a:r>
-              <a:rPr lang="en-US" sz="2200" b="0" u="none" strike="noStrike">
+              <a:rPr lang="en-US" sz="1200" b="0" u="none" strike="noStrike">
                 <a:solidFill>
                   <a:srgbClr val="F8DCD8"/>
                 </a:solidFill>
                 <a:effectLst/>
                 <a:uFillTx/>
-                <a:latin typeface="IBM Plex Sans"/>
-                <a:ea typeface="IBM Plex Sans"/>
-              </a:rPr>
-              <a:t>Готовий відповісти на ваші запитання.</a:t>
+                <a:latin typeface="JetBrains Mono"/>
+                <a:ea typeface="JetBrains Mono"/>
+              </a:rPr>
+              <a:t>alertinua · ESP32 · FreeRTOS · alerts.in.ua </a:t>
             </a:r>
-            <a:endParaRPr lang="uk-UA" sz="2200" b="0" u="none" strike="noStrike">
-              <a:solidFill>
-                <a:srgbClr val="FFFFFF"/>
-              </a:solidFill>
-              <a:effectLst/>
-              <a:uFillTx/>
-              <a:latin typeface="Arial"/>
-            </a:endParaRPr>
-          </a:p>
-        </p:txBody>
-      </p:sp>
-      <p:sp>
-        <p:nvSpPr>
-          <p:cNvPr id="166" name="Text 2"/>
-          <p:cNvSpPr/>
-          <p:nvPr/>
-        </p:nvSpPr>
-        <p:spPr>
-          <a:xfrm>
-            <a:off x="812880" y="6238440"/>
-            <a:ext cx="10883160" cy="238320"/>
-          </a:xfrm>
-          <a:prstGeom prst="rect">
-            <a:avLst/>
-          </a:prstGeom>
-          <a:noFill/>
-          <a:ln w="0">
-            <a:noFill/>
-          </a:ln>
-        </p:spPr>
-        <p:style>
-          <a:lnRef idx="0"/>
-          <a:fillRef idx="0"/>
-          <a:effectRef idx="0"/>
-          <a:fontRef idx="minor"/>
-        </p:style>
-        <p:txBody>
-          <a:bodyPr lIns="0" tIns="0" rIns="0" bIns="0" anchor="t">
-            <a:normAutofit/>
-          </a:bodyPr>
-          <a:p>
-            <a:pPr defTabSz="914400">
-              <a:lnSpc>
-                <a:spcPts val="1681"/>
-              </a:lnSpc>
-              <a:tabLst>
-                <a:tab pos="0" algn="l"/>
-              </a:tabLst>
-            </a:pPr>
             <a:r>
               <a:rPr lang="en-US" sz="1200" b="0" u="none" strike="noStrike">
                 <a:solidFill>
@@ -4813,7 +5658,7 @@
                 <a:latin typeface="JetBrains Mono"/>
                 <a:ea typeface="JetBrains Mono"/>
               </a:rPr>
-              <a:t>alertinua · ESP32 · FreeRTOS · alerts.in.ua</a:t>
+              <a:t>· created </a:t>
             </a:r>
             <a:endParaRPr lang="uk-UA" sz="1200" b="0" u="none" strike="noStrike">
               <a:solidFill>
@@ -6972,7 +7817,7 @@
         </p:nvGraphicFramePr>
         <p:xfrm>
           <a:off x="4533840" y="1947960"/>
-          <a:ext cx="6845040" cy="2635200"/>
+          <a:ext cx="6845040" cy="3074400"/>
         </p:xfrm>
         <a:graphic>
           <a:graphicData uri="http://schemas.openxmlformats.org/drawingml/2006/table">
@@ -7530,7 +8375,7 @@
                           <a:latin typeface="IBM Plex Sans"/>
                           <a:ea typeface="IBM Plex Sans"/>
                         </a:rPr>
-                        <a:t>34</a:t>
+                        <a:t>33</a:t>
                       </a:r>
                       <a:endParaRPr lang="uk-UA" sz="1600" b="0" u="none" strike="noStrike">
                         <a:solidFill>
@@ -8153,6 +8998,200 @@
                   </a:tcPr>
                 </a:tc>
               </a:tr>
+              <a:tr h="439200">
+                <a:tc>
+                  <a:txBody>
+                    <a:bodyPr lIns="70920" tIns="70920" rIns="70920" bIns="70920" anchor="t">
+                      <a:noAutofit/>
+                    </a:bodyPr>
+                    <a:p>
+                      <a:pPr defTabSz="914400">
+                        <a:lnSpc>
+                          <a:spcPts val="2239"/>
+                        </a:lnSpc>
+                        <a:tabLst>
+                          <a:tab pos="0" algn="l"/>
+                        </a:tabLst>
+                      </a:pPr>
+                      <a:r>
+                        <a:rPr lang="en-US" sz="1600" b="0" u="none" strike="noStrike">
+                          <a:solidFill>
+                            <a:srgbClr val="121821"/>
+                          </a:solidFill>
+                          <a:effectLst/>
+                          <a:uFillTx/>
+                          <a:latin typeface="IBM Plex Sans"/>
+                          <a:ea typeface="IBM Plex Sans"/>
+                        </a:rPr>
+                        <a:t>Акумулятор Li-Pol</a:t>
+                      </a:r>
+                      <a:endParaRPr lang="uk-UA" sz="1600" b="0" u="none" strike="noStrike">
+                        <a:solidFill>
+                          <a:srgbClr val="000000"/>
+                        </a:solidFill>
+                        <a:effectLst/>
+                        <a:uFillTx/>
+                        <a:latin typeface="Arial"/>
+                      </a:endParaRPr>
+                    </a:p>
+                  </a:txBody>
+                  <a:tcPr anchor="t" marL="70920" marR="70920" marT="70920" marB="70920">
+                    <a:lnL w="12240">
+                      <a:solidFill>
+                        <a:srgbClr val="C4C1BC"/>
+                      </a:solidFill>
+                      <a:prstDash val="solid"/>
+                    </a:lnL>
+                    <a:lnR w="12240">
+                      <a:solidFill>
+                        <a:srgbClr val="C4C1BC"/>
+                      </a:solidFill>
+                      <a:prstDash val="solid"/>
+                    </a:lnR>
+                    <a:lnT w="12240">
+                      <a:solidFill>
+                        <a:srgbClr val="C4C1BC"/>
+                      </a:solidFill>
+                      <a:prstDash val="solid"/>
+                    </a:lnT>
+                    <a:lnB w="12240">
+                      <a:solidFill>
+                        <a:srgbClr val="C4C1BC"/>
+                      </a:solidFill>
+                      <a:prstDash val="solid"/>
+                    </a:lnB>
+                    <a:noFill/>
+                  </a:tcPr>
+                </a:tc>
+                <a:tc>
+                  <a:txBody>
+                    <a:bodyPr lIns="70920" tIns="70920" rIns="70920" bIns="70920" anchor="t">
+                      <a:noAutofit/>
+                    </a:bodyPr>
+                    <a:p>
+                      <a:pPr defTabSz="914400">
+                        <a:lnSpc>
+                          <a:spcPts val="2239"/>
+                        </a:lnSpc>
+                        <a:tabLst>
+                          <a:tab pos="0" algn="l"/>
+                        </a:tabLst>
+                      </a:pPr>
+                      <a:r>
+                        <a:rPr lang="en-US" sz="1600" b="0" u="none" strike="noStrike">
+                          <a:solidFill>
+                            <a:srgbClr val="121821"/>
+                          </a:solidFill>
+                          <a:effectLst/>
+                          <a:uFillTx/>
+                          <a:latin typeface="IBM Plex Sans"/>
+                          <a:ea typeface="IBM Plex Sans"/>
+                        </a:rPr>
+                        <a:t>автономність, заряд у веб</a:t>
+                      </a:r>
+                      <a:endParaRPr lang="uk-UA" sz="1600" b="0" u="none" strike="noStrike">
+                        <a:solidFill>
+                          <a:srgbClr val="000000"/>
+                        </a:solidFill>
+                        <a:effectLst/>
+                        <a:uFillTx/>
+                        <a:latin typeface="Arial"/>
+                      </a:endParaRPr>
+                    </a:p>
+                  </a:txBody>
+                  <a:tcPr anchor="t" marL="70920" marR="70920" marT="70920" marB="70920">
+                    <a:lnL w="12240">
+                      <a:solidFill>
+                        <a:srgbClr val="C4C1BC"/>
+                      </a:solidFill>
+                      <a:prstDash val="solid"/>
+                    </a:lnL>
+                    <a:lnR w="12240">
+                      <a:solidFill>
+                        <a:srgbClr val="C4C1BC"/>
+                      </a:solidFill>
+                      <a:prstDash val="solid"/>
+                    </a:lnR>
+                    <a:lnT w="12240">
+                      <a:solidFill>
+                        <a:srgbClr val="C4C1BC"/>
+                      </a:solidFill>
+                      <a:prstDash val="solid"/>
+                    </a:lnT>
+                    <a:lnB w="12240">
+                      <a:solidFill>
+                        <a:srgbClr val="C4C1BC"/>
+                      </a:solidFill>
+                      <a:prstDash val="solid"/>
+                    </a:lnB>
+                    <a:noFill/>
+                  </a:tcPr>
+                </a:tc>
+                <a:tc>
+                  <a:txBody>
+                    <a:bodyPr lIns="70920" tIns="70920" rIns="70920" bIns="70920" anchor="t">
+                      <a:noAutofit/>
+                    </a:bodyPr>
+                    <a:p>
+                      <a:pPr defTabSz="914400">
+                        <a:lnSpc>
+                          <a:spcPts val="2239"/>
+                        </a:lnSpc>
+                        <a:tabLst>
+                          <a:tab pos="0" algn="l"/>
+                        </a:tabLst>
+                      </a:pPr>
+                      <a:r>
+                        <a:rPr lang="en-US" sz="1600" b="0" u="none" strike="noStrike">
+                          <a:solidFill>
+                            <a:srgbClr val="121821"/>
+                          </a:solidFill>
+                          <a:effectLst/>
+                          <a:uFillTx/>
+                          <a:latin typeface="IBM Plex Sans"/>
+                          <a:ea typeface="IBM Plex Sans"/>
+                        </a:rPr>
+                        <a:t>34</a:t>
+                      </a:r>
+                      <a:endParaRPr lang="uk-UA" sz="1600" b="0" u="none" strike="noStrike">
+                        <a:solidFill>
+                          <a:srgbClr val="000000"/>
+                        </a:solidFill>
+                        <a:effectLst/>
+                        <a:uFillTx/>
+                        <a:latin typeface="Arial"/>
+                      </a:endParaRPr>
+                    </a:p>
+                  </a:txBody>
+                  <a:tcPr anchor="t" marL="70920" marR="70920" marT="70920" marB="70920">
+                    <a:lnL w="12240">
+                      <a:solidFill>
+                        <a:srgbClr val="C4C1BC"/>
+                      </a:solidFill>
+                      <a:prstDash val="solid"/>
+                    </a:lnL>
+                    <a:lnR w="12240">
+                      <a:solidFill>
+                        <a:srgbClr val="C4C1BC"/>
+                      </a:solidFill>
+                      <a:prstDash val="solid"/>
+                    </a:lnR>
+                    <a:lnT w="12240">
+                      <a:solidFill>
+                        <a:srgbClr val="C4C1BC"/>
+                      </a:solidFill>
+                      <a:prstDash val="solid"/>
+                    </a:lnT>
+                    <a:lnB w="12240">
+                      <a:solidFill>
+                        <a:srgbClr val="C4C1BC"/>
+                      </a:solidFill>
+                      <a:prstDash val="solid"/>
+                    </a:lnB>
+                    <a:noFill/>
+                  </a:tcPr>
+                </a:tc>
+              </a:tr>
             </a:tbl>
           </a:graphicData>
         </a:graphic>
@@ -8176,7 +9215,7 @@
     <p:bg>
       <p:bgPr>
         <a:solidFill>
-          <a:srgbClr val="121821"/>
+          <a:srgbClr val="F5F2EC"/>
         </a:solidFill>
       </p:bgPr>
     </p:bg>
@@ -8202,8 +9241,8 @@
         </p:nvSpPr>
         <p:spPr>
           <a:xfrm>
-            <a:off x="812880" y="812880"/>
-            <a:ext cx="10883160" cy="238320"/>
+            <a:off x="812880" y="1267560"/>
+            <a:ext cx="3400560" cy="238320"/>
           </a:xfrm>
           <a:prstGeom prst="rect">
             <a:avLst/>
@@ -8235,18 +9274,18 @@
             <a:r>
               <a:rPr lang="en-US" sz="1200" b="0" u="none" spc="99" strike="noStrike">
                 <a:solidFill>
-                  <a:srgbClr val="E8A33D"/>
+                  <a:srgbClr val="B8322B"/>
                 </a:solidFill>
                 <a:effectLst/>
                 <a:uFillTx/>
                 <a:latin typeface="JetBrains Mono"/>
                 <a:ea typeface="JetBrains Mono"/>
               </a:rPr>
-              <a:t>АРХІТЕКТУРА ПЗ</a:t>
+              <a:t>СХЕМА ПІДКЛЮЧЕННЯ</a:t>
             </a:r>
             <a:endParaRPr lang="uk-UA" sz="1200" b="0" u="none" strike="noStrike">
               <a:solidFill>
-                <a:srgbClr val="FFFFFF"/>
+                <a:srgbClr val="000000"/>
               </a:solidFill>
               <a:effectLst/>
               <a:uFillTx/>
@@ -8263,8 +9302,8 @@
         </p:nvSpPr>
         <p:spPr>
           <a:xfrm>
-            <a:off x="812880" y="1127880"/>
-            <a:ext cx="10883160" cy="527760"/>
+            <a:off x="812880" y="1633320"/>
+            <a:ext cx="3400560" cy="1533600"/>
           </a:xfrm>
           <a:prstGeom prst="rect">
             <a:avLst/>
@@ -8296,50 +9335,43 @@
             <a:r>
               <a:rPr lang="en-US" sz="3600" b="1" u="none" strike="noStrike">
                 <a:solidFill>
-                  <a:srgbClr val="F5F2EC"/>
+                  <a:srgbClr val="121821"/>
                 </a:solidFill>
                 <a:effectLst/>
                 <a:uFillTx/>
                 <a:latin typeface="IBM Plex Sans"/>
                 <a:ea typeface="IBM Plex Sans"/>
               </a:rPr>
-              <a:t>7 задач FreeRTOS на ESP-IDF</a:t>
+              <a:t>Що підключається до плати</a:t>
             </a:r>
             <a:endParaRPr lang="uk-UA" sz="3600" b="0" u="none" strike="noStrike">
               <a:solidFill>
-                <a:srgbClr val="FFFFFF"/>
-              </a:solidFill>
-              <a:effectLst/>
-              <a:uFillTx/>
-              <a:latin typeface="Arial"/>
-            </a:endParaRPr>
-          </a:p>
-        </p:txBody>
-      </p:sp>
-      <p:sp>
-        <p:nvSpPr>
-          <p:cNvPr id="53" name="Shape 2"/>
+                <a:srgbClr val="000000"/>
+              </a:solidFill>
+              <a:effectLst/>
+              <a:uFillTx/>
+              <a:latin typeface="Arial"/>
+            </a:endParaRPr>
+          </a:p>
+        </p:txBody>
+      </p:sp>
+      <p:sp>
+        <p:nvSpPr>
+          <p:cNvPr id="53" name="Text 2"/>
           <p:cNvSpPr/>
           <p:nvPr/>
         </p:nvSpPr>
         <p:spPr>
           <a:xfrm>
-            <a:off x="819000" y="1931760"/>
-            <a:ext cx="1653120" cy="804600"/>
-          </a:xfrm>
-          <a:prstGeom prst="roundRect">
-            <a:avLst>
-              <a:gd name="adj" fmla="val 8676"/>
-            </a:avLst>
-          </a:prstGeom>
-          <a:solidFill>
-            <a:srgbClr val="1B2330"/>
-          </a:solidFill>
-          <a:ln w="12700">
-            <a:solidFill>
-              <a:srgbClr val="3A4658"/>
-            </a:solidFill>
-            <a:round/>
+            <a:off x="812880" y="3294360"/>
+            <a:ext cx="3400560" cy="594000"/>
+          </a:xfrm>
+          <a:prstGeom prst="rect">
+            <a:avLst/>
+          </a:prstGeom>
+          <a:noFill/>
+          <a:ln w="0">
+            <a:noFill/>
           </a:ln>
         </p:spPr>
         <p:style>
@@ -8349,14 +9381,33 @@
           <a:fontRef idx="minor"/>
         </p:style>
         <p:txBody>
-          <a:bodyPr lIns="90000" tIns="45000" rIns="90000" bIns="45000" anchor="t">
-            <a:noAutofit/>
-          </a:bodyPr>
-          <a:p>
-            <a:pPr/>
-            <a:endParaRPr lang="uk-UA" sz="1800" b="0" u="none" strike="noStrike">
-              <a:solidFill>
-                <a:srgbClr val="FFFFFF"/>
+          <a:bodyPr lIns="0" tIns="0" rIns="0" bIns="0" anchor="t">
+            <a:normAutofit/>
+          </a:bodyPr>
+          <a:p>
+            <a:pPr defTabSz="914400">
+              <a:lnSpc>
+                <a:spcPts val="2239"/>
+              </a:lnSpc>
+              <a:tabLst>
+                <a:tab pos="0" algn="l"/>
+              </a:tabLst>
+            </a:pPr>
+            <a:r>
+              <a:rPr lang="en-US" sz="1600" b="0" u="none" strike="noStrike">
+                <a:solidFill>
+                  <a:srgbClr val="4A5568"/>
+                </a:solidFill>
+                <a:effectLst/>
+                <a:uFillTx/>
+                <a:latin typeface="IBM Plex Sans"/>
+                <a:ea typeface="IBM Plex Sans"/>
+              </a:rPr>
+              <a:t>Дисплей, підсвітка й кнопка BOOT уже є на платі.</a:t>
+            </a:r>
+            <a:endParaRPr lang="uk-UA" sz="1600" b="0" u="none" strike="noStrike">
+              <a:solidFill>
+                <a:srgbClr val="000000"/>
               </a:solidFill>
               <a:effectLst/>
               <a:uFillTx/>
@@ -8373,8 +9424,8 @@
         </p:nvSpPr>
         <p:spPr>
           <a:xfrm>
-            <a:off x="952560" y="2090520"/>
-            <a:ext cx="1386360" cy="512640"/>
+            <a:off x="812880" y="4015440"/>
+            <a:ext cx="3400560" cy="878400"/>
           </a:xfrm>
           <a:prstGeom prst="rect">
             <a:avLst/>
@@ -8395,9 +9446,9 @@
             <a:normAutofit/>
           </a:bodyPr>
           <a:p>
-            <a:pPr algn="ctr" defTabSz="914400">
-              <a:lnSpc>
-                <a:spcPts val="1919"/>
+            <a:pPr defTabSz="914400">
+              <a:lnSpc>
+                <a:spcPts val="2239"/>
               </a:lnSpc>
               <a:tabLst>
                 <a:tab pos="0" algn="l"/>
@@ -8406,74 +9457,43 @@
             <a:r>
               <a:rPr lang="en-US" sz="1600" b="0" u="none" strike="noStrike">
                 <a:solidFill>
-                  <a:srgbClr val="F5F2EC"/>
+                  <a:srgbClr val="4A5568"/>
                 </a:solidFill>
                 <a:effectLst/>
                 <a:uFillTx/>
                 <a:latin typeface="IBM Plex Sans"/>
                 <a:ea typeface="IBM Plex Sans"/>
               </a:rPr>
-              <a:t>API alerts.in.ua</a:t>
+              <a:t>Фоторезистор — на ADC1 (GPIO33), бо ADC2 не працює разом із Wi-Fi.</a:t>
             </a:r>
             <a:endParaRPr lang="uk-UA" sz="1600" b="0" u="none" strike="noStrike">
               <a:solidFill>
-                <a:srgbClr val="FFFFFF"/>
-              </a:solidFill>
-              <a:effectLst/>
-              <a:uFillTx/>
-              <a:latin typeface="Arial"/>
-            </a:endParaRPr>
-          </a:p>
-        </p:txBody>
-      </p:sp>
-      <p:pic>
-        <p:nvPicPr>
-          <p:cNvPr id="55" name="Image 0" descr="arrow-right"/>
-          <p:cNvPicPr/>
-          <p:nvPr/>
-        </p:nvPicPr>
-        <p:blipFill>
-          <a:blip r:embed="rId1"/>
-          <a:stretch/>
-        </p:blipFill>
-        <p:spPr>
-          <a:xfrm>
-            <a:off x="2580480" y="2245320"/>
-            <a:ext cx="355320" cy="177480"/>
-          </a:xfrm>
-          <a:prstGeom prst="rect">
-            <a:avLst/>
-          </a:prstGeom>
-          <a:noFill/>
-          <a:ln w="0">
-            <a:noFill/>
-          </a:ln>
-        </p:spPr>
-      </p:pic>
-      <p:sp>
-        <p:nvSpPr>
-          <p:cNvPr id="56" name="Shape 4"/>
+                <a:srgbClr val="000000"/>
+              </a:solidFill>
+              <a:effectLst/>
+              <a:uFillTx/>
+              <a:latin typeface="Arial"/>
+            </a:endParaRPr>
+          </a:p>
+        </p:txBody>
+      </p:sp>
+      <p:sp>
+        <p:nvSpPr>
+          <p:cNvPr id="55" name="Text 4"/>
           <p:cNvSpPr/>
           <p:nvPr/>
         </p:nvSpPr>
         <p:spPr>
           <a:xfrm>
-            <a:off x="3044160" y="2032920"/>
-            <a:ext cx="1653120" cy="601560"/>
-          </a:xfrm>
-          <a:prstGeom prst="roundRect">
-            <a:avLst>
-              <a:gd name="adj" fmla="val 11604"/>
-            </a:avLst>
-          </a:prstGeom>
-          <a:solidFill>
-            <a:srgbClr val="1B2330"/>
-          </a:solidFill>
-          <a:ln w="12700">
-            <a:solidFill>
-              <a:srgbClr val="3A4658"/>
-            </a:solidFill>
-            <a:round/>
+            <a:off x="812880" y="5021280"/>
+            <a:ext cx="3400560" cy="594000"/>
+          </a:xfrm>
+          <a:prstGeom prst="rect">
+            <a:avLst/>
+          </a:prstGeom>
+          <a:noFill/>
+          <a:ln w="0">
+            <a:noFill/>
           </a:ln>
         </p:spPr>
         <p:style>
@@ -8483,37 +9503,60 @@
           <a:fontRef idx="minor"/>
         </p:style>
         <p:txBody>
-          <a:bodyPr lIns="90000" tIns="45000" rIns="90000" bIns="45000" anchor="t">
-            <a:noAutofit/>
-          </a:bodyPr>
-          <a:p>
-            <a:pPr/>
-            <a:endParaRPr lang="uk-UA" sz="1800" b="0" u="none" strike="noStrike">
-              <a:solidFill>
-                <a:srgbClr val="FFFFFF"/>
-              </a:solidFill>
-              <a:effectLst/>
-              <a:uFillTx/>
-              <a:latin typeface="Arial"/>
-            </a:endParaRPr>
-          </a:p>
-        </p:txBody>
-      </p:sp>
-      <p:sp>
-        <p:nvSpPr>
-          <p:cNvPr id="57" name="Text 5"/>
+          <a:bodyPr lIns="0" tIns="0" rIns="0" bIns="0" anchor="t">
+            <a:normAutofit/>
+          </a:bodyPr>
+          <a:p>
+            <a:pPr defTabSz="914400">
+              <a:lnSpc>
+                <a:spcPts val="2239"/>
+              </a:lnSpc>
+              <a:tabLst>
+                <a:tab pos="0" algn="l"/>
+              </a:tabLst>
+            </a:pPr>
+            <a:r>
+              <a:rPr lang="en-US" sz="1600" b="0" u="none" strike="noStrike">
+                <a:solidFill>
+                  <a:srgbClr val="4A5568"/>
+                </a:solidFill>
+                <a:effectLst/>
+                <a:uFillTx/>
+                <a:latin typeface="IBM Plex Sans"/>
+                <a:ea typeface="IBM Plex Sans"/>
+              </a:rPr>
+              <a:t>Акумулятор — у штатний роз'єм BAT, через вимикач на «+».</a:t>
+            </a:r>
+            <a:endParaRPr lang="uk-UA" sz="1600" b="0" u="none" strike="noStrike">
+              <a:solidFill>
+                <a:srgbClr val="000000"/>
+              </a:solidFill>
+              <a:effectLst/>
+              <a:uFillTx/>
+              <a:latin typeface="Arial"/>
+            </a:endParaRPr>
+          </a:p>
+        </p:txBody>
+      </p:sp>
+      <p:sp>
+        <p:nvSpPr>
+          <p:cNvPr id="56" name="Shape 5"/>
           <p:cNvSpPr/>
           <p:nvPr/>
         </p:nvSpPr>
         <p:spPr>
           <a:xfrm>
-            <a:off x="3177360" y="2191680"/>
-            <a:ext cx="1386360" cy="309600"/>
-          </a:xfrm>
-          <a:prstGeom prst="rect">
-            <a:avLst/>
-          </a:prstGeom>
-          <a:noFill/>
+            <a:off x="4521240" y="1063800"/>
+            <a:ext cx="6857640" cy="4730400"/>
+          </a:xfrm>
+          <a:prstGeom prst="roundRect">
+            <a:avLst>
+              <a:gd name="adj" fmla="val 2148"/>
+            </a:avLst>
+          </a:prstGeom>
+          <a:solidFill>
+            <a:srgbClr val="FFFFFF"/>
+          </a:solidFill>
           <a:ln w="0">
             <a:noFill/>
           </a:ln>
@@ -8525,33 +9568,14 @@
           <a:fontRef idx="minor"/>
         </p:style>
         <p:txBody>
-          <a:bodyPr lIns="0" tIns="0" rIns="0" bIns="0" anchor="t">
-            <a:normAutofit/>
-          </a:bodyPr>
-          <a:p>
-            <a:pPr algn="ctr" defTabSz="914400">
-              <a:lnSpc>
-                <a:spcPts val="2239"/>
-              </a:lnSpc>
-              <a:tabLst>
-                <a:tab pos="0" algn="l"/>
-              </a:tabLst>
-            </a:pPr>
-            <a:r>
-              <a:rPr lang="en-US" sz="1600" b="0" u="none" strike="noStrike">
-                <a:solidFill>
-                  <a:srgbClr val="F5F2EC"/>
-                </a:solidFill>
-                <a:effectLst/>
-                <a:uFillTx/>
-                <a:latin typeface="JetBrains Mono"/>
-                <a:ea typeface="JetBrains Mono"/>
-              </a:rPr>
-              <a:t>fetch_task</a:t>
-            </a:r>
-            <a:endParaRPr lang="uk-UA" sz="1600" b="0" u="none" strike="noStrike">
-              <a:solidFill>
-                <a:srgbClr val="FFFFFF"/>
+          <a:bodyPr lIns="90000" tIns="45000" rIns="90000" bIns="45000" anchor="t">
+            <a:noAutofit/>
+          </a:bodyPr>
+          <a:p>
+            <a:pPr/>
+            <a:endParaRPr lang="uk-UA" sz="1800" b="0" u="none" strike="noStrike">
+              <a:solidFill>
+                <a:srgbClr val="000000"/>
               </a:solidFill>
               <a:effectLst/>
               <a:uFillTx/>
@@ -8562,18 +9586,18 @@
       </p:sp>
       <p:pic>
         <p:nvPicPr>
-          <p:cNvPr id="58" name="Image 1" descr="arrow-right"/>
+          <p:cNvPr id="57" name="Image 0" descr="Схема підключення: фоторезистор і резистор 10 кОм до GPIO33, зумер через 220 Ом до GPIO25, світлодіоди через 330 Ом до GPIO2 і GPIO15, акумулятор Li-Pol через вимикач у роз'єм BAT"/>
           <p:cNvPicPr/>
           <p:nvPr/>
         </p:nvPicPr>
         <p:blipFill>
-          <a:blip r:embed="rId2"/>
+          <a:blip r:embed="rId1"/>
           <a:stretch/>
         </p:blipFill>
         <p:spPr>
           <a:xfrm>
-            <a:off x="4805640" y="2245320"/>
-            <a:ext cx="355320" cy="177480"/>
+            <a:off x="5102280" y="1063800"/>
+            <a:ext cx="5695560" cy="4730400"/>
           </a:xfrm>
           <a:prstGeom prst="rect">
             <a:avLst/>
@@ -8584,1346 +9608,6 @@
           </a:ln>
         </p:spPr>
       </p:pic>
-      <p:sp>
-        <p:nvSpPr>
-          <p:cNvPr id="59" name="Shape 6"/>
-          <p:cNvSpPr/>
-          <p:nvPr/>
-        </p:nvSpPr>
-        <p:spPr>
-          <a:xfrm>
-            <a:off x="5269320" y="1891080"/>
-            <a:ext cx="1653120" cy="885960"/>
-          </a:xfrm>
-          <a:prstGeom prst="roundRect">
-            <a:avLst>
-              <a:gd name="adj" fmla="val 7880"/>
-            </a:avLst>
-          </a:prstGeom>
-          <a:solidFill>
-            <a:srgbClr val="1B2330"/>
-          </a:solidFill>
-          <a:ln w="12700">
-            <a:solidFill>
-              <a:srgbClr val="E8A33D"/>
-            </a:solidFill>
-            <a:round/>
-          </a:ln>
-        </p:spPr>
-        <p:style>
-          <a:lnRef idx="0"/>
-          <a:fillRef idx="0"/>
-          <a:effectRef idx="0"/>
-          <a:fontRef idx="minor"/>
-        </p:style>
-        <p:txBody>
-          <a:bodyPr lIns="90000" tIns="45000" rIns="90000" bIns="45000" anchor="t">
-            <a:noAutofit/>
-          </a:bodyPr>
-          <a:p>
-            <a:pPr/>
-            <a:endParaRPr lang="uk-UA" sz="1800" b="0" u="none" strike="noStrike">
-              <a:solidFill>
-                <a:srgbClr val="FFFFFF"/>
-              </a:solidFill>
-              <a:effectLst/>
-              <a:uFillTx/>
-              <a:latin typeface="Arial"/>
-            </a:endParaRPr>
-          </a:p>
-        </p:txBody>
-      </p:sp>
-      <p:sp>
-        <p:nvSpPr>
-          <p:cNvPr id="60" name="Text 7"/>
-          <p:cNvSpPr/>
-          <p:nvPr/>
-        </p:nvSpPr>
-        <p:spPr>
-          <a:xfrm>
-            <a:off x="5402520" y="2049840"/>
-            <a:ext cx="1386360" cy="594000"/>
-          </a:xfrm>
-          <a:prstGeom prst="rect">
-            <a:avLst/>
-          </a:prstGeom>
-          <a:noFill/>
-          <a:ln w="0">
-            <a:noFill/>
-          </a:ln>
-        </p:spPr>
-        <p:style>
-          <a:lnRef idx="0"/>
-          <a:fillRef idx="0"/>
-          <a:effectRef idx="0"/>
-          <a:fontRef idx="minor"/>
-        </p:style>
-        <p:txBody>
-          <a:bodyPr lIns="0" tIns="0" rIns="0" bIns="0" anchor="t">
-            <a:normAutofit/>
-          </a:bodyPr>
-          <a:p>
-            <a:pPr algn="ctr" defTabSz="914400">
-              <a:lnSpc>
-                <a:spcPts val="2239"/>
-              </a:lnSpc>
-              <a:tabLst>
-                <a:tab pos="0" algn="l"/>
-              </a:tabLst>
-            </a:pPr>
-            <a:r>
-              <a:rPr lang="en-US" sz="1600" b="0" u="none" strike="noStrike">
-                <a:solidFill>
-                  <a:srgbClr val="F5F2EC"/>
-                </a:solidFill>
-                <a:effectLst/>
-                <a:uFillTx/>
-                <a:latin typeface="JetBrains Mono"/>
-                <a:ea typeface="JetBrains Mono"/>
-              </a:rPr>
-              <a:t>alert_queue</a:t>
-            </a:r>
-            <a:endParaRPr lang="uk-UA" sz="1600" b="0" u="none" strike="noStrike">
-              <a:solidFill>
-                <a:srgbClr val="FFFFFF"/>
-              </a:solidFill>
-              <a:effectLst/>
-              <a:uFillTx/>
-              <a:latin typeface="Arial"/>
-            </a:endParaRPr>
-          </a:p>
-        </p:txBody>
-      </p:sp>
-      <p:pic>
-        <p:nvPicPr>
-          <p:cNvPr id="61" name="Image 2" descr="arrow-right"/>
-          <p:cNvPicPr/>
-          <p:nvPr/>
-        </p:nvPicPr>
-        <p:blipFill>
-          <a:blip r:embed="rId3"/>
-          <a:stretch/>
-        </p:blipFill>
-        <p:spPr>
-          <a:xfrm>
-            <a:off x="7030800" y="2245320"/>
-            <a:ext cx="355320" cy="177480"/>
-          </a:xfrm>
-          <a:prstGeom prst="rect">
-            <a:avLst/>
-          </a:prstGeom>
-          <a:noFill/>
-          <a:ln w="0">
-            <a:noFill/>
-          </a:ln>
-        </p:spPr>
-      </p:pic>
-      <p:sp>
-        <p:nvSpPr>
-          <p:cNvPr id="62" name="Shape 8"/>
-          <p:cNvSpPr/>
-          <p:nvPr/>
-        </p:nvSpPr>
-        <p:spPr>
-          <a:xfrm>
-            <a:off x="7494120" y="1891080"/>
-            <a:ext cx="1653120" cy="885960"/>
-          </a:xfrm>
-          <a:prstGeom prst="roundRect">
-            <a:avLst>
-              <a:gd name="adj" fmla="val 7880"/>
-            </a:avLst>
-          </a:prstGeom>
-          <a:solidFill>
-            <a:srgbClr val="1B2330"/>
-          </a:solidFill>
-          <a:ln w="12700">
-            <a:solidFill>
-              <a:srgbClr val="3A4658"/>
-            </a:solidFill>
-            <a:round/>
-          </a:ln>
-        </p:spPr>
-        <p:style>
-          <a:lnRef idx="0"/>
-          <a:fillRef idx="0"/>
-          <a:effectRef idx="0"/>
-          <a:fontRef idx="minor"/>
-        </p:style>
-        <p:txBody>
-          <a:bodyPr lIns="90000" tIns="45000" rIns="90000" bIns="45000" anchor="t">
-            <a:noAutofit/>
-          </a:bodyPr>
-          <a:p>
-            <a:pPr/>
-            <a:endParaRPr lang="uk-UA" sz="1800" b="0" u="none" strike="noStrike">
-              <a:solidFill>
-                <a:srgbClr val="FFFFFF"/>
-              </a:solidFill>
-              <a:effectLst/>
-              <a:uFillTx/>
-              <a:latin typeface="Arial"/>
-            </a:endParaRPr>
-          </a:p>
-        </p:txBody>
-      </p:sp>
-      <p:sp>
-        <p:nvSpPr>
-          <p:cNvPr id="63" name="Text 9"/>
-          <p:cNvSpPr/>
-          <p:nvPr/>
-        </p:nvSpPr>
-        <p:spPr>
-          <a:xfrm>
-            <a:off x="7627680" y="2049840"/>
-            <a:ext cx="1386360" cy="594000"/>
-          </a:xfrm>
-          <a:prstGeom prst="rect">
-            <a:avLst/>
-          </a:prstGeom>
-          <a:noFill/>
-          <a:ln w="0">
-            <a:noFill/>
-          </a:ln>
-        </p:spPr>
-        <p:style>
-          <a:lnRef idx="0"/>
-          <a:fillRef idx="0"/>
-          <a:effectRef idx="0"/>
-          <a:fontRef idx="minor"/>
-        </p:style>
-        <p:txBody>
-          <a:bodyPr lIns="0" tIns="0" rIns="0" bIns="0" anchor="t">
-            <a:normAutofit/>
-          </a:bodyPr>
-          <a:p>
-            <a:pPr algn="ctr" defTabSz="914400">
-              <a:lnSpc>
-                <a:spcPts val="2239"/>
-              </a:lnSpc>
-              <a:tabLst>
-                <a:tab pos="0" algn="l"/>
-              </a:tabLst>
-            </a:pPr>
-            <a:r>
-              <a:rPr lang="en-US" sz="1600" b="0" u="none" strike="noStrike">
-                <a:solidFill>
-                  <a:srgbClr val="F5F2EC"/>
-                </a:solidFill>
-                <a:effectLst/>
-                <a:uFillTx/>
-                <a:latin typeface="JetBrains Mono"/>
-                <a:ea typeface="JetBrains Mono"/>
-              </a:rPr>
-              <a:t>render_task</a:t>
-            </a:r>
-            <a:endParaRPr lang="uk-UA" sz="1600" b="0" u="none" strike="noStrike">
-              <a:solidFill>
-                <a:srgbClr val="FFFFFF"/>
-              </a:solidFill>
-              <a:effectLst/>
-              <a:uFillTx/>
-              <a:latin typeface="Arial"/>
-            </a:endParaRPr>
-          </a:p>
-        </p:txBody>
-      </p:sp>
-      <p:pic>
-        <p:nvPicPr>
-          <p:cNvPr id="64" name="Image 3" descr="arrow-right"/>
-          <p:cNvPicPr/>
-          <p:nvPr/>
-        </p:nvPicPr>
-        <p:blipFill>
-          <a:blip r:embed="rId4"/>
-          <a:stretch/>
-        </p:blipFill>
-        <p:spPr>
-          <a:xfrm>
-            <a:off x="9255600" y="2245320"/>
-            <a:ext cx="355320" cy="177480"/>
-          </a:xfrm>
-          <a:prstGeom prst="rect">
-            <a:avLst/>
-          </a:prstGeom>
-          <a:noFill/>
-          <a:ln w="0">
-            <a:noFill/>
-          </a:ln>
-        </p:spPr>
-      </p:pic>
-      <p:sp>
-        <p:nvSpPr>
-          <p:cNvPr id="65" name="Shape 10"/>
-          <p:cNvSpPr/>
-          <p:nvPr/>
-        </p:nvSpPr>
-        <p:spPr>
-          <a:xfrm>
-            <a:off x="9719280" y="1931760"/>
-            <a:ext cx="1653120" cy="804600"/>
-          </a:xfrm>
-          <a:prstGeom prst="roundRect">
-            <a:avLst>
-              <a:gd name="adj" fmla="val 8676"/>
-            </a:avLst>
-          </a:prstGeom>
-          <a:solidFill>
-            <a:srgbClr val="1B2330"/>
-          </a:solidFill>
-          <a:ln w="12700">
-            <a:solidFill>
-              <a:srgbClr val="3A4658"/>
-            </a:solidFill>
-            <a:round/>
-          </a:ln>
-        </p:spPr>
-        <p:style>
-          <a:lnRef idx="0"/>
-          <a:fillRef idx="0"/>
-          <a:effectRef idx="0"/>
-          <a:fontRef idx="minor"/>
-        </p:style>
-        <p:txBody>
-          <a:bodyPr lIns="90000" tIns="45000" rIns="90000" bIns="45000" anchor="t">
-            <a:noAutofit/>
-          </a:bodyPr>
-          <a:p>
-            <a:pPr/>
-            <a:endParaRPr lang="uk-UA" sz="1800" b="0" u="none" strike="noStrike">
-              <a:solidFill>
-                <a:srgbClr val="FFFFFF"/>
-              </a:solidFill>
-              <a:effectLst/>
-              <a:uFillTx/>
-              <a:latin typeface="Arial"/>
-            </a:endParaRPr>
-          </a:p>
-        </p:txBody>
-      </p:sp>
-      <p:sp>
-        <p:nvSpPr>
-          <p:cNvPr id="66" name="Text 11"/>
-          <p:cNvSpPr/>
-          <p:nvPr/>
-        </p:nvSpPr>
-        <p:spPr>
-          <a:xfrm>
-            <a:off x="9852480" y="2090520"/>
-            <a:ext cx="1386360" cy="512640"/>
-          </a:xfrm>
-          <a:prstGeom prst="rect">
-            <a:avLst/>
-          </a:prstGeom>
-          <a:noFill/>
-          <a:ln w="0">
-            <a:noFill/>
-          </a:ln>
-        </p:spPr>
-        <p:style>
-          <a:lnRef idx="0"/>
-          <a:fillRef idx="0"/>
-          <a:effectRef idx="0"/>
-          <a:fontRef idx="minor"/>
-        </p:style>
-        <p:txBody>
-          <a:bodyPr lIns="0" tIns="0" rIns="0" bIns="0" anchor="t">
-            <a:normAutofit/>
-          </a:bodyPr>
-          <a:p>
-            <a:pPr algn="ctr" defTabSz="914400">
-              <a:lnSpc>
-                <a:spcPts val="1919"/>
-              </a:lnSpc>
-              <a:tabLst>
-                <a:tab pos="0" algn="l"/>
-              </a:tabLst>
-            </a:pPr>
-            <a:r>
-              <a:rPr lang="en-US" sz="1600" b="0" u="none" strike="noStrike">
-                <a:solidFill>
-                  <a:srgbClr val="F5F2EC"/>
-                </a:solidFill>
-                <a:effectLst/>
-                <a:uFillTx/>
-                <a:latin typeface="IBM Plex Sans"/>
-                <a:ea typeface="IBM Plex Sans"/>
-              </a:rPr>
-              <a:t>Дисплей і сирена</a:t>
-            </a:r>
-            <a:endParaRPr lang="uk-UA" sz="1600" b="0" u="none" strike="noStrike">
-              <a:solidFill>
-                <a:srgbClr val="FFFFFF"/>
-              </a:solidFill>
-              <a:effectLst/>
-              <a:uFillTx/>
-              <a:latin typeface="Arial"/>
-            </a:endParaRPr>
-          </a:p>
-        </p:txBody>
-      </p:sp>
-      <p:sp>
-        <p:nvSpPr>
-          <p:cNvPr id="67" name="Text 12"/>
-          <p:cNvSpPr/>
-          <p:nvPr/>
-        </p:nvSpPr>
-        <p:spPr>
-          <a:xfrm>
-            <a:off x="812880" y="3037680"/>
-            <a:ext cx="10883160" cy="309600"/>
-          </a:xfrm>
-          <a:prstGeom prst="rect">
-            <a:avLst/>
-          </a:prstGeom>
-          <a:noFill/>
-          <a:ln w="0">
-            <a:noFill/>
-          </a:ln>
-        </p:spPr>
-        <p:style>
-          <a:lnRef idx="0"/>
-          <a:fillRef idx="0"/>
-          <a:effectRef idx="0"/>
-          <a:fontRef idx="minor"/>
-        </p:style>
-        <p:txBody>
-          <a:bodyPr lIns="0" tIns="0" rIns="0" bIns="0" anchor="t">
-            <a:normAutofit/>
-          </a:bodyPr>
-          <a:p>
-            <a:pPr defTabSz="914400">
-              <a:lnSpc>
-                <a:spcPts val="2239"/>
-              </a:lnSpc>
-              <a:tabLst>
-                <a:tab pos="0" algn="l"/>
-              </a:tabLst>
-            </a:pPr>
-            <a:r>
-              <a:rPr lang="en-US" sz="1600" b="0" u="none" strike="noStrike">
-                <a:solidFill>
-                  <a:srgbClr val="C9D1DC"/>
-                </a:solidFill>
-                <a:effectLst/>
-                <a:uFillTx/>
-                <a:latin typeface="IBM Plex Sans"/>
-                <a:ea typeface="IBM Plex Sans"/>
-              </a:rPr>
-              <a:t>Паралельно працюють:</a:t>
-            </a:r>
-            <a:endParaRPr lang="uk-UA" sz="1600" b="0" u="none" strike="noStrike">
-              <a:solidFill>
-                <a:srgbClr val="FFFFFF"/>
-              </a:solidFill>
-              <a:effectLst/>
-              <a:uFillTx/>
-              <a:latin typeface="Arial"/>
-            </a:endParaRPr>
-          </a:p>
-        </p:txBody>
-      </p:sp>
-      <p:sp>
-        <p:nvSpPr>
-          <p:cNvPr id="68" name="Shape 13"/>
-          <p:cNvSpPr/>
-          <p:nvPr/>
-        </p:nvSpPr>
-        <p:spPr>
-          <a:xfrm>
-            <a:off x="812880" y="3576240"/>
-            <a:ext cx="1990800" cy="1117080"/>
-          </a:xfrm>
-          <a:prstGeom prst="roundRect">
-            <a:avLst>
-              <a:gd name="adj" fmla="val 6819"/>
-            </a:avLst>
-          </a:prstGeom>
-          <a:solidFill>
-            <a:srgbClr val="1B2330"/>
-          </a:solidFill>
-          <a:ln w="0">
-            <a:noFill/>
-          </a:ln>
-        </p:spPr>
-        <p:style>
-          <a:lnRef idx="0"/>
-          <a:fillRef idx="0"/>
-          <a:effectRef idx="0"/>
-          <a:fontRef idx="minor"/>
-        </p:style>
-        <p:txBody>
-          <a:bodyPr lIns="90000" tIns="45000" rIns="90000" bIns="45000" anchor="t">
-            <a:noAutofit/>
-          </a:bodyPr>
-          <a:p>
-            <a:pPr/>
-            <a:endParaRPr lang="uk-UA" sz="1800" b="0" u="none" strike="noStrike">
-              <a:solidFill>
-                <a:srgbClr val="FFFFFF"/>
-              </a:solidFill>
-              <a:effectLst/>
-              <a:uFillTx/>
-              <a:latin typeface="Arial"/>
-            </a:endParaRPr>
-          </a:p>
-        </p:txBody>
-      </p:sp>
-      <p:sp>
-        <p:nvSpPr>
-          <p:cNvPr id="69" name="Text 14"/>
-          <p:cNvSpPr/>
-          <p:nvPr/>
-        </p:nvSpPr>
-        <p:spPr>
-          <a:xfrm>
-            <a:off x="990720" y="3754080"/>
-            <a:ext cx="1686240" cy="273960"/>
-          </a:xfrm>
-          <a:prstGeom prst="rect">
-            <a:avLst/>
-          </a:prstGeom>
-          <a:noFill/>
-          <a:ln w="0">
-            <a:noFill/>
-          </a:ln>
-        </p:spPr>
-        <p:style>
-          <a:lnRef idx="0"/>
-          <a:fillRef idx="0"/>
-          <a:effectRef idx="0"/>
-          <a:fontRef idx="minor"/>
-        </p:style>
-        <p:txBody>
-          <a:bodyPr lIns="0" tIns="0" rIns="0" bIns="0" anchor="t">
-            <a:normAutofit/>
-          </a:bodyPr>
-          <a:p>
-            <a:pPr defTabSz="914400">
-              <a:lnSpc>
-                <a:spcPts val="1959"/>
-              </a:lnSpc>
-              <a:tabLst>
-                <a:tab pos="0" algn="l"/>
-              </a:tabLst>
-            </a:pPr>
-            <a:r>
-              <a:rPr lang="en-US" sz="1400" b="0" u="none" strike="noStrike">
-                <a:solidFill>
-                  <a:srgbClr val="E8A33D"/>
-                </a:solidFill>
-                <a:effectLst/>
-                <a:uFillTx/>
-                <a:latin typeface="JetBrains Mono"/>
-                <a:ea typeface="JetBrains Mono"/>
-              </a:rPr>
-              <a:t>wifi_task</a:t>
-            </a:r>
-            <a:endParaRPr lang="uk-UA" sz="1400" b="0" u="none" strike="noStrike">
-              <a:solidFill>
-                <a:srgbClr val="FFFFFF"/>
-              </a:solidFill>
-              <a:effectLst/>
-              <a:uFillTx/>
-              <a:latin typeface="Arial"/>
-            </a:endParaRPr>
-          </a:p>
-        </p:txBody>
-      </p:sp>
-      <p:sp>
-        <p:nvSpPr>
-          <p:cNvPr id="70" name="Text 15"/>
-          <p:cNvSpPr/>
-          <p:nvPr/>
-        </p:nvSpPr>
-        <p:spPr>
-          <a:xfrm>
-            <a:off x="990720" y="4053600"/>
-            <a:ext cx="1686240" cy="487080"/>
-          </a:xfrm>
-          <a:prstGeom prst="rect">
-            <a:avLst/>
-          </a:prstGeom>
-          <a:noFill/>
-          <a:ln w="0">
-            <a:noFill/>
-          </a:ln>
-        </p:spPr>
-        <p:style>
-          <a:lnRef idx="0"/>
-          <a:fillRef idx="0"/>
-          <a:effectRef idx="0"/>
-          <a:fontRef idx="minor"/>
-        </p:style>
-        <p:txBody>
-          <a:bodyPr lIns="0" tIns="0" rIns="0" bIns="0" anchor="t">
-            <a:normAutofit/>
-          </a:bodyPr>
-          <a:p>
-            <a:pPr defTabSz="914400">
-              <a:lnSpc>
-                <a:spcPts val="1820"/>
-              </a:lnSpc>
-              <a:tabLst>
-                <a:tab pos="0" algn="l"/>
-              </a:tabLst>
-            </a:pPr>
-            <a:r>
-              <a:rPr lang="en-US" sz="1400" b="0" u="none" strike="noStrike">
-                <a:solidFill>
-                  <a:srgbClr val="C9D1DC"/>
-                </a:solidFill>
-                <a:effectLst/>
-                <a:uFillTx/>
-                <a:latin typeface="IBM Plex Sans"/>
-                <a:ea typeface="IBM Plex Sans"/>
-              </a:rPr>
-              <a:t>Wi-Fi і перепідключення</a:t>
-            </a:r>
-            <a:endParaRPr lang="uk-UA" sz="1400" b="0" u="none" strike="noStrike">
-              <a:solidFill>
-                <a:srgbClr val="FFFFFF"/>
-              </a:solidFill>
-              <a:effectLst/>
-              <a:uFillTx/>
-              <a:latin typeface="Arial"/>
-            </a:endParaRPr>
-          </a:p>
-        </p:txBody>
-      </p:sp>
-      <p:sp>
-        <p:nvSpPr>
-          <p:cNvPr id="71" name="Shape 16"/>
-          <p:cNvSpPr/>
-          <p:nvPr/>
-        </p:nvSpPr>
-        <p:spPr>
-          <a:xfrm>
-            <a:off x="2956680" y="3576240"/>
-            <a:ext cx="1991160" cy="1117080"/>
-          </a:xfrm>
-          <a:prstGeom prst="roundRect">
-            <a:avLst>
-              <a:gd name="adj" fmla="val 6819"/>
-            </a:avLst>
-          </a:prstGeom>
-          <a:solidFill>
-            <a:srgbClr val="1B2330"/>
-          </a:solidFill>
-          <a:ln w="0">
-            <a:noFill/>
-          </a:ln>
-        </p:spPr>
-        <p:style>
-          <a:lnRef idx="0"/>
-          <a:fillRef idx="0"/>
-          <a:effectRef idx="0"/>
-          <a:fontRef idx="minor"/>
-        </p:style>
-        <p:txBody>
-          <a:bodyPr lIns="90000" tIns="45000" rIns="90000" bIns="45000" anchor="t">
-            <a:noAutofit/>
-          </a:bodyPr>
-          <a:p>
-            <a:pPr/>
-            <a:endParaRPr lang="uk-UA" sz="1800" b="0" u="none" strike="noStrike">
-              <a:solidFill>
-                <a:srgbClr val="FFFFFF"/>
-              </a:solidFill>
-              <a:effectLst/>
-              <a:uFillTx/>
-              <a:latin typeface="Arial"/>
-            </a:endParaRPr>
-          </a:p>
-        </p:txBody>
-      </p:sp>
-      <p:sp>
-        <p:nvSpPr>
-          <p:cNvPr id="72" name="Text 17"/>
-          <p:cNvSpPr/>
-          <p:nvPr/>
-        </p:nvSpPr>
-        <p:spPr>
-          <a:xfrm>
-            <a:off x="3134160" y="3754080"/>
-            <a:ext cx="1686240" cy="273960"/>
-          </a:xfrm>
-          <a:prstGeom prst="rect">
-            <a:avLst/>
-          </a:prstGeom>
-          <a:noFill/>
-          <a:ln w="0">
-            <a:noFill/>
-          </a:ln>
-        </p:spPr>
-        <p:style>
-          <a:lnRef idx="0"/>
-          <a:fillRef idx="0"/>
-          <a:effectRef idx="0"/>
-          <a:fontRef idx="minor"/>
-        </p:style>
-        <p:txBody>
-          <a:bodyPr lIns="0" tIns="0" rIns="0" bIns="0" anchor="t">
-            <a:normAutofit/>
-          </a:bodyPr>
-          <a:p>
-            <a:pPr defTabSz="914400">
-              <a:lnSpc>
-                <a:spcPts val="1959"/>
-              </a:lnSpc>
-              <a:tabLst>
-                <a:tab pos="0" algn="l"/>
-              </a:tabLst>
-            </a:pPr>
-            <a:r>
-              <a:rPr lang="en-US" sz="1400" b="0" u="none" strike="noStrike">
-                <a:solidFill>
-                  <a:srgbClr val="E8A33D"/>
-                </a:solidFill>
-                <a:effectLst/>
-                <a:uFillTx/>
-                <a:latin typeface="JetBrains Mono"/>
-                <a:ea typeface="JetBrains Mono"/>
-              </a:rPr>
-              <a:t>buzzer_task</a:t>
-            </a:r>
-            <a:endParaRPr lang="uk-UA" sz="1400" b="0" u="none" strike="noStrike">
-              <a:solidFill>
-                <a:srgbClr val="FFFFFF"/>
-              </a:solidFill>
-              <a:effectLst/>
-              <a:uFillTx/>
-              <a:latin typeface="Arial"/>
-            </a:endParaRPr>
-          </a:p>
-        </p:txBody>
-      </p:sp>
-      <p:sp>
-        <p:nvSpPr>
-          <p:cNvPr id="73" name="Text 18"/>
-          <p:cNvSpPr/>
-          <p:nvPr/>
-        </p:nvSpPr>
-        <p:spPr>
-          <a:xfrm>
-            <a:off x="3134160" y="4053600"/>
-            <a:ext cx="1686240" cy="487080"/>
-          </a:xfrm>
-          <a:prstGeom prst="rect">
-            <a:avLst/>
-          </a:prstGeom>
-          <a:noFill/>
-          <a:ln w="0">
-            <a:noFill/>
-          </a:ln>
-        </p:spPr>
-        <p:style>
-          <a:lnRef idx="0"/>
-          <a:fillRef idx="0"/>
-          <a:effectRef idx="0"/>
-          <a:fontRef idx="minor"/>
-        </p:style>
-        <p:txBody>
-          <a:bodyPr lIns="0" tIns="0" rIns="0" bIns="0" anchor="t">
-            <a:normAutofit/>
-          </a:bodyPr>
-          <a:p>
-            <a:pPr defTabSz="914400">
-              <a:lnSpc>
-                <a:spcPts val="1820"/>
-              </a:lnSpc>
-              <a:tabLst>
-                <a:tab pos="0" algn="l"/>
-              </a:tabLst>
-            </a:pPr>
-            <a:r>
-              <a:rPr lang="en-US" sz="1400" b="0" u="none" strike="noStrike">
-                <a:solidFill>
-                  <a:srgbClr val="C9D1DC"/>
-                </a:solidFill>
-                <a:effectLst/>
-                <a:uFillTx/>
-                <a:latin typeface="IBM Plex Sans"/>
-                <a:ea typeface="IBM Plex Sans"/>
-              </a:rPr>
-              <a:t>неблокуюча сирена</a:t>
-            </a:r>
-            <a:endParaRPr lang="uk-UA" sz="1400" b="0" u="none" strike="noStrike">
-              <a:solidFill>
-                <a:srgbClr val="FFFFFF"/>
-              </a:solidFill>
-              <a:effectLst/>
-              <a:uFillTx/>
-              <a:latin typeface="Arial"/>
-            </a:endParaRPr>
-          </a:p>
-        </p:txBody>
-      </p:sp>
-      <p:sp>
-        <p:nvSpPr>
-          <p:cNvPr id="74" name="Shape 19"/>
-          <p:cNvSpPr/>
-          <p:nvPr/>
-        </p:nvSpPr>
-        <p:spPr>
-          <a:xfrm>
-            <a:off x="5100480" y="3576240"/>
-            <a:ext cx="1990800" cy="1117080"/>
-          </a:xfrm>
-          <a:prstGeom prst="roundRect">
-            <a:avLst>
-              <a:gd name="adj" fmla="val 6819"/>
-            </a:avLst>
-          </a:prstGeom>
-          <a:solidFill>
-            <a:srgbClr val="1B2330"/>
-          </a:solidFill>
-          <a:ln w="0">
-            <a:noFill/>
-          </a:ln>
-        </p:spPr>
-        <p:style>
-          <a:lnRef idx="0"/>
-          <a:fillRef idx="0"/>
-          <a:effectRef idx="0"/>
-          <a:fontRef idx="minor"/>
-        </p:style>
-        <p:txBody>
-          <a:bodyPr lIns="90000" tIns="45000" rIns="90000" bIns="45000" anchor="t">
-            <a:noAutofit/>
-          </a:bodyPr>
-          <a:p>
-            <a:pPr/>
-            <a:endParaRPr lang="uk-UA" sz="1800" b="0" u="none" strike="noStrike">
-              <a:solidFill>
-                <a:srgbClr val="FFFFFF"/>
-              </a:solidFill>
-              <a:effectLst/>
-              <a:uFillTx/>
-              <a:latin typeface="Arial"/>
-            </a:endParaRPr>
-          </a:p>
-        </p:txBody>
-      </p:sp>
-      <p:sp>
-        <p:nvSpPr>
-          <p:cNvPr id="75" name="Text 20"/>
-          <p:cNvSpPr/>
-          <p:nvPr/>
-        </p:nvSpPr>
-        <p:spPr>
-          <a:xfrm>
-            <a:off x="5278320" y="3754080"/>
-            <a:ext cx="1686240" cy="273960"/>
-          </a:xfrm>
-          <a:prstGeom prst="rect">
-            <a:avLst/>
-          </a:prstGeom>
-          <a:noFill/>
-          <a:ln w="0">
-            <a:noFill/>
-          </a:ln>
-        </p:spPr>
-        <p:style>
-          <a:lnRef idx="0"/>
-          <a:fillRef idx="0"/>
-          <a:effectRef idx="0"/>
-          <a:fontRef idx="minor"/>
-        </p:style>
-        <p:txBody>
-          <a:bodyPr lIns="0" tIns="0" rIns="0" bIns="0" anchor="t">
-            <a:normAutofit/>
-          </a:bodyPr>
-          <a:p>
-            <a:pPr defTabSz="914400">
-              <a:lnSpc>
-                <a:spcPts val="1959"/>
-              </a:lnSpc>
-              <a:tabLst>
-                <a:tab pos="0" algn="l"/>
-              </a:tabLst>
-            </a:pPr>
-            <a:r>
-              <a:rPr lang="en-US" sz="1400" b="0" u="none" strike="noStrike">
-                <a:solidFill>
-                  <a:srgbClr val="E8A33D"/>
-                </a:solidFill>
-                <a:effectLst/>
-                <a:uFillTx/>
-                <a:latin typeface="JetBrains Mono"/>
-                <a:ea typeface="JetBrains Mono"/>
-              </a:rPr>
-              <a:t>button_task</a:t>
-            </a:r>
-            <a:endParaRPr lang="uk-UA" sz="1400" b="0" u="none" strike="noStrike">
-              <a:solidFill>
-                <a:srgbClr val="FFFFFF"/>
-              </a:solidFill>
-              <a:effectLst/>
-              <a:uFillTx/>
-              <a:latin typeface="Arial"/>
-            </a:endParaRPr>
-          </a:p>
-        </p:txBody>
-      </p:sp>
-      <p:sp>
-        <p:nvSpPr>
-          <p:cNvPr id="76" name="Text 21"/>
-          <p:cNvSpPr/>
-          <p:nvPr/>
-        </p:nvSpPr>
-        <p:spPr>
-          <a:xfrm>
-            <a:off x="5278320" y="4053600"/>
-            <a:ext cx="1686240" cy="487080"/>
-          </a:xfrm>
-          <a:prstGeom prst="rect">
-            <a:avLst/>
-          </a:prstGeom>
-          <a:noFill/>
-          <a:ln w="0">
-            <a:noFill/>
-          </a:ln>
-        </p:spPr>
-        <p:style>
-          <a:lnRef idx="0"/>
-          <a:fillRef idx="0"/>
-          <a:effectRef idx="0"/>
-          <a:fontRef idx="minor"/>
-        </p:style>
-        <p:txBody>
-          <a:bodyPr lIns="0" tIns="0" rIns="0" bIns="0" anchor="t">
-            <a:normAutofit/>
-          </a:bodyPr>
-          <a:p>
-            <a:pPr defTabSz="914400">
-              <a:lnSpc>
-                <a:spcPts val="1820"/>
-              </a:lnSpc>
-              <a:tabLst>
-                <a:tab pos="0" algn="l"/>
-              </a:tabLst>
-            </a:pPr>
-            <a:r>
-              <a:rPr lang="en-US" sz="1400" b="0" u="none" strike="noStrike">
-                <a:solidFill>
-                  <a:srgbClr val="C9D1DC"/>
-                </a:solidFill>
-                <a:effectLst/>
-                <a:uFillTx/>
-                <a:latin typeface="IBM Plex Sans"/>
-                <a:ea typeface="IBM Plex Sans"/>
-              </a:rPr>
-              <a:t>кнопка через переривання</a:t>
-            </a:r>
-            <a:endParaRPr lang="uk-UA" sz="1400" b="0" u="none" strike="noStrike">
-              <a:solidFill>
-                <a:srgbClr val="FFFFFF"/>
-              </a:solidFill>
-              <a:effectLst/>
-              <a:uFillTx/>
-              <a:latin typeface="Arial"/>
-            </a:endParaRPr>
-          </a:p>
-        </p:txBody>
-      </p:sp>
-      <p:sp>
-        <p:nvSpPr>
-          <p:cNvPr id="77" name="Shape 22"/>
-          <p:cNvSpPr/>
-          <p:nvPr/>
-        </p:nvSpPr>
-        <p:spPr>
-          <a:xfrm>
-            <a:off x="7243920" y="3576240"/>
-            <a:ext cx="1991160" cy="1117080"/>
-          </a:xfrm>
-          <a:prstGeom prst="roundRect">
-            <a:avLst>
-              <a:gd name="adj" fmla="val 6819"/>
-            </a:avLst>
-          </a:prstGeom>
-          <a:solidFill>
-            <a:srgbClr val="1B2330"/>
-          </a:solidFill>
-          <a:ln w="0">
-            <a:noFill/>
-          </a:ln>
-        </p:spPr>
-        <p:style>
-          <a:lnRef idx="0"/>
-          <a:fillRef idx="0"/>
-          <a:effectRef idx="0"/>
-          <a:fontRef idx="minor"/>
-        </p:style>
-        <p:txBody>
-          <a:bodyPr lIns="90000" tIns="45000" rIns="90000" bIns="45000" anchor="t">
-            <a:noAutofit/>
-          </a:bodyPr>
-          <a:p>
-            <a:pPr/>
-            <a:endParaRPr lang="uk-UA" sz="1800" b="0" u="none" strike="noStrike">
-              <a:solidFill>
-                <a:srgbClr val="FFFFFF"/>
-              </a:solidFill>
-              <a:effectLst/>
-              <a:uFillTx/>
-              <a:latin typeface="Arial"/>
-            </a:endParaRPr>
-          </a:p>
-        </p:txBody>
-      </p:sp>
-      <p:sp>
-        <p:nvSpPr>
-          <p:cNvPr id="78" name="Text 23"/>
-          <p:cNvSpPr/>
-          <p:nvPr/>
-        </p:nvSpPr>
-        <p:spPr>
-          <a:xfrm>
-            <a:off x="7421760" y="3754080"/>
-            <a:ext cx="1686240" cy="273960"/>
-          </a:xfrm>
-          <a:prstGeom prst="rect">
-            <a:avLst/>
-          </a:prstGeom>
-          <a:noFill/>
-          <a:ln w="0">
-            <a:noFill/>
-          </a:ln>
-        </p:spPr>
-        <p:style>
-          <a:lnRef idx="0"/>
-          <a:fillRef idx="0"/>
-          <a:effectRef idx="0"/>
-          <a:fontRef idx="minor"/>
-        </p:style>
-        <p:txBody>
-          <a:bodyPr lIns="0" tIns="0" rIns="0" bIns="0" anchor="t">
-            <a:normAutofit/>
-          </a:bodyPr>
-          <a:p>
-            <a:pPr defTabSz="914400">
-              <a:lnSpc>
-                <a:spcPts val="1959"/>
-              </a:lnSpc>
-              <a:tabLst>
-                <a:tab pos="0" algn="l"/>
-              </a:tabLst>
-            </a:pPr>
-            <a:r>
-              <a:rPr lang="en-US" sz="1400" b="0" u="none" strike="noStrike">
-                <a:solidFill>
-                  <a:srgbClr val="E8A33D"/>
-                </a:solidFill>
-                <a:effectLst/>
-                <a:uFillTx/>
-                <a:latin typeface="JetBrains Mono"/>
-                <a:ea typeface="JetBrains Mono"/>
-              </a:rPr>
-              <a:t>brightness_task</a:t>
-            </a:r>
-            <a:endParaRPr lang="uk-UA" sz="1400" b="0" u="none" strike="noStrike">
-              <a:solidFill>
-                <a:srgbClr val="FFFFFF"/>
-              </a:solidFill>
-              <a:effectLst/>
-              <a:uFillTx/>
-              <a:latin typeface="Arial"/>
-            </a:endParaRPr>
-          </a:p>
-        </p:txBody>
-      </p:sp>
-      <p:sp>
-        <p:nvSpPr>
-          <p:cNvPr id="79" name="Text 24"/>
-          <p:cNvSpPr/>
-          <p:nvPr/>
-        </p:nvSpPr>
-        <p:spPr>
-          <a:xfrm>
-            <a:off x="7421760" y="4053600"/>
-            <a:ext cx="1686240" cy="487080"/>
-          </a:xfrm>
-          <a:prstGeom prst="rect">
-            <a:avLst/>
-          </a:prstGeom>
-          <a:noFill/>
-          <a:ln w="0">
-            <a:noFill/>
-          </a:ln>
-        </p:spPr>
-        <p:style>
-          <a:lnRef idx="0"/>
-          <a:fillRef idx="0"/>
-          <a:effectRef idx="0"/>
-          <a:fontRef idx="minor"/>
-        </p:style>
-        <p:txBody>
-          <a:bodyPr lIns="0" tIns="0" rIns="0" bIns="0" anchor="t">
-            <a:normAutofit/>
-          </a:bodyPr>
-          <a:p>
-            <a:pPr defTabSz="914400">
-              <a:lnSpc>
-                <a:spcPts val="1820"/>
-              </a:lnSpc>
-              <a:tabLst>
-                <a:tab pos="0" algn="l"/>
-              </a:tabLst>
-            </a:pPr>
-            <a:r>
-              <a:rPr lang="en-US" sz="1400" b="0" u="none" strike="noStrike">
-                <a:solidFill>
-                  <a:srgbClr val="C9D1DC"/>
-                </a:solidFill>
-                <a:effectLst/>
-                <a:uFillTx/>
-                <a:latin typeface="IBM Plex Sans"/>
-                <a:ea typeface="IBM Plex Sans"/>
-              </a:rPr>
-              <a:t>ПІ-регулятор яскравості</a:t>
-            </a:r>
-            <a:endParaRPr lang="uk-UA" sz="1400" b="0" u="none" strike="noStrike">
-              <a:solidFill>
-                <a:srgbClr val="FFFFFF"/>
-              </a:solidFill>
-              <a:effectLst/>
-              <a:uFillTx/>
-              <a:latin typeface="Arial"/>
-            </a:endParaRPr>
-          </a:p>
-        </p:txBody>
-      </p:sp>
-      <p:sp>
-        <p:nvSpPr>
-          <p:cNvPr id="80" name="Shape 25"/>
-          <p:cNvSpPr/>
-          <p:nvPr/>
-        </p:nvSpPr>
-        <p:spPr>
-          <a:xfrm>
-            <a:off x="9387720" y="3576240"/>
-            <a:ext cx="1990800" cy="1117080"/>
-          </a:xfrm>
-          <a:prstGeom prst="roundRect">
-            <a:avLst>
-              <a:gd name="adj" fmla="val 6819"/>
-            </a:avLst>
-          </a:prstGeom>
-          <a:solidFill>
-            <a:srgbClr val="1B2330"/>
-          </a:solidFill>
-          <a:ln w="0">
-            <a:noFill/>
-          </a:ln>
-        </p:spPr>
-        <p:style>
-          <a:lnRef idx="0"/>
-          <a:fillRef idx="0"/>
-          <a:effectRef idx="0"/>
-          <a:fontRef idx="minor"/>
-        </p:style>
-        <p:txBody>
-          <a:bodyPr lIns="90000" tIns="45000" rIns="90000" bIns="45000" anchor="t">
-            <a:noAutofit/>
-          </a:bodyPr>
-          <a:p>
-            <a:pPr/>
-            <a:endParaRPr lang="uk-UA" sz="1800" b="0" u="none" strike="noStrike">
-              <a:solidFill>
-                <a:srgbClr val="FFFFFF"/>
-              </a:solidFill>
-              <a:effectLst/>
-              <a:uFillTx/>
-              <a:latin typeface="Arial"/>
-            </a:endParaRPr>
-          </a:p>
-        </p:txBody>
-      </p:sp>
-      <p:sp>
-        <p:nvSpPr>
-          <p:cNvPr id="81" name="Text 26"/>
-          <p:cNvSpPr/>
-          <p:nvPr/>
-        </p:nvSpPr>
-        <p:spPr>
-          <a:xfrm>
-            <a:off x="9565560" y="3754080"/>
-            <a:ext cx="1686240" cy="273960"/>
-          </a:xfrm>
-          <a:prstGeom prst="rect">
-            <a:avLst/>
-          </a:prstGeom>
-          <a:noFill/>
-          <a:ln w="0">
-            <a:noFill/>
-          </a:ln>
-        </p:spPr>
-        <p:style>
-          <a:lnRef idx="0"/>
-          <a:fillRef idx="0"/>
-          <a:effectRef idx="0"/>
-          <a:fontRef idx="minor"/>
-        </p:style>
-        <p:txBody>
-          <a:bodyPr lIns="0" tIns="0" rIns="0" bIns="0" anchor="t">
-            <a:normAutofit/>
-          </a:bodyPr>
-          <a:p>
-            <a:pPr defTabSz="914400">
-              <a:lnSpc>
-                <a:spcPts val="1959"/>
-              </a:lnSpc>
-              <a:tabLst>
-                <a:tab pos="0" algn="l"/>
-              </a:tabLst>
-            </a:pPr>
-            <a:r>
-              <a:rPr lang="en-US" sz="1400" b="0" u="none" strike="noStrike">
-                <a:solidFill>
-                  <a:srgbClr val="E8A33D"/>
-                </a:solidFill>
-                <a:effectLst/>
-                <a:uFillTx/>
-                <a:latin typeface="JetBrains Mono"/>
-                <a:ea typeface="JetBrains Mono"/>
-              </a:rPr>
-              <a:t>monitor_task</a:t>
-            </a:r>
-            <a:endParaRPr lang="uk-UA" sz="1400" b="0" u="none" strike="noStrike">
-              <a:solidFill>
-                <a:srgbClr val="FFFFFF"/>
-              </a:solidFill>
-              <a:effectLst/>
-              <a:uFillTx/>
-              <a:latin typeface="Arial"/>
-            </a:endParaRPr>
-          </a:p>
-        </p:txBody>
-      </p:sp>
-      <p:sp>
-        <p:nvSpPr>
-          <p:cNvPr id="82" name="Text 27"/>
-          <p:cNvSpPr/>
-          <p:nvPr/>
-        </p:nvSpPr>
-        <p:spPr>
-          <a:xfrm>
-            <a:off x="9565560" y="4053600"/>
-            <a:ext cx="1686240" cy="255960"/>
-          </a:xfrm>
-          <a:prstGeom prst="rect">
-            <a:avLst/>
-          </a:prstGeom>
-          <a:noFill/>
-          <a:ln w="0">
-            <a:noFill/>
-          </a:ln>
-        </p:spPr>
-        <p:style>
-          <a:lnRef idx="0"/>
-          <a:fillRef idx="0"/>
-          <a:effectRef idx="0"/>
-          <a:fontRef idx="minor"/>
-        </p:style>
-        <p:txBody>
-          <a:bodyPr lIns="0" tIns="0" rIns="0" bIns="0" anchor="t">
-            <a:normAutofit/>
-          </a:bodyPr>
-          <a:p>
-            <a:pPr defTabSz="914400">
-              <a:lnSpc>
-                <a:spcPts val="1820"/>
-              </a:lnSpc>
-              <a:tabLst>
-                <a:tab pos="0" algn="l"/>
-              </a:tabLst>
-            </a:pPr>
-            <a:r>
-              <a:rPr lang="en-US" sz="1400" b="0" u="none" strike="noStrike">
-                <a:solidFill>
-                  <a:srgbClr val="C9D1DC"/>
-                </a:solidFill>
-                <a:effectLst/>
-                <a:uFillTx/>
-                <a:latin typeface="IBM Plex Sans"/>
-                <a:ea typeface="IBM Plex Sans"/>
-              </a:rPr>
-              <a:t>навантаження CPU</a:t>
-            </a:r>
-            <a:endParaRPr lang="uk-UA" sz="1400" b="0" u="none" strike="noStrike">
-              <a:solidFill>
-                <a:srgbClr val="FFFFFF"/>
-              </a:solidFill>
-              <a:effectLst/>
-              <a:uFillTx/>
-              <a:latin typeface="Arial"/>
-            </a:endParaRPr>
-          </a:p>
-        </p:txBody>
-      </p:sp>
-      <p:sp>
-        <p:nvSpPr>
-          <p:cNvPr id="83" name="Text 28"/>
-          <p:cNvSpPr/>
-          <p:nvPr/>
-        </p:nvSpPr>
-        <p:spPr>
-          <a:xfrm>
-            <a:off x="812880" y="6238440"/>
-            <a:ext cx="10883160" cy="238320"/>
-          </a:xfrm>
-          <a:prstGeom prst="rect">
-            <a:avLst/>
-          </a:prstGeom>
-          <a:noFill/>
-          <a:ln w="0">
-            <a:noFill/>
-          </a:ln>
-        </p:spPr>
-        <p:style>
-          <a:lnRef idx="0"/>
-          <a:fillRef idx="0"/>
-          <a:effectRef idx="0"/>
-          <a:fontRef idx="minor"/>
-        </p:style>
-        <p:txBody>
-          <a:bodyPr lIns="0" tIns="0" rIns="0" bIns="0" anchor="t">
-            <a:normAutofit/>
-          </a:bodyPr>
-          <a:p>
-            <a:pPr defTabSz="914400">
-              <a:lnSpc>
-                <a:spcPts val="1681"/>
-              </a:lnSpc>
-              <a:tabLst>
-                <a:tab pos="0" algn="l"/>
-              </a:tabLst>
-            </a:pPr>
-            <a:r>
-              <a:rPr lang="en-US" sz="1200" b="0" u="none" strike="noStrike">
-                <a:solidFill>
-                  <a:srgbClr val="9AA5B4"/>
-                </a:solidFill>
-                <a:effectLst/>
-                <a:uFillTx/>
-                <a:latin typeface="IBM Plex Sans"/>
-                <a:ea typeface="IBM Plex Sans"/>
-              </a:rPr>
-              <a:t>Черги FreeRTOS для обміну даними · м'ютекс для спільного стану · кожна задача — окремий компонент</a:t>
-            </a:r>
-            <a:endParaRPr lang="uk-UA" sz="1200" b="0" u="none" strike="noStrike">
-              <a:solidFill>
-                <a:srgbClr val="FFFFFF"/>
-              </a:solidFill>
-              <a:effectLst/>
-              <a:uFillTx/>
-              <a:latin typeface="Arial"/>
-            </a:endParaRPr>
-          </a:p>
-        </p:txBody>
-      </p:sp>
     </p:spTree>
   </p:cSld>
   <mc:AlternateContent>
@@ -9943,7 +9627,7 @@
     <p:bg>
       <p:bgPr>
         <a:solidFill>
-          <a:srgbClr val="F5F2EC"/>
+          <a:srgbClr val="121821"/>
         </a:solidFill>
       </p:bgPr>
     </p:bg>
@@ -9963,7 +9647,7 @@
       </p:grpSpPr>
       <p:sp>
         <p:nvSpPr>
-          <p:cNvPr id="84" name="Text 0"/>
+          <p:cNvPr id="58" name="Text 0"/>
           <p:cNvSpPr/>
           <p:nvPr/>
         </p:nvSpPr>
@@ -10002,29 +9686,29 @@
             <a:r>
               <a:rPr lang="en-US" sz="1200" b="0" u="none" spc="99" strike="noStrike">
                 <a:solidFill>
-                  <a:srgbClr val="B8322B"/>
+                  <a:srgbClr val="E8A33D"/>
                 </a:solidFill>
                 <a:effectLst/>
                 <a:uFillTx/>
                 <a:latin typeface="JetBrains Mono"/>
                 <a:ea typeface="JetBrains Mono"/>
               </a:rPr>
-              <a:t>ДАНІ ТА ВІДОБРАЖЕННЯ</a:t>
+              <a:t>АРХІТЕКТУРА ПЗ</a:t>
             </a:r>
             <a:endParaRPr lang="uk-UA" sz="1200" b="0" u="none" strike="noStrike">
               <a:solidFill>
-                <a:srgbClr val="000000"/>
-              </a:solidFill>
-              <a:effectLst/>
-              <a:uFillTx/>
-              <a:latin typeface="Arial"/>
-            </a:endParaRPr>
-          </a:p>
-        </p:txBody>
-      </p:sp>
-      <p:sp>
-        <p:nvSpPr>
-          <p:cNvPr id="85" name="Text 1"/>
+                <a:srgbClr val="FFFFFF"/>
+              </a:solidFill>
+              <a:effectLst/>
+              <a:uFillTx/>
+              <a:latin typeface="Arial"/>
+            </a:endParaRPr>
+          </a:p>
+        </p:txBody>
+      </p:sp>
+      <p:sp>
+        <p:nvSpPr>
+          <p:cNvPr id="59" name="Text 1"/>
           <p:cNvSpPr/>
           <p:nvPr/>
         </p:nvSpPr>
@@ -10063,47 +9747,50 @@
             <a:r>
               <a:rPr lang="en-US" sz="3600" b="1" u="none" strike="noStrike">
                 <a:solidFill>
-                  <a:srgbClr val="121821"/>
+                  <a:srgbClr val="F5F2EC"/>
                 </a:solidFill>
                 <a:effectLst/>
                 <a:uFillTx/>
                 <a:latin typeface="IBM Plex Sans"/>
                 <a:ea typeface="IBM Plex Sans"/>
               </a:rPr>
-              <a:t>27 символів замість кілобайтів JSON</a:t>
+              <a:t>7 задач FreeRTOS на ESP-IDF</a:t>
             </a:r>
             <a:endParaRPr lang="uk-UA" sz="3600" b="0" u="none" strike="noStrike">
               <a:solidFill>
-                <a:srgbClr val="000000"/>
-              </a:solidFill>
-              <a:effectLst/>
-              <a:uFillTx/>
-              <a:latin typeface="Arial"/>
-            </a:endParaRPr>
-          </a:p>
-        </p:txBody>
-      </p:sp>
-      <p:sp>
-        <p:nvSpPr>
-          <p:cNvPr id="86" name="Shape 2"/>
+                <a:srgbClr val="FFFFFF"/>
+              </a:solidFill>
+              <a:effectLst/>
+              <a:uFillTx/>
+              <a:latin typeface="Arial"/>
+            </a:endParaRPr>
+          </a:p>
+        </p:txBody>
+      </p:sp>
+      <p:sp>
+        <p:nvSpPr>
+          <p:cNvPr id="60" name="Shape 2"/>
           <p:cNvSpPr/>
           <p:nvPr/>
         </p:nvSpPr>
         <p:spPr>
           <a:xfrm>
-            <a:off x="812880" y="1935360"/>
-            <a:ext cx="10566000" cy="1391400"/>
+            <a:off x="819000" y="1931760"/>
+            <a:ext cx="1653120" cy="804600"/>
           </a:xfrm>
           <a:prstGeom prst="roundRect">
             <a:avLst>
-              <a:gd name="adj" fmla="val 7300"/>
+              <a:gd name="adj" fmla="val 8676"/>
             </a:avLst>
           </a:prstGeom>
           <a:solidFill>
-            <a:srgbClr val="121821"/>
+            <a:srgbClr val="1B2330"/>
           </a:solidFill>
-          <a:ln w="0">
-            <a:noFill/>
+          <a:ln w="12700">
+            <a:solidFill>
+              <a:srgbClr val="3A4658"/>
+            </a:solidFill>
+            <a:round/>
           </a:ln>
         </p:spPr>
         <p:style>
@@ -10131,14 +9818,14 @@
       </p:sp>
       <p:sp>
         <p:nvSpPr>
-          <p:cNvPr id="87" name="Text 3"/>
+          <p:cNvPr id="61" name="Text 3"/>
           <p:cNvSpPr/>
           <p:nvPr/>
         </p:nvSpPr>
         <p:spPr>
           <a:xfrm>
-            <a:off x="915840" y="2189520"/>
-            <a:ext cx="10359720" cy="594000"/>
+            <a:off x="952560" y="2090520"/>
+            <a:ext cx="1386360" cy="512640"/>
           </a:xfrm>
           <a:prstGeom prst="rect">
             <a:avLst/>
@@ -10161,100 +9848,83 @@
           <a:p>
             <a:pPr algn="ctr" defTabSz="914400">
               <a:lnSpc>
-                <a:spcPts val="4479"/>
+                <a:spcPts val="1919"/>
               </a:lnSpc>
               <a:tabLst>
                 <a:tab pos="0" algn="l"/>
               </a:tabLst>
             </a:pPr>
             <a:r>
-              <a:rPr lang="en-US" sz="3200" b="0" u="none" spc="300" strike="noStrike">
-                <a:solidFill>
-                  <a:srgbClr val="6B7788"/>
-                </a:solidFill>
-                <a:effectLst/>
-                <a:uFillTx/>
-                <a:latin typeface="JetBrains Mono"/>
-                <a:ea typeface="JetBrains Mono"/>
-              </a:rPr>
-              <a:t>NNNNNNNNNN</a:t>
+              <a:rPr lang="en-US" sz="1600" b="0" u="none" strike="noStrike">
+                <a:solidFill>
+                  <a:srgbClr val="F5F2EC"/>
+                </a:solidFill>
+                <a:effectLst/>
+                <a:uFillTx/>
+                <a:latin typeface="IBM Plex Sans"/>
+                <a:ea typeface="IBM Plex Sans"/>
+              </a:rPr>
+              <a:t>API alerts.in.ua</a:t>
             </a:r>
-            <a:r>
-              <a:rPr lang="en-US" sz="3200" b="0" u="none" spc="300" strike="noStrike">
-                <a:solidFill>
-                  <a:srgbClr val="E0483E"/>
-                </a:solidFill>
-                <a:effectLst/>
-                <a:uFillTx/>
-                <a:latin typeface="JetBrains Mono"/>
-                <a:ea typeface="JetBrains Mono"/>
-              </a:rPr>
-              <a:t>A</a:t>
-            </a:r>
-            <a:r>
-              <a:rPr lang="en-US" sz="3200" b="0" u="none" spc="300" strike="noStrike">
-                <a:solidFill>
-                  <a:srgbClr val="6B7788"/>
-                </a:solidFill>
-                <a:effectLst/>
-                <a:uFillTx/>
-                <a:latin typeface="JetBrains Mono"/>
-                <a:ea typeface="JetBrains Mono"/>
-              </a:rPr>
-              <a:t>NNNNNNNNNN</a:t>
-            </a:r>
-            <a:r>
-              <a:rPr lang="en-US" sz="3200" b="0" u="none" spc="300" strike="noStrike">
-                <a:solidFill>
-                  <a:srgbClr val="E8A33D"/>
-                </a:solidFill>
-                <a:effectLst/>
-                <a:uFillTx/>
-                <a:latin typeface="JetBrains Mono"/>
-                <a:ea typeface="JetBrains Mono"/>
-              </a:rPr>
-              <a:t>P</a:t>
-            </a:r>
-            <a:r>
-              <a:rPr lang="en-US" sz="3200" b="0" u="none" spc="300" strike="noStrike">
-                <a:solidFill>
-                  <a:srgbClr val="6B7788"/>
-                </a:solidFill>
-                <a:effectLst/>
-                <a:uFillTx/>
-                <a:latin typeface="JetBrains Mono"/>
-                <a:ea typeface="JetBrains Mono"/>
-              </a:rPr>
-              <a:t>NNNNN</a:t>
-            </a:r>
-            <a:endParaRPr lang="uk-UA" sz="3200" b="0" u="none" strike="noStrike">
-              <a:solidFill>
-                <a:srgbClr val="000000"/>
-              </a:solidFill>
-              <a:effectLst/>
-              <a:uFillTx/>
-              <a:latin typeface="Arial"/>
-            </a:endParaRPr>
-          </a:p>
-        </p:txBody>
-      </p:sp>
-      <p:sp>
-        <p:nvSpPr>
-          <p:cNvPr id="88" name="Text 4"/>
+            <a:endParaRPr lang="uk-UA" sz="1600" b="0" u="none" strike="noStrike">
+              <a:solidFill>
+                <a:srgbClr val="FFFFFF"/>
+              </a:solidFill>
+              <a:effectLst/>
+              <a:uFillTx/>
+              <a:latin typeface="Arial"/>
+            </a:endParaRPr>
+          </a:p>
+        </p:txBody>
+      </p:sp>
+      <p:pic>
+        <p:nvPicPr>
+          <p:cNvPr id="62" name="Image 0" descr="arrow-right"/>
+          <p:cNvPicPr/>
+          <p:nvPr/>
+        </p:nvPicPr>
+        <p:blipFill>
+          <a:blip r:embed="rId1"/>
+          <a:stretch/>
+        </p:blipFill>
+        <p:spPr>
+          <a:xfrm>
+            <a:off x="2580480" y="2245320"/>
+            <a:ext cx="355320" cy="177480"/>
+          </a:xfrm>
+          <a:prstGeom prst="rect">
+            <a:avLst/>
+          </a:prstGeom>
+          <a:noFill/>
+          <a:ln w="0">
+            <a:noFill/>
+          </a:ln>
+        </p:spPr>
+      </p:pic>
+      <p:sp>
+        <p:nvSpPr>
+          <p:cNvPr id="63" name="Shape 4"/>
           <p:cNvSpPr/>
           <p:nvPr/>
         </p:nvSpPr>
         <p:spPr>
           <a:xfrm>
-            <a:off x="915840" y="2859840"/>
-            <a:ext cx="10359720" cy="238320"/>
-          </a:xfrm>
-          <a:prstGeom prst="rect">
-            <a:avLst/>
-          </a:prstGeom>
-          <a:noFill/>
-          <a:ln w="0">
-            <a:noFill/>
+            <a:off x="3044160" y="2032920"/>
+            <a:ext cx="1653120" cy="601560"/>
+          </a:xfrm>
+          <a:prstGeom prst="roundRect">
+            <a:avLst>
+              <a:gd name="adj" fmla="val 11604"/>
+            </a:avLst>
+          </a:prstGeom>
+          <a:solidFill>
+            <a:srgbClr val="1B2330"/>
+          </a:solidFill>
+          <a:ln w="12700">
+            <a:solidFill>
+              <a:srgbClr val="3A4658"/>
+            </a:solidFill>
+            <a:round/>
           </a:ln>
         </p:spPr>
         <p:style>
@@ -10264,60 +9934,37 @@
           <a:fontRef idx="minor"/>
         </p:style>
         <p:txBody>
-          <a:bodyPr lIns="0" tIns="0" rIns="0" bIns="0" anchor="t">
-            <a:normAutofit/>
-          </a:bodyPr>
-          <a:p>
-            <a:pPr algn="ctr" defTabSz="914400">
-              <a:lnSpc>
-                <a:spcPts val="1681"/>
-              </a:lnSpc>
-              <a:tabLst>
-                <a:tab pos="0" algn="l"/>
-              </a:tabLst>
-            </a:pPr>
-            <a:r>
-              <a:rPr lang="en-US" sz="1200" b="0" u="none" strike="noStrike">
-                <a:solidFill>
-                  <a:srgbClr val="9AA5B4"/>
-                </a:solidFill>
-                <a:effectLst/>
-                <a:uFillTx/>
-                <a:latin typeface="IBM Plex Sans"/>
-                <a:ea typeface="IBM Plex Sans"/>
-              </a:rPr>
-              <a:t>IoT-ендпоінт alerts.in.ua: один символ на область, ~30 байт, лише повітряні тривоги</a:t>
-            </a:r>
-            <a:endParaRPr lang="uk-UA" sz="1200" b="0" u="none" strike="noStrike">
-              <a:solidFill>
-                <a:srgbClr val="000000"/>
-              </a:solidFill>
-              <a:effectLst/>
-              <a:uFillTx/>
-              <a:latin typeface="Arial"/>
-            </a:endParaRPr>
-          </a:p>
-        </p:txBody>
-      </p:sp>
-      <p:sp>
-        <p:nvSpPr>
-          <p:cNvPr id="89" name="Shape 5"/>
+          <a:bodyPr lIns="90000" tIns="45000" rIns="90000" bIns="45000" anchor="t">
+            <a:noAutofit/>
+          </a:bodyPr>
+          <a:p>
+            <a:pPr/>
+            <a:endParaRPr lang="uk-UA" sz="1800" b="0" u="none" strike="noStrike">
+              <a:solidFill>
+                <a:srgbClr val="FFFFFF"/>
+              </a:solidFill>
+              <a:effectLst/>
+              <a:uFillTx/>
+              <a:latin typeface="Arial"/>
+            </a:endParaRPr>
+          </a:p>
+        </p:txBody>
+      </p:sp>
+      <p:sp>
+        <p:nvSpPr>
+          <p:cNvPr id="64" name="Text 5"/>
           <p:cNvSpPr/>
           <p:nvPr/>
         </p:nvSpPr>
         <p:spPr>
           <a:xfrm>
-            <a:off x="812880" y="3753720"/>
-            <a:ext cx="406080" cy="406080"/>
-          </a:xfrm>
-          <a:prstGeom prst="roundRect">
-            <a:avLst>
-              <a:gd name="adj" fmla="val 12500"/>
-            </a:avLst>
-          </a:prstGeom>
-          <a:solidFill>
-            <a:srgbClr val="C8352B"/>
-          </a:solidFill>
+            <a:off x="3177360" y="2191680"/>
+            <a:ext cx="1386360" cy="309600"/>
+          </a:xfrm>
+          <a:prstGeom prst="rect">
+            <a:avLst/>
+          </a:prstGeom>
+          <a:noFill/>
           <a:ln w="0">
             <a:noFill/>
           </a:ln>
@@ -10329,12 +9976,31 @@
           <a:fontRef idx="minor"/>
         </p:style>
         <p:txBody>
-          <a:bodyPr lIns="90000" tIns="45000" rIns="90000" bIns="45000" anchor="t">
-            <a:noAutofit/>
-          </a:bodyPr>
-          <a:p>
-            <a:pPr/>
-            <a:endParaRPr lang="uk-UA" sz="1800" b="0" u="none" strike="noStrike">
+          <a:bodyPr lIns="0" tIns="0" rIns="0" bIns="0" anchor="t">
+            <a:normAutofit/>
+          </a:bodyPr>
+          <a:p>
+            <a:pPr algn="ctr" defTabSz="914400">
+              <a:lnSpc>
+                <a:spcPts val="2239"/>
+              </a:lnSpc>
+              <a:tabLst>
+                <a:tab pos="0" algn="l"/>
+              </a:tabLst>
+            </a:pPr>
+            <a:r>
+              <a:rPr lang="en-US" sz="1600" b="0" u="none" strike="noStrike">
+                <a:solidFill>
+                  <a:srgbClr val="F5F2EC"/>
+                </a:solidFill>
+                <a:effectLst/>
+                <a:uFillTx/>
+                <a:latin typeface="JetBrains Mono"/>
+                <a:ea typeface="JetBrains Mono"/>
+              </a:rPr>
+              <a:t>fetch_task</a:t>
+            </a:r>
+            <a:endParaRPr lang="uk-UA" sz="1600" b="0" u="none" strike="noStrike">
               <a:solidFill>
                 <a:srgbClr val="FFFFFF"/>
               </a:solidFill>
@@ -10345,23 +10011,54 @@
           </a:p>
         </p:txBody>
       </p:sp>
-      <p:sp>
-        <p:nvSpPr>
-          <p:cNvPr id="90" name="Text 6"/>
+      <p:pic>
+        <p:nvPicPr>
+          <p:cNvPr id="65" name="Image 1" descr="arrow-right"/>
+          <p:cNvPicPr/>
+          <p:nvPr/>
+        </p:nvPicPr>
+        <p:blipFill>
+          <a:blip r:embed="rId2"/>
+          <a:stretch/>
+        </p:blipFill>
+        <p:spPr>
+          <a:xfrm>
+            <a:off x="4805640" y="2245320"/>
+            <a:ext cx="355320" cy="177480"/>
+          </a:xfrm>
+          <a:prstGeom prst="rect">
+            <a:avLst/>
+          </a:prstGeom>
+          <a:noFill/>
+          <a:ln w="0">
+            <a:noFill/>
+          </a:ln>
+        </p:spPr>
+      </p:pic>
+      <p:sp>
+        <p:nvSpPr>
+          <p:cNvPr id="66" name="Shape 6"/>
           <p:cNvSpPr/>
           <p:nvPr/>
         </p:nvSpPr>
         <p:spPr>
           <a:xfrm>
-            <a:off x="1371600" y="3692880"/>
-            <a:ext cx="2912400" cy="553320"/>
-          </a:xfrm>
-          <a:prstGeom prst="rect">
-            <a:avLst/>
-          </a:prstGeom>
-          <a:noFill/>
-          <a:ln w="0">
-            <a:noFill/>
+            <a:off x="5269320" y="1891080"/>
+            <a:ext cx="1653120" cy="885960"/>
+          </a:xfrm>
+          <a:prstGeom prst="roundRect">
+            <a:avLst>
+              <a:gd name="adj" fmla="val 7880"/>
+            </a:avLst>
+          </a:prstGeom>
+          <a:solidFill>
+            <a:srgbClr val="1B2330"/>
+          </a:solidFill>
+          <a:ln w="12700">
+            <a:solidFill>
+              <a:srgbClr val="E8A33D"/>
+            </a:solidFill>
+            <a:round/>
           </a:ln>
         </p:spPr>
         <p:style>
@@ -10371,72 +10068,37 @@
           <a:fontRef idx="minor"/>
         </p:style>
         <p:txBody>
-          <a:bodyPr lIns="0" tIns="0" rIns="0" bIns="0" anchor="t">
-            <a:normAutofit/>
-          </a:bodyPr>
-          <a:p>
-            <a:pPr defTabSz="914400">
-              <a:lnSpc>
-                <a:spcPts val="2081"/>
-              </a:lnSpc>
-              <a:tabLst>
-                <a:tab pos="0" algn="l"/>
-              </a:tabLst>
-            </a:pPr>
-            <a:r>
-              <a:rPr lang="en-US" sz="1600" b="1" u="none" strike="noStrike">
-                <a:solidFill>
-                  <a:srgbClr val="121821"/>
-                </a:solidFill>
-                <a:effectLst/>
-                <a:uFillTx/>
-                <a:latin typeface="IBM Plex Sans"/>
-                <a:ea typeface="IBM Plex Sans"/>
-              </a:rPr>
-              <a:t>A</a:t>
-            </a:r>
-            <a:r>
-              <a:rPr lang="en-US" sz="1600" b="0" u="none" strike="noStrike">
-                <a:solidFill>
-                  <a:srgbClr val="121821"/>
-                </a:solidFill>
-                <a:effectLst/>
-                <a:uFillTx/>
-                <a:latin typeface="IBM Plex Sans"/>
-                <a:ea typeface="IBM Plex Sans"/>
-              </a:rPr>
-              <a:t> — тривога по всій області: червона</a:t>
-            </a:r>
-            <a:endParaRPr lang="uk-UA" sz="1600" b="0" u="none" strike="noStrike">
-              <a:solidFill>
-                <a:srgbClr val="000000"/>
-              </a:solidFill>
-              <a:effectLst/>
-              <a:uFillTx/>
-              <a:latin typeface="Arial"/>
-            </a:endParaRPr>
-          </a:p>
-        </p:txBody>
-      </p:sp>
-      <p:sp>
-        <p:nvSpPr>
-          <p:cNvPr id="91" name="Shape 7"/>
+          <a:bodyPr lIns="90000" tIns="45000" rIns="90000" bIns="45000" anchor="t">
+            <a:noAutofit/>
+          </a:bodyPr>
+          <a:p>
+            <a:pPr/>
+            <a:endParaRPr lang="uk-UA" sz="1800" b="0" u="none" strike="noStrike">
+              <a:solidFill>
+                <a:srgbClr val="FFFFFF"/>
+              </a:solidFill>
+              <a:effectLst/>
+              <a:uFillTx/>
+              <a:latin typeface="Arial"/>
+            </a:endParaRPr>
+          </a:p>
+        </p:txBody>
+      </p:sp>
+      <p:sp>
+        <p:nvSpPr>
+          <p:cNvPr id="67" name="Text 7"/>
           <p:cNvSpPr/>
           <p:nvPr/>
         </p:nvSpPr>
         <p:spPr>
           <a:xfrm>
-            <a:off x="4402800" y="3753720"/>
-            <a:ext cx="406080" cy="406080"/>
-          </a:xfrm>
-          <a:prstGeom prst="roundRect">
-            <a:avLst>
-              <a:gd name="adj" fmla="val 12500"/>
-            </a:avLst>
-          </a:prstGeom>
-          <a:solidFill>
-            <a:srgbClr val="E8A33D"/>
-          </a:solidFill>
+            <a:off x="5402520" y="2049840"/>
+            <a:ext cx="1386360" cy="594000"/>
+          </a:xfrm>
+          <a:prstGeom prst="rect">
+            <a:avLst/>
+          </a:prstGeom>
+          <a:noFill/>
           <a:ln w="0">
             <a:noFill/>
           </a:ln>
@@ -10448,39 +10110,89 @@
           <a:fontRef idx="minor"/>
         </p:style>
         <p:txBody>
-          <a:bodyPr lIns="90000" tIns="45000" rIns="90000" bIns="45000" anchor="t">
-            <a:noAutofit/>
-          </a:bodyPr>
-          <a:p>
-            <a:pPr/>
-            <a:endParaRPr lang="uk-UA" sz="1800" b="0" u="none" strike="noStrike">
-              <a:solidFill>
-                <a:srgbClr val="000000"/>
-              </a:solidFill>
-              <a:effectLst/>
-              <a:uFillTx/>
-              <a:latin typeface="Arial"/>
-            </a:endParaRPr>
-          </a:p>
-        </p:txBody>
-      </p:sp>
-      <p:sp>
-        <p:nvSpPr>
-          <p:cNvPr id="92" name="Text 8"/>
+          <a:bodyPr lIns="0" tIns="0" rIns="0" bIns="0" anchor="t">
+            <a:normAutofit/>
+          </a:bodyPr>
+          <a:p>
+            <a:pPr algn="ctr" defTabSz="914400">
+              <a:lnSpc>
+                <a:spcPts val="2239"/>
+              </a:lnSpc>
+              <a:tabLst>
+                <a:tab pos="0" algn="l"/>
+              </a:tabLst>
+            </a:pPr>
+            <a:r>
+              <a:rPr lang="en-US" sz="1600" b="0" u="none" strike="noStrike">
+                <a:solidFill>
+                  <a:srgbClr val="F5F2EC"/>
+                </a:solidFill>
+                <a:effectLst/>
+                <a:uFillTx/>
+                <a:latin typeface="JetBrains Mono"/>
+                <a:ea typeface="JetBrains Mono"/>
+              </a:rPr>
+              <a:t>alert_queue</a:t>
+            </a:r>
+            <a:endParaRPr lang="uk-UA" sz="1600" b="0" u="none" strike="noStrike">
+              <a:solidFill>
+                <a:srgbClr val="FFFFFF"/>
+              </a:solidFill>
+              <a:effectLst/>
+              <a:uFillTx/>
+              <a:latin typeface="Arial"/>
+            </a:endParaRPr>
+          </a:p>
+        </p:txBody>
+      </p:sp>
+      <p:pic>
+        <p:nvPicPr>
+          <p:cNvPr id="68" name="Image 2" descr="arrow-right"/>
+          <p:cNvPicPr/>
+          <p:nvPr/>
+        </p:nvPicPr>
+        <p:blipFill>
+          <a:blip r:embed="rId3"/>
+          <a:stretch/>
+        </p:blipFill>
+        <p:spPr>
+          <a:xfrm>
+            <a:off x="7030800" y="2245320"/>
+            <a:ext cx="355320" cy="177480"/>
+          </a:xfrm>
+          <a:prstGeom prst="rect">
+            <a:avLst/>
+          </a:prstGeom>
+          <a:noFill/>
+          <a:ln w="0">
+            <a:noFill/>
+          </a:ln>
+        </p:spPr>
+      </p:pic>
+      <p:sp>
+        <p:nvSpPr>
+          <p:cNvPr id="69" name="Shape 8"/>
           <p:cNvSpPr/>
           <p:nvPr/>
         </p:nvSpPr>
         <p:spPr>
           <a:xfrm>
-            <a:off x="4961520" y="3692880"/>
-            <a:ext cx="2912400" cy="553320"/>
-          </a:xfrm>
-          <a:prstGeom prst="rect">
-            <a:avLst/>
-          </a:prstGeom>
-          <a:noFill/>
-          <a:ln w="0">
-            <a:noFill/>
+            <a:off x="7494120" y="1891080"/>
+            <a:ext cx="1653120" cy="885960"/>
+          </a:xfrm>
+          <a:prstGeom prst="roundRect">
+            <a:avLst>
+              <a:gd name="adj" fmla="val 7880"/>
+            </a:avLst>
+          </a:prstGeom>
+          <a:solidFill>
+            <a:srgbClr val="1B2330"/>
+          </a:solidFill>
+          <a:ln w="12700">
+            <a:solidFill>
+              <a:srgbClr val="3A4658"/>
+            </a:solidFill>
+            <a:round/>
           </a:ln>
         </p:spPr>
         <p:style>
@@ -10490,72 +10202,37 @@
           <a:fontRef idx="minor"/>
         </p:style>
         <p:txBody>
-          <a:bodyPr lIns="0" tIns="0" rIns="0" bIns="0" anchor="t">
-            <a:normAutofit/>
-          </a:bodyPr>
-          <a:p>
-            <a:pPr defTabSz="914400">
-              <a:lnSpc>
-                <a:spcPts val="2081"/>
-              </a:lnSpc>
-              <a:tabLst>
-                <a:tab pos="0" algn="l"/>
-              </a:tabLst>
-            </a:pPr>
-            <a:r>
-              <a:rPr lang="en-US" sz="1600" b="1" u="none" strike="noStrike">
-                <a:solidFill>
-                  <a:srgbClr val="121821"/>
-                </a:solidFill>
-                <a:effectLst/>
-                <a:uFillTx/>
-                <a:latin typeface="IBM Plex Sans"/>
-                <a:ea typeface="IBM Plex Sans"/>
-              </a:rPr>
-              <a:t>P</a:t>
-            </a:r>
-            <a:r>
-              <a:rPr lang="en-US" sz="1600" b="0" u="none" strike="noStrike">
-                <a:solidFill>
-                  <a:srgbClr val="121821"/>
-                </a:solidFill>
-                <a:effectLst/>
-                <a:uFillTx/>
-                <a:latin typeface="IBM Plex Sans"/>
-                <a:ea typeface="IBM Plex Sans"/>
-              </a:rPr>
-              <a:t> — у частині області: янтарна</a:t>
-            </a:r>
-            <a:endParaRPr lang="uk-UA" sz="1600" b="0" u="none" strike="noStrike">
-              <a:solidFill>
-                <a:srgbClr val="000000"/>
-              </a:solidFill>
-              <a:effectLst/>
-              <a:uFillTx/>
-              <a:latin typeface="Arial"/>
-            </a:endParaRPr>
-          </a:p>
-        </p:txBody>
-      </p:sp>
-      <p:sp>
-        <p:nvSpPr>
-          <p:cNvPr id="93" name="Shape 9"/>
+          <a:bodyPr lIns="90000" tIns="45000" rIns="90000" bIns="45000" anchor="t">
+            <a:noAutofit/>
+          </a:bodyPr>
+          <a:p>
+            <a:pPr/>
+            <a:endParaRPr lang="uk-UA" sz="1800" b="0" u="none" strike="noStrike">
+              <a:solidFill>
+                <a:srgbClr val="FFFFFF"/>
+              </a:solidFill>
+              <a:effectLst/>
+              <a:uFillTx/>
+              <a:latin typeface="Arial"/>
+            </a:endParaRPr>
+          </a:p>
+        </p:txBody>
+      </p:sp>
+      <p:sp>
+        <p:nvSpPr>
+          <p:cNvPr id="70" name="Text 9"/>
           <p:cNvSpPr/>
           <p:nvPr/>
         </p:nvSpPr>
         <p:spPr>
           <a:xfrm>
-            <a:off x="7992720" y="3632040"/>
-            <a:ext cx="487080" cy="649800"/>
-          </a:xfrm>
-          <a:prstGeom prst="roundRect">
-            <a:avLst>
-              <a:gd name="adj" fmla="val 10423"/>
-            </a:avLst>
-          </a:prstGeom>
-          <a:solidFill>
-            <a:srgbClr val="121821"/>
-          </a:solidFill>
+            <a:off x="7627680" y="2049840"/>
+            <a:ext cx="1386360" cy="594000"/>
+          </a:xfrm>
+          <a:prstGeom prst="rect">
+            <a:avLst/>
+          </a:prstGeom>
+          <a:noFill/>
           <a:ln w="0">
             <a:noFill/>
           </a:ln>
@@ -10567,12 +10244,31 @@
           <a:fontRef idx="minor"/>
         </p:style>
         <p:txBody>
-          <a:bodyPr lIns="90000" tIns="45000" rIns="90000" bIns="45000" anchor="t">
-            <a:noAutofit/>
-          </a:bodyPr>
-          <a:p>
-            <a:pPr/>
-            <a:endParaRPr lang="uk-UA" sz="1800" b="0" u="none" strike="noStrike">
+          <a:bodyPr lIns="0" tIns="0" rIns="0" bIns="0" anchor="t">
+            <a:normAutofit/>
+          </a:bodyPr>
+          <a:p>
+            <a:pPr algn="ctr" defTabSz="914400">
+              <a:lnSpc>
+                <a:spcPts val="2239"/>
+              </a:lnSpc>
+              <a:tabLst>
+                <a:tab pos="0" algn="l"/>
+              </a:tabLst>
+            </a:pPr>
+            <a:r>
+              <a:rPr lang="en-US" sz="1600" b="0" u="none" strike="noStrike">
+                <a:solidFill>
+                  <a:srgbClr val="F5F2EC"/>
+                </a:solidFill>
+                <a:effectLst/>
+                <a:uFillTx/>
+                <a:latin typeface="JetBrains Mono"/>
+                <a:ea typeface="JetBrains Mono"/>
+              </a:rPr>
+              <a:t>render_task</a:t>
+            </a:r>
+            <a:endParaRPr lang="uk-UA" sz="1600" b="0" u="none" strike="noStrike">
               <a:solidFill>
                 <a:srgbClr val="FFFFFF"/>
               </a:solidFill>
@@ -10583,23 +10279,54 @@
           </a:p>
         </p:txBody>
       </p:sp>
-      <p:sp>
-        <p:nvSpPr>
-          <p:cNvPr id="94" name="Text 10"/>
+      <p:pic>
+        <p:nvPicPr>
+          <p:cNvPr id="71" name="Image 3" descr="arrow-right"/>
+          <p:cNvPicPr/>
+          <p:nvPr/>
+        </p:nvPicPr>
+        <p:blipFill>
+          <a:blip r:embed="rId4"/>
+          <a:stretch/>
+        </p:blipFill>
+        <p:spPr>
+          <a:xfrm>
+            <a:off x="9255600" y="2245320"/>
+            <a:ext cx="355320" cy="177480"/>
+          </a:xfrm>
+          <a:prstGeom prst="rect">
+            <a:avLst/>
+          </a:prstGeom>
+          <a:noFill/>
+          <a:ln w="0">
+            <a:noFill/>
+          </a:ln>
+        </p:spPr>
+      </p:pic>
+      <p:sp>
+        <p:nvSpPr>
+          <p:cNvPr id="72" name="Shape 10"/>
           <p:cNvSpPr/>
           <p:nvPr/>
         </p:nvSpPr>
         <p:spPr>
           <a:xfrm>
-            <a:off x="8094240" y="3708360"/>
-            <a:ext cx="334440" cy="522720"/>
-          </a:xfrm>
-          <a:prstGeom prst="rect">
-            <a:avLst/>
-          </a:prstGeom>
-          <a:noFill/>
-          <a:ln w="0">
-            <a:noFill/>
+            <a:off x="9719280" y="1931760"/>
+            <a:ext cx="1653120" cy="804600"/>
+          </a:xfrm>
+          <a:prstGeom prst="roundRect">
+            <a:avLst>
+              <a:gd name="adj" fmla="val 8676"/>
+            </a:avLst>
+          </a:prstGeom>
+          <a:solidFill>
+            <a:srgbClr val="1B2330"/>
+          </a:solidFill>
+          <a:ln w="12700">
+            <a:solidFill>
+              <a:srgbClr val="3A4658"/>
+            </a:solidFill>
+            <a:round/>
           </a:ln>
         </p:spPr>
         <p:style>
@@ -10609,51 +10336,32 @@
           <a:fontRef idx="minor"/>
         </p:style>
         <p:txBody>
-          <a:bodyPr lIns="0" tIns="0" rIns="0" bIns="0" anchor="t">
-            <a:normAutofit/>
-          </a:bodyPr>
-          <a:p>
-            <a:pPr defTabSz="914400">
-              <a:lnSpc>
-                <a:spcPts val="1959"/>
-              </a:lnSpc>
-              <a:tabLst>
-                <a:tab pos="0" algn="l"/>
-              </a:tabLst>
-            </a:pPr>
-            <a:r>
-              <a:rPr lang="en-US" sz="1400" b="1" u="none" strike="noStrike">
-                <a:solidFill>
-                  <a:srgbClr val="E0483E"/>
-                </a:solidFill>
-                <a:effectLst/>
-                <a:uFillTx/>
-                <a:latin typeface="JetBrains Mono"/>
-                <a:ea typeface="JetBrains Mono"/>
-              </a:rPr>
-              <a:t>ERR</a:t>
-            </a:r>
-            <a:endParaRPr lang="uk-UA" sz="1400" b="0" u="none" strike="noStrike">
-              <a:solidFill>
-                <a:srgbClr val="000000"/>
-              </a:solidFill>
-              <a:effectLst/>
-              <a:uFillTx/>
-              <a:latin typeface="Arial"/>
-            </a:endParaRPr>
-          </a:p>
-        </p:txBody>
-      </p:sp>
-      <p:sp>
-        <p:nvSpPr>
-          <p:cNvPr id="95" name="Text 11"/>
+          <a:bodyPr lIns="90000" tIns="45000" rIns="90000" bIns="45000" anchor="t">
+            <a:noAutofit/>
+          </a:bodyPr>
+          <a:p>
+            <a:pPr/>
+            <a:endParaRPr lang="uk-UA" sz="1800" b="0" u="none" strike="noStrike">
+              <a:solidFill>
+                <a:srgbClr val="FFFFFF"/>
+              </a:solidFill>
+              <a:effectLst/>
+              <a:uFillTx/>
+              <a:latin typeface="Arial"/>
+            </a:endParaRPr>
+          </a:p>
+        </p:txBody>
+      </p:sp>
+      <p:sp>
+        <p:nvSpPr>
+          <p:cNvPr id="73" name="Text 11"/>
           <p:cNvSpPr/>
           <p:nvPr/>
         </p:nvSpPr>
         <p:spPr>
           <a:xfrm>
-            <a:off x="8632440" y="3692880"/>
-            <a:ext cx="2828880" cy="553320"/>
+            <a:off x="9852480" y="2090520"/>
+            <a:ext cx="1386360" cy="512640"/>
           </a:xfrm>
           <a:prstGeom prst="rect">
             <a:avLst/>
@@ -10674,9 +10382,9 @@
             <a:normAutofit/>
           </a:bodyPr>
           <a:p>
-            <a:pPr defTabSz="914400">
-              <a:lnSpc>
-                <a:spcPts val="2081"/>
+            <a:pPr algn="ctr" defTabSz="914400">
+              <a:lnSpc>
+                <a:spcPts val="1919"/>
               </a:lnSpc>
               <a:tabLst>
                 <a:tab pos="0" algn="l"/>
@@ -10685,18 +10393,980 @@
             <a:r>
               <a:rPr lang="en-US" sz="1600" b="0" u="none" strike="noStrike">
                 <a:solidFill>
-                  <a:srgbClr val="121821"/>
+                  <a:srgbClr val="F5F2EC"/>
                 </a:solidFill>
                 <a:effectLst/>
                 <a:uFillTx/>
                 <a:latin typeface="IBM Plex Sans"/>
                 <a:ea typeface="IBM Plex Sans"/>
               </a:rPr>
-              <a:t>помилка — без застарілих даних</a:t>
+              <a:t>Дисплей і сирена</a:t>
             </a:r>
             <a:endParaRPr lang="uk-UA" sz="1600" b="0" u="none" strike="noStrike">
               <a:solidFill>
-                <a:srgbClr val="000000"/>
+                <a:srgbClr val="FFFFFF"/>
+              </a:solidFill>
+              <a:effectLst/>
+              <a:uFillTx/>
+              <a:latin typeface="Arial"/>
+            </a:endParaRPr>
+          </a:p>
+        </p:txBody>
+      </p:sp>
+      <p:sp>
+        <p:nvSpPr>
+          <p:cNvPr id="74" name="Text 12"/>
+          <p:cNvSpPr/>
+          <p:nvPr/>
+        </p:nvSpPr>
+        <p:spPr>
+          <a:xfrm>
+            <a:off x="812880" y="3037680"/>
+            <a:ext cx="10883160" cy="309600"/>
+          </a:xfrm>
+          <a:prstGeom prst="rect">
+            <a:avLst/>
+          </a:prstGeom>
+          <a:noFill/>
+          <a:ln w="0">
+            <a:noFill/>
+          </a:ln>
+        </p:spPr>
+        <p:style>
+          <a:lnRef idx="0"/>
+          <a:fillRef idx="0"/>
+          <a:effectRef idx="0"/>
+          <a:fontRef idx="minor"/>
+        </p:style>
+        <p:txBody>
+          <a:bodyPr lIns="0" tIns="0" rIns="0" bIns="0" anchor="t">
+            <a:normAutofit/>
+          </a:bodyPr>
+          <a:p>
+            <a:pPr defTabSz="914400">
+              <a:lnSpc>
+                <a:spcPts val="2239"/>
+              </a:lnSpc>
+              <a:tabLst>
+                <a:tab pos="0" algn="l"/>
+              </a:tabLst>
+            </a:pPr>
+            <a:r>
+              <a:rPr lang="en-US" sz="1600" b="0" u="none" strike="noStrike">
+                <a:solidFill>
+                  <a:srgbClr val="C9D1DC"/>
+                </a:solidFill>
+                <a:effectLst/>
+                <a:uFillTx/>
+                <a:latin typeface="IBM Plex Sans"/>
+                <a:ea typeface="IBM Plex Sans"/>
+              </a:rPr>
+              <a:t>Паралельно працюють:</a:t>
+            </a:r>
+            <a:endParaRPr lang="uk-UA" sz="1600" b="0" u="none" strike="noStrike">
+              <a:solidFill>
+                <a:srgbClr val="FFFFFF"/>
+              </a:solidFill>
+              <a:effectLst/>
+              <a:uFillTx/>
+              <a:latin typeface="Arial"/>
+            </a:endParaRPr>
+          </a:p>
+        </p:txBody>
+      </p:sp>
+      <p:sp>
+        <p:nvSpPr>
+          <p:cNvPr id="75" name="Shape 13"/>
+          <p:cNvSpPr/>
+          <p:nvPr/>
+        </p:nvSpPr>
+        <p:spPr>
+          <a:xfrm>
+            <a:off x="812880" y="3576240"/>
+            <a:ext cx="1990800" cy="1117080"/>
+          </a:xfrm>
+          <a:prstGeom prst="roundRect">
+            <a:avLst>
+              <a:gd name="adj" fmla="val 6819"/>
+            </a:avLst>
+          </a:prstGeom>
+          <a:solidFill>
+            <a:srgbClr val="1B2330"/>
+          </a:solidFill>
+          <a:ln w="0">
+            <a:noFill/>
+          </a:ln>
+        </p:spPr>
+        <p:style>
+          <a:lnRef idx="0"/>
+          <a:fillRef idx="0"/>
+          <a:effectRef idx="0"/>
+          <a:fontRef idx="minor"/>
+        </p:style>
+        <p:txBody>
+          <a:bodyPr lIns="90000" tIns="45000" rIns="90000" bIns="45000" anchor="t">
+            <a:noAutofit/>
+          </a:bodyPr>
+          <a:p>
+            <a:pPr/>
+            <a:endParaRPr lang="uk-UA" sz="1800" b="0" u="none" strike="noStrike">
+              <a:solidFill>
+                <a:srgbClr val="FFFFFF"/>
+              </a:solidFill>
+              <a:effectLst/>
+              <a:uFillTx/>
+              <a:latin typeface="Arial"/>
+            </a:endParaRPr>
+          </a:p>
+        </p:txBody>
+      </p:sp>
+      <p:sp>
+        <p:nvSpPr>
+          <p:cNvPr id="76" name="Text 14"/>
+          <p:cNvSpPr/>
+          <p:nvPr/>
+        </p:nvSpPr>
+        <p:spPr>
+          <a:xfrm>
+            <a:off x="990720" y="3754080"/>
+            <a:ext cx="1686240" cy="273960"/>
+          </a:xfrm>
+          <a:prstGeom prst="rect">
+            <a:avLst/>
+          </a:prstGeom>
+          <a:noFill/>
+          <a:ln w="0">
+            <a:noFill/>
+          </a:ln>
+        </p:spPr>
+        <p:style>
+          <a:lnRef idx="0"/>
+          <a:fillRef idx="0"/>
+          <a:effectRef idx="0"/>
+          <a:fontRef idx="minor"/>
+        </p:style>
+        <p:txBody>
+          <a:bodyPr lIns="0" tIns="0" rIns="0" bIns="0" anchor="t">
+            <a:normAutofit/>
+          </a:bodyPr>
+          <a:p>
+            <a:pPr defTabSz="914400">
+              <a:lnSpc>
+                <a:spcPts val="1959"/>
+              </a:lnSpc>
+              <a:tabLst>
+                <a:tab pos="0" algn="l"/>
+              </a:tabLst>
+            </a:pPr>
+            <a:r>
+              <a:rPr lang="en-US" sz="1400" b="0" u="none" strike="noStrike">
+                <a:solidFill>
+                  <a:srgbClr val="E8A33D"/>
+                </a:solidFill>
+                <a:effectLst/>
+                <a:uFillTx/>
+                <a:latin typeface="JetBrains Mono"/>
+                <a:ea typeface="JetBrains Mono"/>
+              </a:rPr>
+              <a:t>wifi_task</a:t>
+            </a:r>
+            <a:endParaRPr lang="uk-UA" sz="1400" b="0" u="none" strike="noStrike">
+              <a:solidFill>
+                <a:srgbClr val="FFFFFF"/>
+              </a:solidFill>
+              <a:effectLst/>
+              <a:uFillTx/>
+              <a:latin typeface="Arial"/>
+            </a:endParaRPr>
+          </a:p>
+        </p:txBody>
+      </p:sp>
+      <p:sp>
+        <p:nvSpPr>
+          <p:cNvPr id="77" name="Text 15"/>
+          <p:cNvSpPr/>
+          <p:nvPr/>
+        </p:nvSpPr>
+        <p:spPr>
+          <a:xfrm>
+            <a:off x="990720" y="4053600"/>
+            <a:ext cx="1686240" cy="487080"/>
+          </a:xfrm>
+          <a:prstGeom prst="rect">
+            <a:avLst/>
+          </a:prstGeom>
+          <a:noFill/>
+          <a:ln w="0">
+            <a:noFill/>
+          </a:ln>
+        </p:spPr>
+        <p:style>
+          <a:lnRef idx="0"/>
+          <a:fillRef idx="0"/>
+          <a:effectRef idx="0"/>
+          <a:fontRef idx="minor"/>
+        </p:style>
+        <p:txBody>
+          <a:bodyPr lIns="0" tIns="0" rIns="0" bIns="0" anchor="t">
+            <a:normAutofit/>
+          </a:bodyPr>
+          <a:p>
+            <a:pPr defTabSz="914400">
+              <a:lnSpc>
+                <a:spcPts val="1820"/>
+              </a:lnSpc>
+              <a:tabLst>
+                <a:tab pos="0" algn="l"/>
+              </a:tabLst>
+            </a:pPr>
+            <a:r>
+              <a:rPr lang="en-US" sz="1400" b="0" u="none" strike="noStrike">
+                <a:solidFill>
+                  <a:srgbClr val="C9D1DC"/>
+                </a:solidFill>
+                <a:effectLst/>
+                <a:uFillTx/>
+                <a:latin typeface="IBM Plex Sans"/>
+                <a:ea typeface="IBM Plex Sans"/>
+              </a:rPr>
+              <a:t>Wi-Fi і перепідключення</a:t>
+            </a:r>
+            <a:endParaRPr lang="uk-UA" sz="1400" b="0" u="none" strike="noStrike">
+              <a:solidFill>
+                <a:srgbClr val="FFFFFF"/>
+              </a:solidFill>
+              <a:effectLst/>
+              <a:uFillTx/>
+              <a:latin typeface="Arial"/>
+            </a:endParaRPr>
+          </a:p>
+        </p:txBody>
+      </p:sp>
+      <p:sp>
+        <p:nvSpPr>
+          <p:cNvPr id="78" name="Shape 16"/>
+          <p:cNvSpPr/>
+          <p:nvPr/>
+        </p:nvSpPr>
+        <p:spPr>
+          <a:xfrm>
+            <a:off x="2956680" y="3576240"/>
+            <a:ext cx="1991160" cy="1117080"/>
+          </a:xfrm>
+          <a:prstGeom prst="roundRect">
+            <a:avLst>
+              <a:gd name="adj" fmla="val 6819"/>
+            </a:avLst>
+          </a:prstGeom>
+          <a:solidFill>
+            <a:srgbClr val="1B2330"/>
+          </a:solidFill>
+          <a:ln w="0">
+            <a:noFill/>
+          </a:ln>
+        </p:spPr>
+        <p:style>
+          <a:lnRef idx="0"/>
+          <a:fillRef idx="0"/>
+          <a:effectRef idx="0"/>
+          <a:fontRef idx="minor"/>
+        </p:style>
+        <p:txBody>
+          <a:bodyPr lIns="90000" tIns="45000" rIns="90000" bIns="45000" anchor="t">
+            <a:noAutofit/>
+          </a:bodyPr>
+          <a:p>
+            <a:pPr/>
+            <a:endParaRPr lang="uk-UA" sz="1800" b="0" u="none" strike="noStrike">
+              <a:solidFill>
+                <a:srgbClr val="FFFFFF"/>
+              </a:solidFill>
+              <a:effectLst/>
+              <a:uFillTx/>
+              <a:latin typeface="Arial"/>
+            </a:endParaRPr>
+          </a:p>
+        </p:txBody>
+      </p:sp>
+      <p:sp>
+        <p:nvSpPr>
+          <p:cNvPr id="79" name="Text 17"/>
+          <p:cNvSpPr/>
+          <p:nvPr/>
+        </p:nvSpPr>
+        <p:spPr>
+          <a:xfrm>
+            <a:off x="3134160" y="3754080"/>
+            <a:ext cx="1686240" cy="273960"/>
+          </a:xfrm>
+          <a:prstGeom prst="rect">
+            <a:avLst/>
+          </a:prstGeom>
+          <a:noFill/>
+          <a:ln w="0">
+            <a:noFill/>
+          </a:ln>
+        </p:spPr>
+        <p:style>
+          <a:lnRef idx="0"/>
+          <a:fillRef idx="0"/>
+          <a:effectRef idx="0"/>
+          <a:fontRef idx="minor"/>
+        </p:style>
+        <p:txBody>
+          <a:bodyPr lIns="0" tIns="0" rIns="0" bIns="0" anchor="t">
+            <a:normAutofit/>
+          </a:bodyPr>
+          <a:p>
+            <a:pPr defTabSz="914400">
+              <a:lnSpc>
+                <a:spcPts val="1959"/>
+              </a:lnSpc>
+              <a:tabLst>
+                <a:tab pos="0" algn="l"/>
+              </a:tabLst>
+            </a:pPr>
+            <a:r>
+              <a:rPr lang="en-US" sz="1400" b="0" u="none" strike="noStrike">
+                <a:solidFill>
+                  <a:srgbClr val="E8A33D"/>
+                </a:solidFill>
+                <a:effectLst/>
+                <a:uFillTx/>
+                <a:latin typeface="JetBrains Mono"/>
+                <a:ea typeface="JetBrains Mono"/>
+              </a:rPr>
+              <a:t>buzzer_task</a:t>
+            </a:r>
+            <a:endParaRPr lang="uk-UA" sz="1400" b="0" u="none" strike="noStrike">
+              <a:solidFill>
+                <a:srgbClr val="FFFFFF"/>
+              </a:solidFill>
+              <a:effectLst/>
+              <a:uFillTx/>
+              <a:latin typeface="Arial"/>
+            </a:endParaRPr>
+          </a:p>
+        </p:txBody>
+      </p:sp>
+      <p:sp>
+        <p:nvSpPr>
+          <p:cNvPr id="80" name="Text 18"/>
+          <p:cNvSpPr/>
+          <p:nvPr/>
+        </p:nvSpPr>
+        <p:spPr>
+          <a:xfrm>
+            <a:off x="3134160" y="4053600"/>
+            <a:ext cx="1686240" cy="487080"/>
+          </a:xfrm>
+          <a:prstGeom prst="rect">
+            <a:avLst/>
+          </a:prstGeom>
+          <a:noFill/>
+          <a:ln w="0">
+            <a:noFill/>
+          </a:ln>
+        </p:spPr>
+        <p:style>
+          <a:lnRef idx="0"/>
+          <a:fillRef idx="0"/>
+          <a:effectRef idx="0"/>
+          <a:fontRef idx="minor"/>
+        </p:style>
+        <p:txBody>
+          <a:bodyPr lIns="0" tIns="0" rIns="0" bIns="0" anchor="t">
+            <a:normAutofit/>
+          </a:bodyPr>
+          <a:p>
+            <a:pPr defTabSz="914400">
+              <a:lnSpc>
+                <a:spcPts val="1820"/>
+              </a:lnSpc>
+              <a:tabLst>
+                <a:tab pos="0" algn="l"/>
+              </a:tabLst>
+            </a:pPr>
+            <a:r>
+              <a:rPr lang="en-US" sz="1400" b="0" u="none" strike="noStrike">
+                <a:solidFill>
+                  <a:srgbClr val="C9D1DC"/>
+                </a:solidFill>
+                <a:effectLst/>
+                <a:uFillTx/>
+                <a:latin typeface="IBM Plex Sans"/>
+                <a:ea typeface="IBM Plex Sans"/>
+              </a:rPr>
+              <a:t>неблокуюча сирена</a:t>
+            </a:r>
+            <a:endParaRPr lang="uk-UA" sz="1400" b="0" u="none" strike="noStrike">
+              <a:solidFill>
+                <a:srgbClr val="FFFFFF"/>
+              </a:solidFill>
+              <a:effectLst/>
+              <a:uFillTx/>
+              <a:latin typeface="Arial"/>
+            </a:endParaRPr>
+          </a:p>
+        </p:txBody>
+      </p:sp>
+      <p:sp>
+        <p:nvSpPr>
+          <p:cNvPr id="81" name="Shape 19"/>
+          <p:cNvSpPr/>
+          <p:nvPr/>
+        </p:nvSpPr>
+        <p:spPr>
+          <a:xfrm>
+            <a:off x="5100480" y="3576240"/>
+            <a:ext cx="1990800" cy="1117080"/>
+          </a:xfrm>
+          <a:prstGeom prst="roundRect">
+            <a:avLst>
+              <a:gd name="adj" fmla="val 6819"/>
+            </a:avLst>
+          </a:prstGeom>
+          <a:solidFill>
+            <a:srgbClr val="1B2330"/>
+          </a:solidFill>
+          <a:ln w="0">
+            <a:noFill/>
+          </a:ln>
+        </p:spPr>
+        <p:style>
+          <a:lnRef idx="0"/>
+          <a:fillRef idx="0"/>
+          <a:effectRef idx="0"/>
+          <a:fontRef idx="minor"/>
+        </p:style>
+        <p:txBody>
+          <a:bodyPr lIns="90000" tIns="45000" rIns="90000" bIns="45000" anchor="t">
+            <a:noAutofit/>
+          </a:bodyPr>
+          <a:p>
+            <a:pPr/>
+            <a:endParaRPr lang="uk-UA" sz="1800" b="0" u="none" strike="noStrike">
+              <a:solidFill>
+                <a:srgbClr val="FFFFFF"/>
+              </a:solidFill>
+              <a:effectLst/>
+              <a:uFillTx/>
+              <a:latin typeface="Arial"/>
+            </a:endParaRPr>
+          </a:p>
+        </p:txBody>
+      </p:sp>
+      <p:sp>
+        <p:nvSpPr>
+          <p:cNvPr id="82" name="Text 20"/>
+          <p:cNvSpPr/>
+          <p:nvPr/>
+        </p:nvSpPr>
+        <p:spPr>
+          <a:xfrm>
+            <a:off x="5278320" y="3754080"/>
+            <a:ext cx="1686240" cy="273960"/>
+          </a:xfrm>
+          <a:prstGeom prst="rect">
+            <a:avLst/>
+          </a:prstGeom>
+          <a:noFill/>
+          <a:ln w="0">
+            <a:noFill/>
+          </a:ln>
+        </p:spPr>
+        <p:style>
+          <a:lnRef idx="0"/>
+          <a:fillRef idx="0"/>
+          <a:effectRef idx="0"/>
+          <a:fontRef idx="minor"/>
+        </p:style>
+        <p:txBody>
+          <a:bodyPr lIns="0" tIns="0" rIns="0" bIns="0" anchor="t">
+            <a:normAutofit/>
+          </a:bodyPr>
+          <a:p>
+            <a:pPr defTabSz="914400">
+              <a:lnSpc>
+                <a:spcPts val="1959"/>
+              </a:lnSpc>
+              <a:tabLst>
+                <a:tab pos="0" algn="l"/>
+              </a:tabLst>
+            </a:pPr>
+            <a:r>
+              <a:rPr lang="en-US" sz="1400" b="0" u="none" strike="noStrike">
+                <a:solidFill>
+                  <a:srgbClr val="E8A33D"/>
+                </a:solidFill>
+                <a:effectLst/>
+                <a:uFillTx/>
+                <a:latin typeface="JetBrains Mono"/>
+                <a:ea typeface="JetBrains Mono"/>
+              </a:rPr>
+              <a:t>button_task</a:t>
+            </a:r>
+            <a:endParaRPr lang="uk-UA" sz="1400" b="0" u="none" strike="noStrike">
+              <a:solidFill>
+                <a:srgbClr val="FFFFFF"/>
+              </a:solidFill>
+              <a:effectLst/>
+              <a:uFillTx/>
+              <a:latin typeface="Arial"/>
+            </a:endParaRPr>
+          </a:p>
+        </p:txBody>
+      </p:sp>
+      <p:sp>
+        <p:nvSpPr>
+          <p:cNvPr id="83" name="Text 21"/>
+          <p:cNvSpPr/>
+          <p:nvPr/>
+        </p:nvSpPr>
+        <p:spPr>
+          <a:xfrm>
+            <a:off x="5278320" y="4053600"/>
+            <a:ext cx="1686240" cy="487080"/>
+          </a:xfrm>
+          <a:prstGeom prst="rect">
+            <a:avLst/>
+          </a:prstGeom>
+          <a:noFill/>
+          <a:ln w="0">
+            <a:noFill/>
+          </a:ln>
+        </p:spPr>
+        <p:style>
+          <a:lnRef idx="0"/>
+          <a:fillRef idx="0"/>
+          <a:effectRef idx="0"/>
+          <a:fontRef idx="minor"/>
+        </p:style>
+        <p:txBody>
+          <a:bodyPr lIns="0" tIns="0" rIns="0" bIns="0" anchor="t">
+            <a:normAutofit/>
+          </a:bodyPr>
+          <a:p>
+            <a:pPr defTabSz="914400">
+              <a:lnSpc>
+                <a:spcPts val="1820"/>
+              </a:lnSpc>
+              <a:tabLst>
+                <a:tab pos="0" algn="l"/>
+              </a:tabLst>
+            </a:pPr>
+            <a:r>
+              <a:rPr lang="en-US" sz="1400" b="0" u="none" strike="noStrike">
+                <a:solidFill>
+                  <a:srgbClr val="C9D1DC"/>
+                </a:solidFill>
+                <a:effectLst/>
+                <a:uFillTx/>
+                <a:latin typeface="IBM Plex Sans"/>
+                <a:ea typeface="IBM Plex Sans"/>
+              </a:rPr>
+              <a:t>кнопка через переривання</a:t>
+            </a:r>
+            <a:endParaRPr lang="uk-UA" sz="1400" b="0" u="none" strike="noStrike">
+              <a:solidFill>
+                <a:srgbClr val="FFFFFF"/>
+              </a:solidFill>
+              <a:effectLst/>
+              <a:uFillTx/>
+              <a:latin typeface="Arial"/>
+            </a:endParaRPr>
+          </a:p>
+        </p:txBody>
+      </p:sp>
+      <p:sp>
+        <p:nvSpPr>
+          <p:cNvPr id="84" name="Shape 22"/>
+          <p:cNvSpPr/>
+          <p:nvPr/>
+        </p:nvSpPr>
+        <p:spPr>
+          <a:xfrm>
+            <a:off x="7243920" y="3576240"/>
+            <a:ext cx="1991160" cy="1117080"/>
+          </a:xfrm>
+          <a:prstGeom prst="roundRect">
+            <a:avLst>
+              <a:gd name="adj" fmla="val 6819"/>
+            </a:avLst>
+          </a:prstGeom>
+          <a:solidFill>
+            <a:srgbClr val="1B2330"/>
+          </a:solidFill>
+          <a:ln w="0">
+            <a:noFill/>
+          </a:ln>
+        </p:spPr>
+        <p:style>
+          <a:lnRef idx="0"/>
+          <a:fillRef idx="0"/>
+          <a:effectRef idx="0"/>
+          <a:fontRef idx="minor"/>
+        </p:style>
+        <p:txBody>
+          <a:bodyPr lIns="90000" tIns="45000" rIns="90000" bIns="45000" anchor="t">
+            <a:noAutofit/>
+          </a:bodyPr>
+          <a:p>
+            <a:pPr/>
+            <a:endParaRPr lang="uk-UA" sz="1800" b="0" u="none" strike="noStrike">
+              <a:solidFill>
+                <a:srgbClr val="FFFFFF"/>
+              </a:solidFill>
+              <a:effectLst/>
+              <a:uFillTx/>
+              <a:latin typeface="Arial"/>
+            </a:endParaRPr>
+          </a:p>
+        </p:txBody>
+      </p:sp>
+      <p:sp>
+        <p:nvSpPr>
+          <p:cNvPr id="85" name="Text 23"/>
+          <p:cNvSpPr/>
+          <p:nvPr/>
+        </p:nvSpPr>
+        <p:spPr>
+          <a:xfrm>
+            <a:off x="7421760" y="3754080"/>
+            <a:ext cx="1686240" cy="273960"/>
+          </a:xfrm>
+          <a:prstGeom prst="rect">
+            <a:avLst/>
+          </a:prstGeom>
+          <a:noFill/>
+          <a:ln w="0">
+            <a:noFill/>
+          </a:ln>
+        </p:spPr>
+        <p:style>
+          <a:lnRef idx="0"/>
+          <a:fillRef idx="0"/>
+          <a:effectRef idx="0"/>
+          <a:fontRef idx="minor"/>
+        </p:style>
+        <p:txBody>
+          <a:bodyPr lIns="0" tIns="0" rIns="0" bIns="0" anchor="t">
+            <a:normAutofit/>
+          </a:bodyPr>
+          <a:p>
+            <a:pPr defTabSz="914400">
+              <a:lnSpc>
+                <a:spcPts val="1959"/>
+              </a:lnSpc>
+              <a:tabLst>
+                <a:tab pos="0" algn="l"/>
+              </a:tabLst>
+            </a:pPr>
+            <a:r>
+              <a:rPr lang="en-US" sz="1400" b="0" u="none" strike="noStrike">
+                <a:solidFill>
+                  <a:srgbClr val="E8A33D"/>
+                </a:solidFill>
+                <a:effectLst/>
+                <a:uFillTx/>
+                <a:latin typeface="JetBrains Mono"/>
+                <a:ea typeface="JetBrains Mono"/>
+              </a:rPr>
+              <a:t>brightness_task</a:t>
+            </a:r>
+            <a:endParaRPr lang="uk-UA" sz="1400" b="0" u="none" strike="noStrike">
+              <a:solidFill>
+                <a:srgbClr val="FFFFFF"/>
+              </a:solidFill>
+              <a:effectLst/>
+              <a:uFillTx/>
+              <a:latin typeface="Arial"/>
+            </a:endParaRPr>
+          </a:p>
+        </p:txBody>
+      </p:sp>
+      <p:sp>
+        <p:nvSpPr>
+          <p:cNvPr id="86" name="Text 24"/>
+          <p:cNvSpPr/>
+          <p:nvPr/>
+        </p:nvSpPr>
+        <p:spPr>
+          <a:xfrm>
+            <a:off x="7421760" y="4053600"/>
+            <a:ext cx="1686240" cy="487080"/>
+          </a:xfrm>
+          <a:prstGeom prst="rect">
+            <a:avLst/>
+          </a:prstGeom>
+          <a:noFill/>
+          <a:ln w="0">
+            <a:noFill/>
+          </a:ln>
+        </p:spPr>
+        <p:style>
+          <a:lnRef idx="0"/>
+          <a:fillRef idx="0"/>
+          <a:effectRef idx="0"/>
+          <a:fontRef idx="minor"/>
+        </p:style>
+        <p:txBody>
+          <a:bodyPr lIns="0" tIns="0" rIns="0" bIns="0" anchor="t">
+            <a:normAutofit/>
+          </a:bodyPr>
+          <a:p>
+            <a:pPr defTabSz="914400">
+              <a:lnSpc>
+                <a:spcPts val="1820"/>
+              </a:lnSpc>
+              <a:tabLst>
+                <a:tab pos="0" algn="l"/>
+              </a:tabLst>
+            </a:pPr>
+            <a:r>
+              <a:rPr lang="en-US" sz="1400" b="0" u="none" strike="noStrike">
+                <a:solidFill>
+                  <a:srgbClr val="C9D1DC"/>
+                </a:solidFill>
+                <a:effectLst/>
+                <a:uFillTx/>
+                <a:latin typeface="IBM Plex Sans"/>
+                <a:ea typeface="IBM Plex Sans"/>
+              </a:rPr>
+              <a:t>ПІ-регулятор яскравості</a:t>
+            </a:r>
+            <a:endParaRPr lang="uk-UA" sz="1400" b="0" u="none" strike="noStrike">
+              <a:solidFill>
+                <a:srgbClr val="FFFFFF"/>
+              </a:solidFill>
+              <a:effectLst/>
+              <a:uFillTx/>
+              <a:latin typeface="Arial"/>
+            </a:endParaRPr>
+          </a:p>
+        </p:txBody>
+      </p:sp>
+      <p:sp>
+        <p:nvSpPr>
+          <p:cNvPr id="87" name="Shape 25"/>
+          <p:cNvSpPr/>
+          <p:nvPr/>
+        </p:nvSpPr>
+        <p:spPr>
+          <a:xfrm>
+            <a:off x="9387720" y="3576240"/>
+            <a:ext cx="1990800" cy="1117080"/>
+          </a:xfrm>
+          <a:prstGeom prst="roundRect">
+            <a:avLst>
+              <a:gd name="adj" fmla="val 6819"/>
+            </a:avLst>
+          </a:prstGeom>
+          <a:solidFill>
+            <a:srgbClr val="1B2330"/>
+          </a:solidFill>
+          <a:ln w="0">
+            <a:noFill/>
+          </a:ln>
+        </p:spPr>
+        <p:style>
+          <a:lnRef idx="0"/>
+          <a:fillRef idx="0"/>
+          <a:effectRef idx="0"/>
+          <a:fontRef idx="minor"/>
+        </p:style>
+        <p:txBody>
+          <a:bodyPr lIns="90000" tIns="45000" rIns="90000" bIns="45000" anchor="t">
+            <a:noAutofit/>
+          </a:bodyPr>
+          <a:p>
+            <a:pPr/>
+            <a:endParaRPr lang="uk-UA" sz="1800" b="0" u="none" strike="noStrike">
+              <a:solidFill>
+                <a:srgbClr val="FFFFFF"/>
+              </a:solidFill>
+              <a:effectLst/>
+              <a:uFillTx/>
+              <a:latin typeface="Arial"/>
+            </a:endParaRPr>
+          </a:p>
+        </p:txBody>
+      </p:sp>
+      <p:sp>
+        <p:nvSpPr>
+          <p:cNvPr id="88" name="Text 26"/>
+          <p:cNvSpPr/>
+          <p:nvPr/>
+        </p:nvSpPr>
+        <p:spPr>
+          <a:xfrm>
+            <a:off x="9565560" y="3754080"/>
+            <a:ext cx="1686240" cy="273960"/>
+          </a:xfrm>
+          <a:prstGeom prst="rect">
+            <a:avLst/>
+          </a:prstGeom>
+          <a:noFill/>
+          <a:ln w="0">
+            <a:noFill/>
+          </a:ln>
+        </p:spPr>
+        <p:style>
+          <a:lnRef idx="0"/>
+          <a:fillRef idx="0"/>
+          <a:effectRef idx="0"/>
+          <a:fontRef idx="minor"/>
+        </p:style>
+        <p:txBody>
+          <a:bodyPr lIns="0" tIns="0" rIns="0" bIns="0" anchor="t">
+            <a:normAutofit/>
+          </a:bodyPr>
+          <a:p>
+            <a:pPr defTabSz="914400">
+              <a:lnSpc>
+                <a:spcPts val="1959"/>
+              </a:lnSpc>
+              <a:tabLst>
+                <a:tab pos="0" algn="l"/>
+              </a:tabLst>
+            </a:pPr>
+            <a:r>
+              <a:rPr lang="en-US" sz="1400" b="0" u="none" strike="noStrike">
+                <a:solidFill>
+                  <a:srgbClr val="E8A33D"/>
+                </a:solidFill>
+                <a:effectLst/>
+                <a:uFillTx/>
+                <a:latin typeface="JetBrains Mono"/>
+                <a:ea typeface="JetBrains Mono"/>
+              </a:rPr>
+              <a:t>monitor_task</a:t>
+            </a:r>
+            <a:endParaRPr lang="uk-UA" sz="1400" b="0" u="none" strike="noStrike">
+              <a:solidFill>
+                <a:srgbClr val="FFFFFF"/>
+              </a:solidFill>
+              <a:effectLst/>
+              <a:uFillTx/>
+              <a:latin typeface="Arial"/>
+            </a:endParaRPr>
+          </a:p>
+        </p:txBody>
+      </p:sp>
+      <p:sp>
+        <p:nvSpPr>
+          <p:cNvPr id="89" name="Text 27"/>
+          <p:cNvSpPr/>
+          <p:nvPr/>
+        </p:nvSpPr>
+        <p:spPr>
+          <a:xfrm>
+            <a:off x="9565560" y="4053600"/>
+            <a:ext cx="1686240" cy="255960"/>
+          </a:xfrm>
+          <a:prstGeom prst="rect">
+            <a:avLst/>
+          </a:prstGeom>
+          <a:noFill/>
+          <a:ln w="0">
+            <a:noFill/>
+          </a:ln>
+        </p:spPr>
+        <p:style>
+          <a:lnRef idx="0"/>
+          <a:fillRef idx="0"/>
+          <a:effectRef idx="0"/>
+          <a:fontRef idx="minor"/>
+        </p:style>
+        <p:txBody>
+          <a:bodyPr lIns="0" tIns="0" rIns="0" bIns="0" anchor="t">
+            <a:normAutofit/>
+          </a:bodyPr>
+          <a:p>
+            <a:pPr defTabSz="914400">
+              <a:lnSpc>
+                <a:spcPts val="1820"/>
+              </a:lnSpc>
+              <a:tabLst>
+                <a:tab pos="0" algn="l"/>
+              </a:tabLst>
+            </a:pPr>
+            <a:r>
+              <a:rPr lang="en-US" sz="1400" b="0" u="none" strike="noStrike">
+                <a:solidFill>
+                  <a:srgbClr val="C9D1DC"/>
+                </a:solidFill>
+                <a:effectLst/>
+                <a:uFillTx/>
+                <a:latin typeface="IBM Plex Sans"/>
+                <a:ea typeface="IBM Plex Sans"/>
+              </a:rPr>
+              <a:t>навантаження CPU</a:t>
+            </a:r>
+            <a:endParaRPr lang="uk-UA" sz="1400" b="0" u="none" strike="noStrike">
+              <a:solidFill>
+                <a:srgbClr val="FFFFFF"/>
+              </a:solidFill>
+              <a:effectLst/>
+              <a:uFillTx/>
+              <a:latin typeface="Arial"/>
+            </a:endParaRPr>
+          </a:p>
+        </p:txBody>
+      </p:sp>
+      <p:sp>
+        <p:nvSpPr>
+          <p:cNvPr id="90" name="Text 28"/>
+          <p:cNvSpPr/>
+          <p:nvPr/>
+        </p:nvSpPr>
+        <p:spPr>
+          <a:xfrm>
+            <a:off x="812880" y="6238440"/>
+            <a:ext cx="10883160" cy="238320"/>
+          </a:xfrm>
+          <a:prstGeom prst="rect">
+            <a:avLst/>
+          </a:prstGeom>
+          <a:noFill/>
+          <a:ln w="0">
+            <a:noFill/>
+          </a:ln>
+        </p:spPr>
+        <p:style>
+          <a:lnRef idx="0"/>
+          <a:fillRef idx="0"/>
+          <a:effectRef idx="0"/>
+          <a:fontRef idx="minor"/>
+        </p:style>
+        <p:txBody>
+          <a:bodyPr lIns="0" tIns="0" rIns="0" bIns="0" anchor="t">
+            <a:normAutofit/>
+          </a:bodyPr>
+          <a:p>
+            <a:pPr defTabSz="914400">
+              <a:lnSpc>
+                <a:spcPts val="1681"/>
+              </a:lnSpc>
+              <a:tabLst>
+                <a:tab pos="0" algn="l"/>
+              </a:tabLst>
+            </a:pPr>
+            <a:r>
+              <a:rPr lang="en-US" sz="1200" b="0" u="none" strike="noStrike">
+                <a:solidFill>
+                  <a:srgbClr val="9AA5B4"/>
+                </a:solidFill>
+                <a:effectLst/>
+                <a:uFillTx/>
+                <a:latin typeface="IBM Plex Sans"/>
+                <a:ea typeface="IBM Plex Sans"/>
+              </a:rPr>
+              <a:t>Черги FreeRTOS для обміну даними · м'ютекс для спільного стану · кожна задача — окремий компонент</a:t>
+            </a:r>
+            <a:endParaRPr lang="uk-UA" sz="1200" b="0" u="none" strike="noStrike">
+              <a:solidFill>
+                <a:srgbClr val="FFFFFF"/>
               </a:solidFill>
               <a:effectLst/>
               <a:uFillTx/>
@@ -10744,7 +11414,7 @@
       </p:grpSpPr>
       <p:sp>
         <p:nvSpPr>
-          <p:cNvPr id="96" name="Text 0"/>
+          <p:cNvPr id="91" name="Text 0"/>
           <p:cNvSpPr/>
           <p:nvPr/>
         </p:nvSpPr>
@@ -10790,7 +11460,7 @@
                 <a:latin typeface="JetBrains Mono"/>
                 <a:ea typeface="JetBrains Mono"/>
               </a:rPr>
-              <a:t>НАДІЙНІСТЬ</a:t>
+              <a:t>ДАНІ ТА ВІДОБРАЖЕННЯ</a:t>
             </a:r>
             <a:endParaRPr lang="uk-UA" sz="1200" b="0" u="none" strike="noStrike">
               <a:solidFill>
@@ -10805,7 +11475,7 @@
       </p:sp>
       <p:sp>
         <p:nvSpPr>
-          <p:cNvPr id="97" name="Text 1"/>
+          <p:cNvPr id="92" name="Text 1"/>
           <p:cNvSpPr/>
           <p:nvPr/>
         </p:nvSpPr>
@@ -10851,7 +11521,7 @@
                 <a:latin typeface="IBM Plex Sans"/>
                 <a:ea typeface="IBM Plex Sans"/>
               </a:rPr>
-              <a:t>Пристрій не зависає і не бреше</a:t>
+              <a:t>27 символів замість кілобайтів JSON</a:t>
             </a:r>
             <a:endParaRPr lang="uk-UA" sz="3600" b="0" u="none" strike="noStrike">
               <a:solidFill>
@@ -10866,28 +11536,25 @@
       </p:sp>
       <p:sp>
         <p:nvSpPr>
-          <p:cNvPr id="98" name="Shape 2"/>
+          <p:cNvPr id="93" name="Shape 2"/>
           <p:cNvSpPr/>
           <p:nvPr/>
         </p:nvSpPr>
         <p:spPr>
           <a:xfrm>
-            <a:off x="816120" y="1938600"/>
-            <a:ext cx="5175000" cy="1392840"/>
+            <a:off x="812880" y="1935360"/>
+            <a:ext cx="10566000" cy="1391400"/>
           </a:xfrm>
           <a:prstGeom prst="roundRect">
             <a:avLst>
-              <a:gd name="adj" fmla="val 7066"/>
+              <a:gd name="adj" fmla="val 7300"/>
             </a:avLst>
           </a:prstGeom>
           <a:solidFill>
-            <a:srgbClr val="FFFDF8"/>
+            <a:srgbClr val="121821"/>
           </a:solidFill>
-          <a:ln w="6350">
-            <a:solidFill>
-              <a:srgbClr val="DDD7CB"/>
-            </a:solidFill>
-            <a:round/>
+          <a:ln w="0">
+            <a:noFill/>
           </a:ln>
         </p:spPr>
         <p:style>
@@ -10904,49 +11571,25 @@
             <a:pPr/>
             <a:endParaRPr lang="uk-UA" sz="1800" b="0" u="none" strike="noStrike">
               <a:solidFill>
-                <a:srgbClr val="000000"/>
-              </a:solidFill>
-              <a:effectLst/>
-              <a:uFillTx/>
-              <a:latin typeface="Arial"/>
-            </a:endParaRPr>
-          </a:p>
-        </p:txBody>
-      </p:sp>
-      <p:pic>
-        <p:nvPicPr>
-          <p:cNvPr id="99" name="Image 0" descr="Activity"/>
-          <p:cNvPicPr/>
-          <p:nvPr/>
-        </p:nvPicPr>
-        <p:blipFill>
-          <a:blip r:embed="rId1"/>
-          <a:stretch/>
-        </p:blipFill>
-        <p:spPr>
-          <a:xfrm>
-            <a:off x="1073160" y="2195640"/>
-            <a:ext cx="355320" cy="355320"/>
-          </a:xfrm>
-          <a:prstGeom prst="rect">
-            <a:avLst/>
-          </a:prstGeom>
-          <a:noFill/>
-          <a:ln w="0">
-            <a:noFill/>
-          </a:ln>
-        </p:spPr>
-      </p:pic>
-      <p:sp>
-        <p:nvSpPr>
-          <p:cNvPr id="100" name="Text 3"/>
+                <a:srgbClr val="FFFFFF"/>
+              </a:solidFill>
+              <a:effectLst/>
+              <a:uFillTx/>
+              <a:latin typeface="Arial"/>
+            </a:endParaRPr>
+          </a:p>
+        </p:txBody>
+      </p:sp>
+      <p:sp>
+        <p:nvSpPr>
+          <p:cNvPr id="94" name="Text 3"/>
           <p:cNvSpPr/>
           <p:nvPr/>
         </p:nvSpPr>
         <p:spPr>
           <a:xfrm>
-            <a:off x="1631880" y="2195640"/>
-            <a:ext cx="4224960" cy="329760"/>
+            <a:off x="915840" y="2189520"/>
+            <a:ext cx="10359720" cy="594000"/>
           </a:xfrm>
           <a:prstGeom prst="rect">
             <a:avLst/>
@@ -10967,27 +11610,75 @@
             <a:normAutofit/>
           </a:bodyPr>
           <a:p>
-            <a:pPr defTabSz="914400">
-              <a:lnSpc>
-                <a:spcPts val="2401"/>
+            <a:pPr algn="ctr" defTabSz="914400">
+              <a:lnSpc>
+                <a:spcPts val="4479"/>
               </a:lnSpc>
               <a:tabLst>
                 <a:tab pos="0" algn="l"/>
               </a:tabLst>
             </a:pPr>
             <a:r>
-              <a:rPr lang="en-US" sz="2000" b="1" u="none" strike="noStrike">
-                <a:solidFill>
-                  <a:srgbClr val="121821"/>
-                </a:solidFill>
-                <a:effectLst/>
-                <a:uFillTx/>
-                <a:latin typeface="IBM Plex Sans"/>
-                <a:ea typeface="IBM Plex Sans"/>
-              </a:rPr>
-              <a:t>Watchdog-таймер</a:t>
+              <a:rPr lang="en-US" sz="3200" b="0" u="none" spc="300" strike="noStrike">
+                <a:solidFill>
+                  <a:srgbClr val="6B7788"/>
+                </a:solidFill>
+                <a:effectLst/>
+                <a:uFillTx/>
+                <a:latin typeface="JetBrains Mono"/>
+                <a:ea typeface="JetBrains Mono"/>
+              </a:rPr>
+              <a:t>NNNNNNNNNN</a:t>
             </a:r>
-            <a:endParaRPr lang="uk-UA" sz="2000" b="0" u="none" strike="noStrike">
+            <a:r>
+              <a:rPr lang="en-US" sz="3200" b="0" u="none" spc="300" strike="noStrike">
+                <a:solidFill>
+                  <a:srgbClr val="E0483E"/>
+                </a:solidFill>
+                <a:effectLst/>
+                <a:uFillTx/>
+                <a:latin typeface="JetBrains Mono"/>
+                <a:ea typeface="JetBrains Mono"/>
+              </a:rPr>
+              <a:t>A</a:t>
+            </a:r>
+            <a:r>
+              <a:rPr lang="en-US" sz="3200" b="0" u="none" spc="300" strike="noStrike">
+                <a:solidFill>
+                  <a:srgbClr val="6B7788"/>
+                </a:solidFill>
+                <a:effectLst/>
+                <a:uFillTx/>
+                <a:latin typeface="JetBrains Mono"/>
+                <a:ea typeface="JetBrains Mono"/>
+              </a:rPr>
+              <a:t>NNNNNNNNNN</a:t>
+            </a:r>
+            <a:r>
+              <a:rPr lang="en-US" sz="3200" b="0" u="none" spc="300" strike="noStrike">
+                <a:solidFill>
+                  <a:srgbClr val="E8A33D"/>
+                </a:solidFill>
+                <a:effectLst/>
+                <a:uFillTx/>
+                <a:latin typeface="JetBrains Mono"/>
+                <a:ea typeface="JetBrains Mono"/>
+              </a:rPr>
+              <a:t>P</a:t>
+            </a:r>
+            <a:r>
+              <a:rPr lang="en-US" sz="3200" b="0" u="none" spc="300" strike="noStrike">
+                <a:solidFill>
+                  <a:srgbClr val="6B7788"/>
+                </a:solidFill>
+                <a:effectLst/>
+                <a:uFillTx/>
+                <a:latin typeface="JetBrains Mono"/>
+                <a:ea typeface="JetBrains Mono"/>
+              </a:rPr>
+              <a:t>NNNNN</a:t>
+            </a:r>
+            <a:endParaRPr lang="uk-UA" sz="3200" b="0" u="none" strike="noStrike">
               <a:solidFill>
                 <a:srgbClr val="000000"/>
               </a:solidFill>
@@ -11000,14 +11691,14 @@
       </p:sp>
       <p:sp>
         <p:nvSpPr>
-          <p:cNvPr id="101" name="Text 4"/>
+          <p:cNvPr id="95" name="Text 4"/>
           <p:cNvSpPr/>
           <p:nvPr/>
         </p:nvSpPr>
         <p:spPr>
           <a:xfrm>
-            <a:off x="1631880" y="2576880"/>
-            <a:ext cx="4224960" cy="522720"/>
+            <a:off x="915840" y="2859840"/>
+            <a:ext cx="10359720" cy="238320"/>
           </a:xfrm>
           <a:prstGeom prst="rect">
             <a:avLst/>
@@ -11028,27 +11719,27 @@
             <a:normAutofit/>
           </a:bodyPr>
           <a:p>
-            <a:pPr defTabSz="914400">
-              <a:lnSpc>
-                <a:spcPts val="1959"/>
+            <a:pPr algn="ctr" defTabSz="914400">
+              <a:lnSpc>
+                <a:spcPts val="1681"/>
               </a:lnSpc>
               <a:tabLst>
                 <a:tab pos="0" algn="l"/>
               </a:tabLst>
             </a:pPr>
             <a:r>
-              <a:rPr lang="en-US" sz="1400" b="0" u="none" strike="noStrike">
-                <a:solidFill>
-                  <a:srgbClr val="4A5568"/>
+              <a:rPr lang="en-US" sz="1200" b="0" u="none" strike="noStrike">
+                <a:solidFill>
+                  <a:srgbClr val="9AA5B4"/>
                 </a:solidFill>
                 <a:effectLst/>
                 <a:uFillTx/>
                 <a:latin typeface="IBM Plex Sans"/>
                 <a:ea typeface="IBM Plex Sans"/>
               </a:rPr>
-              <a:t>Кожна задача під наглядом; зависання — автоматичне перезавантаження.</a:t>
+              <a:t>IoT-ендпоінт alerts.in.ua: один символ на область, ~30 байт, лише повітряні тривоги</a:t>
             </a:r>
-            <a:endParaRPr lang="uk-UA" sz="1400" b="0" u="none" strike="noStrike">
+            <a:endParaRPr lang="uk-UA" sz="1200" b="0" u="none" strike="noStrike">
               <a:solidFill>
                 <a:srgbClr val="000000"/>
               </a:solidFill>
@@ -11061,28 +11752,25 @@
       </p:sp>
       <p:sp>
         <p:nvSpPr>
-          <p:cNvPr id="102" name="Shape 5"/>
+          <p:cNvPr id="96" name="Shape 5"/>
           <p:cNvSpPr/>
           <p:nvPr/>
         </p:nvSpPr>
         <p:spPr>
           <a:xfrm>
-            <a:off x="6200640" y="1938600"/>
-            <a:ext cx="5175000" cy="1392840"/>
+            <a:off x="812880" y="3753720"/>
+            <a:ext cx="406080" cy="406080"/>
           </a:xfrm>
           <a:prstGeom prst="roundRect">
             <a:avLst>
-              <a:gd name="adj" fmla="val 7066"/>
+              <a:gd name="adj" fmla="val 12500"/>
             </a:avLst>
           </a:prstGeom>
           <a:solidFill>
-            <a:srgbClr val="FFFDF8"/>
+            <a:srgbClr val="C8352B"/>
           </a:solidFill>
-          <a:ln w="6350">
-            <a:solidFill>
-              <a:srgbClr val="DDD7CB"/>
-            </a:solidFill>
-            <a:round/>
+          <a:ln w="0">
+            <a:noFill/>
           </a:ln>
         </p:spPr>
         <p:style>
@@ -11099,49 +11787,25 @@
             <a:pPr/>
             <a:endParaRPr lang="uk-UA" sz="1800" b="0" u="none" strike="noStrike">
               <a:solidFill>
-                <a:srgbClr val="000000"/>
-              </a:solidFill>
-              <a:effectLst/>
-              <a:uFillTx/>
-              <a:latin typeface="Arial"/>
-            </a:endParaRPr>
-          </a:p>
-        </p:txBody>
-      </p:sp>
-      <p:pic>
-        <p:nvPicPr>
-          <p:cNvPr id="103" name="Image 1" descr="CheckCircle"/>
-          <p:cNvPicPr/>
-          <p:nvPr/>
-        </p:nvPicPr>
-        <p:blipFill>
-          <a:blip r:embed="rId2"/>
-          <a:stretch/>
-        </p:blipFill>
-        <p:spPr>
-          <a:xfrm>
-            <a:off x="6458040" y="2195640"/>
-            <a:ext cx="355320" cy="355320"/>
-          </a:xfrm>
-          <a:prstGeom prst="rect">
-            <a:avLst/>
-          </a:prstGeom>
-          <a:noFill/>
-          <a:ln w="0">
-            <a:noFill/>
-          </a:ln>
-        </p:spPr>
-      </p:pic>
-      <p:sp>
-        <p:nvSpPr>
-          <p:cNvPr id="104" name="Text 6"/>
+                <a:srgbClr val="FFFFFF"/>
+              </a:solidFill>
+              <a:effectLst/>
+              <a:uFillTx/>
+              <a:latin typeface="Arial"/>
+            </a:endParaRPr>
+          </a:p>
+        </p:txBody>
+      </p:sp>
+      <p:sp>
+        <p:nvSpPr>
+          <p:cNvPr id="97" name="Text 6"/>
           <p:cNvSpPr/>
           <p:nvPr/>
         </p:nvSpPr>
         <p:spPr>
           <a:xfrm>
-            <a:off x="7016760" y="2195640"/>
-            <a:ext cx="4224960" cy="329760"/>
+            <a:off x="1371600" y="3692880"/>
+            <a:ext cx="2912400" cy="553320"/>
           </a:xfrm>
           <a:prstGeom prst="rect">
             <a:avLst/>
@@ -11164,14 +11828,14 @@
           <a:p>
             <a:pPr defTabSz="914400">
               <a:lnSpc>
-                <a:spcPts val="2401"/>
+                <a:spcPts val="2081"/>
               </a:lnSpc>
               <a:tabLst>
                 <a:tab pos="0" algn="l"/>
               </a:tabLst>
             </a:pPr>
             <a:r>
-              <a:rPr lang="en-US" sz="2000" b="1" u="none" strike="noStrike">
+              <a:rPr lang="en-US" sz="1600" b="1" u="none" strike="noStrike">
                 <a:solidFill>
                   <a:srgbClr val="121821"/>
                 </a:solidFill>
@@ -11180,9 +11844,21 @@
                 <a:latin typeface="IBM Plex Sans"/>
                 <a:ea typeface="IBM Plex Sans"/>
               </a:rPr>
-              <a:t>Валідація даних</a:t>
+              <a:t>A</a:t>
             </a:r>
-            <a:endParaRPr lang="uk-UA" sz="2000" b="0" u="none" strike="noStrike">
+            <a:r>
+              <a:rPr lang="en-US" sz="1600" b="0" u="none" strike="noStrike">
+                <a:solidFill>
+                  <a:srgbClr val="121821"/>
+                </a:solidFill>
+                <a:effectLst/>
+                <a:uFillTx/>
+                <a:latin typeface="IBM Plex Sans"/>
+                <a:ea typeface="IBM Plex Sans"/>
+              </a:rPr>
+              <a:t> — тривога по всій області: червона</a:t>
+            </a:r>
+            <a:endParaRPr lang="uk-UA" sz="1600" b="0" u="none" strike="noStrike">
               <a:solidFill>
                 <a:srgbClr val="000000"/>
               </a:solidFill>
@@ -11195,19 +11871,23 @@
       </p:sp>
       <p:sp>
         <p:nvSpPr>
-          <p:cNvPr id="105" name="Text 7"/>
+          <p:cNvPr id="98" name="Shape 7"/>
           <p:cNvSpPr/>
           <p:nvPr/>
         </p:nvSpPr>
         <p:spPr>
           <a:xfrm>
-            <a:off x="7016760" y="2576880"/>
-            <a:ext cx="4224960" cy="522720"/>
-          </a:xfrm>
-          <a:prstGeom prst="rect">
-            <a:avLst/>
-          </a:prstGeom>
-          <a:noFill/>
+            <a:off x="4402800" y="3753720"/>
+            <a:ext cx="406080" cy="406080"/>
+          </a:xfrm>
+          <a:prstGeom prst="roundRect">
+            <a:avLst>
+              <a:gd name="adj" fmla="val 12500"/>
+            </a:avLst>
+          </a:prstGeom>
+          <a:solidFill>
+            <a:srgbClr val="E8A33D"/>
+          </a:solidFill>
           <a:ln w="0">
             <a:noFill/>
           </a:ln>
@@ -11219,31 +11899,12 @@
           <a:fontRef idx="minor"/>
         </p:style>
         <p:txBody>
-          <a:bodyPr lIns="0" tIns="0" rIns="0" bIns="0" anchor="t">
-            <a:normAutofit/>
-          </a:bodyPr>
-          <a:p>
-            <a:pPr defTabSz="914400">
-              <a:lnSpc>
-                <a:spcPts val="1959"/>
-              </a:lnSpc>
-              <a:tabLst>
-                <a:tab pos="0" algn="l"/>
-              </a:tabLst>
-            </a:pPr>
-            <a:r>
-              <a:rPr lang="en-US" sz="1400" b="0" u="none" strike="noStrike">
-                <a:solidFill>
-                  <a:srgbClr val="4A5568"/>
-                </a:solidFill>
-                <a:effectLst/>
-                <a:uFillTx/>
-                <a:latin typeface="IBM Plex Sans"/>
-                <a:ea typeface="IBM Plex Sans"/>
-              </a:rPr>
-              <a:t>Неправильна довжина, символ чи JSON — відповідь відхиляється.</a:t>
-            </a:r>
-            <a:endParaRPr lang="uk-UA" sz="1400" b="0" u="none" strike="noStrike">
+          <a:bodyPr lIns="90000" tIns="45000" rIns="90000" bIns="45000" anchor="t">
+            <a:noAutofit/>
+          </a:bodyPr>
+          <a:p>
+            <a:pPr/>
+            <a:endParaRPr lang="uk-UA" sz="1800" b="0" u="none" strike="noStrike">
               <a:solidFill>
                 <a:srgbClr val="000000"/>
               </a:solidFill>
@@ -11256,28 +11917,21 @@
       </p:sp>
       <p:sp>
         <p:nvSpPr>
-          <p:cNvPr id="106" name="Shape 8"/>
+          <p:cNvPr id="99" name="Text 8"/>
           <p:cNvSpPr/>
           <p:nvPr/>
         </p:nvSpPr>
         <p:spPr>
           <a:xfrm>
-            <a:off x="816120" y="3540960"/>
-            <a:ext cx="5175000" cy="1392840"/>
-          </a:xfrm>
-          <a:prstGeom prst="roundRect">
-            <a:avLst>
-              <a:gd name="adj" fmla="val 7066"/>
-            </a:avLst>
-          </a:prstGeom>
-          <a:solidFill>
-            <a:srgbClr val="FFFDF8"/>
-          </a:solidFill>
-          <a:ln w="6350">
-            <a:solidFill>
-              <a:srgbClr val="DDD7CB"/>
-            </a:solidFill>
-            <a:round/>
+            <a:off x="4961520" y="3692880"/>
+            <a:ext cx="2912400" cy="553320"/>
+          </a:xfrm>
+          <a:prstGeom prst="rect">
+            <a:avLst/>
+          </a:prstGeom>
+          <a:noFill/>
+          <a:ln w="0">
+            <a:noFill/>
           </a:ln>
         </p:spPr>
         <p:style>
@@ -11287,12 +11941,43 @@
           <a:fontRef idx="minor"/>
         </p:style>
         <p:txBody>
-          <a:bodyPr lIns="90000" tIns="45000" rIns="90000" bIns="45000" anchor="t">
-            <a:noAutofit/>
-          </a:bodyPr>
-          <a:p>
-            <a:pPr/>
-            <a:endParaRPr lang="uk-UA" sz="1800" b="0" u="none" strike="noStrike">
+          <a:bodyPr lIns="0" tIns="0" rIns="0" bIns="0" anchor="t">
+            <a:normAutofit/>
+          </a:bodyPr>
+          <a:p>
+            <a:pPr defTabSz="914400">
+              <a:lnSpc>
+                <a:spcPts val="2081"/>
+              </a:lnSpc>
+              <a:tabLst>
+                <a:tab pos="0" algn="l"/>
+              </a:tabLst>
+            </a:pPr>
+            <a:r>
+              <a:rPr lang="en-US" sz="1600" b="1" u="none" strike="noStrike">
+                <a:solidFill>
+                  <a:srgbClr val="121821"/>
+                </a:solidFill>
+                <a:effectLst/>
+                <a:uFillTx/>
+                <a:latin typeface="IBM Plex Sans"/>
+                <a:ea typeface="IBM Plex Sans"/>
+              </a:rPr>
+              <a:t>P</a:t>
+            </a:r>
+            <a:r>
+              <a:rPr lang="en-US" sz="1600" b="0" u="none" strike="noStrike">
+                <a:solidFill>
+                  <a:srgbClr val="121821"/>
+                </a:solidFill>
+                <a:effectLst/>
+                <a:uFillTx/>
+                <a:latin typeface="IBM Plex Sans"/>
+                <a:ea typeface="IBM Plex Sans"/>
+              </a:rPr>
+              <a:t> — у частині області: янтарна</a:t>
+            </a:r>
+            <a:endParaRPr lang="uk-UA" sz="1600" b="0" u="none" strike="noStrike">
               <a:solidFill>
                 <a:srgbClr val="000000"/>
               </a:solidFill>
@@ -11303,45 +11988,25 @@
           </a:p>
         </p:txBody>
       </p:sp>
-      <p:pic>
-        <p:nvPicPr>
-          <p:cNvPr id="107" name="Image 2" descr="Globe"/>
-          <p:cNvPicPr/>
-          <p:nvPr/>
-        </p:nvPicPr>
-        <p:blipFill>
-          <a:blip r:embed="rId3"/>
-          <a:stretch/>
-        </p:blipFill>
-        <p:spPr>
-          <a:xfrm>
-            <a:off x="1073160" y="3798360"/>
-            <a:ext cx="355320" cy="355320"/>
-          </a:xfrm>
-          <a:prstGeom prst="rect">
-            <a:avLst/>
-          </a:prstGeom>
-          <a:noFill/>
-          <a:ln w="0">
-            <a:noFill/>
-          </a:ln>
-        </p:spPr>
-      </p:pic>
-      <p:sp>
-        <p:nvSpPr>
-          <p:cNvPr id="108" name="Text 9"/>
+      <p:sp>
+        <p:nvSpPr>
+          <p:cNvPr id="100" name="Shape 9"/>
           <p:cNvSpPr/>
           <p:nvPr/>
         </p:nvSpPr>
         <p:spPr>
           <a:xfrm>
-            <a:off x="1631880" y="3798360"/>
-            <a:ext cx="4224960" cy="329760"/>
-          </a:xfrm>
-          <a:prstGeom prst="rect">
-            <a:avLst/>
-          </a:prstGeom>
-          <a:noFill/>
+            <a:off x="7992720" y="3632040"/>
+            <a:ext cx="487080" cy="649800"/>
+          </a:xfrm>
+          <a:prstGeom prst="roundRect">
+            <a:avLst>
+              <a:gd name="adj" fmla="val 10423"/>
+            </a:avLst>
+          </a:prstGeom>
+          <a:solidFill>
+            <a:srgbClr val="121821"/>
+          </a:solidFill>
           <a:ln w="0">
             <a:noFill/>
           </a:ln>
@@ -11353,51 +12018,32 @@
           <a:fontRef idx="minor"/>
         </p:style>
         <p:txBody>
-          <a:bodyPr lIns="0" tIns="0" rIns="0" bIns="0" anchor="t">
-            <a:normAutofit/>
-          </a:bodyPr>
-          <a:p>
-            <a:pPr defTabSz="914400">
-              <a:lnSpc>
-                <a:spcPts val="2401"/>
-              </a:lnSpc>
-              <a:tabLst>
-                <a:tab pos="0" algn="l"/>
-              </a:tabLst>
-            </a:pPr>
-            <a:r>
-              <a:rPr lang="en-US" sz="2000" b="1" u="none" strike="noStrike">
-                <a:solidFill>
-                  <a:srgbClr val="121821"/>
-                </a:solidFill>
-                <a:effectLst/>
-                <a:uFillTx/>
-                <a:latin typeface="IBM Plex Sans"/>
-                <a:ea typeface="IBM Plex Sans"/>
-              </a:rPr>
-              <a:t>Мережа</a:t>
-            </a:r>
-            <a:endParaRPr lang="uk-UA" sz="2000" b="0" u="none" strike="noStrike">
-              <a:solidFill>
-                <a:srgbClr val="000000"/>
-              </a:solidFill>
-              <a:effectLst/>
-              <a:uFillTx/>
-              <a:latin typeface="Arial"/>
-            </a:endParaRPr>
-          </a:p>
-        </p:txBody>
-      </p:sp>
-      <p:sp>
-        <p:nvSpPr>
-          <p:cNvPr id="109" name="Text 10"/>
+          <a:bodyPr lIns="90000" tIns="45000" rIns="90000" bIns="45000" anchor="t">
+            <a:noAutofit/>
+          </a:bodyPr>
+          <a:p>
+            <a:pPr/>
+            <a:endParaRPr lang="uk-UA" sz="1800" b="0" u="none" strike="noStrike">
+              <a:solidFill>
+                <a:srgbClr val="FFFFFF"/>
+              </a:solidFill>
+              <a:effectLst/>
+              <a:uFillTx/>
+              <a:latin typeface="Arial"/>
+            </a:endParaRPr>
+          </a:p>
+        </p:txBody>
+      </p:sp>
+      <p:sp>
+        <p:nvSpPr>
+          <p:cNvPr id="101" name="Text 10"/>
           <p:cNvSpPr/>
           <p:nvPr/>
         </p:nvSpPr>
         <p:spPr>
           <a:xfrm>
-            <a:off x="1631880" y="4179240"/>
-            <a:ext cx="4224960" cy="522720"/>
+            <a:off x="8094240" y="3708360"/>
+            <a:ext cx="334440" cy="522720"/>
           </a:xfrm>
           <a:prstGeom prst="rect">
             <a:avLst/>
@@ -11427,16 +12073,16 @@
               </a:tabLst>
             </a:pPr>
             <a:r>
-              <a:rPr lang="en-US" sz="1400" b="0" u="none" strike="noStrike">
-                <a:solidFill>
-                  <a:srgbClr val="4A5568"/>
-                </a:solidFill>
-                <a:effectLst/>
-                <a:uFillTx/>
-                <a:latin typeface="IBM Plex Sans"/>
-                <a:ea typeface="IBM Plex Sans"/>
-              </a:rPr>
-              <a:t>Перепідключення із затримкою від 2 до 60 с, далі — режим налаштування.</a:t>
+              <a:rPr lang="en-US" sz="1400" b="1" u="none" strike="noStrike">
+                <a:solidFill>
+                  <a:srgbClr val="E0483E"/>
+                </a:solidFill>
+                <a:effectLst/>
+                <a:uFillTx/>
+                <a:latin typeface="JetBrains Mono"/>
+                <a:ea typeface="JetBrains Mono"/>
+              </a:rPr>
+              <a:t>ERR</a:t>
             </a:r>
             <a:endParaRPr lang="uk-UA" sz="1400" b="0" u="none" strike="noStrike">
               <a:solidFill>
@@ -11451,28 +12097,21 @@
       </p:sp>
       <p:sp>
         <p:nvSpPr>
-          <p:cNvPr id="110" name="Shape 11"/>
+          <p:cNvPr id="102" name="Text 11"/>
           <p:cNvSpPr/>
           <p:nvPr/>
         </p:nvSpPr>
         <p:spPr>
           <a:xfrm>
-            <a:off x="6200640" y="3540960"/>
-            <a:ext cx="5175000" cy="1392840"/>
-          </a:xfrm>
-          <a:prstGeom prst="roundRect">
-            <a:avLst>
-              <a:gd name="adj" fmla="val 7066"/>
-            </a:avLst>
-          </a:prstGeom>
-          <a:solidFill>
-            <a:srgbClr val="FFFDF8"/>
-          </a:solidFill>
-          <a:ln w="6350">
-            <a:solidFill>
-              <a:srgbClr val="DDD7CB"/>
-            </a:solidFill>
-            <a:round/>
+            <a:off x="8632440" y="3692880"/>
+            <a:ext cx="2828880" cy="553320"/>
+          </a:xfrm>
+          <a:prstGeom prst="rect">
+            <a:avLst/>
+          </a:prstGeom>
+          <a:noFill/>
+          <a:ln w="0">
+            <a:noFill/>
           </a:ln>
         </p:spPr>
         <p:style>
@@ -11482,86 +12121,20 @@
           <a:fontRef idx="minor"/>
         </p:style>
         <p:txBody>
-          <a:bodyPr lIns="90000" tIns="45000" rIns="90000" bIns="45000" anchor="t">
-            <a:noAutofit/>
-          </a:bodyPr>
-          <a:p>
-            <a:pPr/>
-            <a:endParaRPr lang="uk-UA" sz="1800" b="0" u="none" strike="noStrike">
-              <a:solidFill>
-                <a:srgbClr val="000000"/>
-              </a:solidFill>
-              <a:effectLst/>
-              <a:uFillTx/>
-              <a:latin typeface="Arial"/>
-            </a:endParaRPr>
-          </a:p>
-        </p:txBody>
-      </p:sp>
-      <p:pic>
-        <p:nvPicPr>
-          <p:cNvPr id="111" name="Image 3" descr="Lock"/>
-          <p:cNvPicPr/>
-          <p:nvPr/>
-        </p:nvPicPr>
-        <p:blipFill>
-          <a:blip r:embed="rId4"/>
-          <a:stretch/>
-        </p:blipFill>
-        <p:spPr>
-          <a:xfrm>
-            <a:off x="6458040" y="3798360"/>
-            <a:ext cx="355320" cy="355320"/>
-          </a:xfrm>
-          <a:prstGeom prst="rect">
-            <a:avLst/>
-          </a:prstGeom>
-          <a:noFill/>
-          <a:ln w="0">
-            <a:noFill/>
-          </a:ln>
-        </p:spPr>
-      </p:pic>
-      <p:sp>
-        <p:nvSpPr>
-          <p:cNvPr id="112" name="Text 12"/>
-          <p:cNvSpPr/>
-          <p:nvPr/>
-        </p:nvSpPr>
-        <p:spPr>
-          <a:xfrm>
-            <a:off x="7016760" y="3798360"/>
-            <a:ext cx="4224960" cy="329760"/>
-          </a:xfrm>
-          <a:prstGeom prst="rect">
-            <a:avLst/>
-          </a:prstGeom>
-          <a:noFill/>
-          <a:ln w="0">
-            <a:noFill/>
-          </a:ln>
-        </p:spPr>
-        <p:style>
-          <a:lnRef idx="0"/>
-          <a:fillRef idx="0"/>
-          <a:effectRef idx="0"/>
-          <a:fontRef idx="minor"/>
-        </p:style>
-        <p:txBody>
           <a:bodyPr lIns="0" tIns="0" rIns="0" bIns="0" anchor="t">
             <a:normAutofit/>
           </a:bodyPr>
           <a:p>
             <a:pPr defTabSz="914400">
               <a:lnSpc>
-                <a:spcPts val="2401"/>
+                <a:spcPts val="2081"/>
               </a:lnSpc>
               <a:tabLst>
                 <a:tab pos="0" algn="l"/>
               </a:tabLst>
             </a:pPr>
             <a:r>
-              <a:rPr lang="en-US" sz="2000" b="1" u="none" strike="noStrike">
+              <a:rPr lang="en-US" sz="1600" b="0" u="none" strike="noStrike">
                 <a:solidFill>
                   <a:srgbClr val="121821"/>
                 </a:solidFill>
@@ -11570,70 +12143,9 @@
                 <a:latin typeface="IBM Plex Sans"/>
                 <a:ea typeface="IBM Plex Sans"/>
               </a:rPr>
-              <a:t>Безпека</a:t>
+              <a:t>помилка — без застарілих даних</a:t>
             </a:r>
-            <a:endParaRPr lang="uk-UA" sz="2000" b="0" u="none" strike="noStrike">
-              <a:solidFill>
-                <a:srgbClr val="000000"/>
-              </a:solidFill>
-              <a:effectLst/>
-              <a:uFillTx/>
-              <a:latin typeface="Arial"/>
-            </a:endParaRPr>
-          </a:p>
-        </p:txBody>
-      </p:sp>
-      <p:sp>
-        <p:nvSpPr>
-          <p:cNvPr id="113" name="Text 13"/>
-          <p:cNvSpPr/>
-          <p:nvPr/>
-        </p:nvSpPr>
-        <p:spPr>
-          <a:xfrm>
-            <a:off x="7016760" y="4179240"/>
-            <a:ext cx="4224960" cy="522720"/>
-          </a:xfrm>
-          <a:prstGeom prst="rect">
-            <a:avLst/>
-          </a:prstGeom>
-          <a:noFill/>
-          <a:ln w="0">
-            <a:noFill/>
-          </a:ln>
-        </p:spPr>
-        <p:style>
-          <a:lnRef idx="0"/>
-          <a:fillRef idx="0"/>
-          <a:effectRef idx="0"/>
-          <a:fontRef idx="minor"/>
-        </p:style>
-        <p:txBody>
-          <a:bodyPr lIns="0" tIns="0" rIns="0" bIns="0" anchor="t">
-            <a:normAutofit/>
-          </a:bodyPr>
-          <a:p>
-            <a:pPr defTabSz="914400">
-              <a:lnSpc>
-                <a:spcPts val="1959"/>
-              </a:lnSpc>
-              <a:tabLst>
-                <a:tab pos="0" algn="l"/>
-              </a:tabLst>
-            </a:pPr>
-            <a:r>
-              <a:rPr lang="en-US" sz="1400" b="0" u="none" strike="noStrike">
-                <a:solidFill>
-                  <a:srgbClr val="4A5568"/>
-                </a:solidFill>
-                <a:effectLst/>
-                <a:uFillTx/>
-                <a:latin typeface="IBM Plex Sans"/>
-                <a:ea typeface="IBM Plex Sans"/>
-              </a:rPr>
-              <a:t>TLS з перевіркою сертифіката; токен у файлі .env, поза git.</a:t>
-            </a:r>
-            <a:endParaRPr lang="uk-UA" sz="1400" b="0" u="none" strike="noStrike">
+            <a:endParaRPr lang="uk-UA" sz="1600" b="0" u="none" strike="noStrike">
               <a:solidFill>
                 <a:srgbClr val="000000"/>
               </a:solidFill>
@@ -11683,7 +12195,7 @@
       </p:grpSpPr>
       <p:sp>
         <p:nvSpPr>
-          <p:cNvPr id="114" name="Text 0"/>
+          <p:cNvPr id="103" name="Text 0"/>
           <p:cNvSpPr/>
           <p:nvPr/>
         </p:nvSpPr>
@@ -11729,7 +12241,7 @@
                 <a:latin typeface="JetBrains Mono"/>
                 <a:ea typeface="JetBrains Mono"/>
               </a:rPr>
-              <a:t>НАЛАШТУВАННЯ І ЯСКРАВІСТЬ</a:t>
+              <a:t>НАДІЙНІСТЬ</a:t>
             </a:r>
             <a:endParaRPr lang="uk-UA" sz="1200" b="0" u="none" strike="noStrike">
               <a:solidFill>
@@ -11744,7 +12256,7 @@
       </p:sp>
       <p:sp>
         <p:nvSpPr>
-          <p:cNvPr id="115" name="Text 1"/>
+          <p:cNvPr id="104" name="Text 1"/>
           <p:cNvSpPr/>
           <p:nvPr/>
         </p:nvSpPr>
@@ -11790,7 +12302,7 @@
                 <a:latin typeface="IBM Plex Sans"/>
                 <a:ea typeface="IBM Plex Sans"/>
               </a:rPr>
-              <a:t>Без програмування й без перепрошивки</a:t>
+              <a:t>Пристрій не зависає і не бреше</a:t>
             </a:r>
             <a:endParaRPr lang="uk-UA" sz="3600" b="0" u="none" strike="noStrike">
               <a:solidFill>
@@ -11805,18 +12317,18 @@
       </p:sp>
       <p:sp>
         <p:nvSpPr>
-          <p:cNvPr id="116" name="Shape 2"/>
+          <p:cNvPr id="105" name="Shape 2"/>
           <p:cNvSpPr/>
           <p:nvPr/>
         </p:nvSpPr>
         <p:spPr>
           <a:xfrm>
             <a:off x="816120" y="1938600"/>
-            <a:ext cx="5175000" cy="4103280"/>
+            <a:ext cx="5175000" cy="1392840"/>
           </a:xfrm>
           <a:prstGeom prst="roundRect">
             <a:avLst>
-              <a:gd name="adj" fmla="val 2399"/>
+              <a:gd name="adj" fmla="val 7066"/>
             </a:avLst>
           </a:prstGeom>
           <a:solidFill>
@@ -11852,16 +12364,40 @@
           </a:p>
         </p:txBody>
       </p:sp>
-      <p:sp>
-        <p:nvSpPr>
-          <p:cNvPr id="117" name="Text 3"/>
+      <p:pic>
+        <p:nvPicPr>
+          <p:cNvPr id="106" name="Image 0" descr="Activity"/>
+          <p:cNvPicPr/>
+          <p:nvPr/>
+        </p:nvPicPr>
+        <p:blipFill>
+          <a:blip r:embed="rId1"/>
+          <a:stretch/>
+        </p:blipFill>
+        <p:spPr>
+          <a:xfrm>
+            <a:off x="1073160" y="2195640"/>
+            <a:ext cx="355320" cy="355320"/>
+          </a:xfrm>
+          <a:prstGeom prst="rect">
+            <a:avLst/>
+          </a:prstGeom>
+          <a:noFill/>
+          <a:ln w="0">
+            <a:noFill/>
+          </a:ln>
+        </p:spPr>
+      </p:pic>
+      <p:sp>
+        <p:nvSpPr>
+          <p:cNvPr id="107" name="Text 3"/>
           <p:cNvSpPr/>
           <p:nvPr/>
         </p:nvSpPr>
         <p:spPr>
           <a:xfrm>
-            <a:off x="1123920" y="2246400"/>
-            <a:ext cx="4695840" cy="329760"/>
+            <a:off x="1631880" y="2195640"/>
+            <a:ext cx="4224960" cy="329760"/>
           </a:xfrm>
           <a:prstGeom prst="rect">
             <a:avLst/>
@@ -11900,7 +12436,7 @@
                 <a:latin typeface="IBM Plex Sans"/>
                 <a:ea typeface="IBM Plex Sans"/>
               </a:rPr>
-              <a:t>Веб-налаштування</a:t>
+              <a:t>Watchdog-таймер</a:t>
             </a:r>
             <a:endParaRPr lang="uk-UA" sz="2000" b="0" u="none" strike="noStrike">
               <a:solidFill>
@@ -11915,14 +12451,14 @@
       </p:sp>
       <p:sp>
         <p:nvSpPr>
-          <p:cNvPr id="118" name="Text 4"/>
+          <p:cNvPr id="108" name="Text 4"/>
           <p:cNvSpPr/>
           <p:nvPr/>
         </p:nvSpPr>
         <p:spPr>
           <a:xfrm>
-            <a:off x="1123920" y="2703600"/>
-            <a:ext cx="4695840" cy="1244160"/>
+            <a:off x="1631880" y="2576880"/>
+            <a:ext cx="4224960" cy="522720"/>
           </a:xfrm>
           <a:prstGeom prst="rect">
             <a:avLst/>
@@ -11943,175 +12479,16 @@
             <a:normAutofit/>
           </a:bodyPr>
           <a:p>
-            <a:pPr marL="243720" indent="-243720" defTabSz="914400">
-              <a:lnSpc>
-                <a:spcPts val="2401"/>
-              </a:lnSpc>
-              <a:buClr>
-                <a:srgbClr val="4A5568"/>
-              </a:buClr>
-              <a:buFont typeface="OpenSymbol"/>
-              <a:buAutoNum type="arabicPeriod"/>
-            </a:pPr>
-            <a:r>
-              <a:rPr lang="en-US" sz="1600" b="0" u="none" strike="noStrike">
-                <a:solidFill>
-                  <a:srgbClr val="4A5568"/>
-                </a:solidFill>
-                <a:effectLst/>
-                <a:uFillTx/>
-                <a:latin typeface="IBM Plex Sans"/>
-                <a:ea typeface="IBM Plex Sans"/>
-              </a:rPr>
-              <a:t>Утримати кнопку BOOT 3 с</a:t>
-            </a:r>
-            <a:endParaRPr lang="uk-UA" sz="1600" b="0" u="none" strike="noStrike">
-              <a:solidFill>
-                <a:srgbClr val="000000"/>
-              </a:solidFill>
-              <a:effectLst/>
-              <a:uFillTx/>
-              <a:latin typeface="Arial"/>
-            </a:endParaRPr>
-          </a:p>
-          <a:p>
-            <a:pPr marL="243720" indent="-243720" defTabSz="914400">
-              <a:lnSpc>
-                <a:spcPts val="2401"/>
-              </a:lnSpc>
-              <a:buClr>
-                <a:srgbClr val="4A5568"/>
-              </a:buClr>
-              <a:buFont typeface="OpenSymbol"/>
-              <a:buAutoNum type="arabicPeriod"/>
-            </a:pPr>
-            <a:r>
-              <a:rPr lang="en-US" sz="1600" b="0" u="none" strike="noStrike">
-                <a:solidFill>
-                  <a:srgbClr val="4A5568"/>
-                </a:solidFill>
-                <a:effectLst/>
-                <a:uFillTx/>
-                <a:latin typeface="IBM Plex Sans"/>
-                <a:ea typeface="IBM Plex Sans"/>
-              </a:rPr>
-              <a:t>Підключитися до мережі «ESP32-Setup»</a:t>
-            </a:r>
-            <a:endParaRPr lang="uk-UA" sz="1600" b="0" u="none" strike="noStrike">
-              <a:solidFill>
-                <a:srgbClr val="000000"/>
-              </a:solidFill>
-              <a:effectLst/>
-              <a:uFillTx/>
-              <a:latin typeface="Arial"/>
-            </a:endParaRPr>
-          </a:p>
-          <a:p>
-            <a:pPr marL="243720" indent="-243720" defTabSz="914400">
-              <a:lnSpc>
-                <a:spcPts val="2401"/>
-              </a:lnSpc>
-              <a:buClr>
-                <a:srgbClr val="4A5568"/>
-              </a:buClr>
-              <a:buFont typeface="OpenSymbol"/>
-              <a:buAutoNum type="arabicPeriod"/>
-            </a:pPr>
-            <a:r>
-              <a:rPr lang="en-US" sz="1600" b="0" u="none" strike="noStrike">
-                <a:solidFill>
-                  <a:srgbClr val="4A5568"/>
-                </a:solidFill>
-                <a:effectLst/>
-                <a:uFillTx/>
-                <a:latin typeface="IBM Plex Sans"/>
-                <a:ea typeface="IBM Plex Sans"/>
-              </a:rPr>
-              <a:t>Відкрити 192.168.4.1</a:t>
-            </a:r>
-            <a:endParaRPr lang="uk-UA" sz="1600" b="0" u="none" strike="noStrike">
-              <a:solidFill>
-                <a:srgbClr val="000000"/>
-              </a:solidFill>
-              <a:effectLst/>
-              <a:uFillTx/>
-              <a:latin typeface="Arial"/>
-            </a:endParaRPr>
-          </a:p>
-          <a:p>
-            <a:pPr marL="243720" indent="-243720" defTabSz="914400">
-              <a:lnSpc>
-                <a:spcPts val="2401"/>
-              </a:lnSpc>
-              <a:buClr>
-                <a:srgbClr val="4A5568"/>
-              </a:buClr>
-              <a:buFont typeface="OpenSymbol"/>
-              <a:buAutoNum type="arabicPeriod"/>
-            </a:pPr>
-            <a:r>
-              <a:rPr lang="en-US" sz="1600" b="0" u="none" strike="noStrike">
-                <a:solidFill>
-                  <a:srgbClr val="4A5568"/>
-                </a:solidFill>
-                <a:effectLst/>
-                <a:uFillTx/>
-                <a:latin typeface="IBM Plex Sans"/>
-                <a:ea typeface="IBM Plex Sans"/>
-              </a:rPr>
-              <a:t>Вибрати область і Wi-Fi</a:t>
-            </a:r>
-            <a:endParaRPr lang="uk-UA" sz="1600" b="0" u="none" strike="noStrike">
-              <a:solidFill>
-                <a:srgbClr val="000000"/>
-              </a:solidFill>
-              <a:effectLst/>
-              <a:uFillTx/>
-              <a:latin typeface="Arial"/>
-            </a:endParaRPr>
-          </a:p>
-        </p:txBody>
-      </p:sp>
-      <p:sp>
-        <p:nvSpPr>
-          <p:cNvPr id="119" name="Text 5"/>
-          <p:cNvSpPr/>
-          <p:nvPr/>
-        </p:nvSpPr>
-        <p:spPr>
-          <a:xfrm>
-            <a:off x="1123920" y="4075200"/>
-            <a:ext cx="4695840" cy="238320"/>
-          </a:xfrm>
-          <a:prstGeom prst="rect">
-            <a:avLst/>
-          </a:prstGeom>
-          <a:noFill/>
-          <a:ln w="0">
-            <a:noFill/>
-          </a:ln>
-        </p:spPr>
-        <p:style>
-          <a:lnRef idx="0"/>
-          <a:fillRef idx="0"/>
-          <a:effectRef idx="0"/>
-          <a:fontRef idx="minor"/>
-        </p:style>
-        <p:txBody>
-          <a:bodyPr lIns="0" tIns="0" rIns="0" bIns="0" anchor="t">
-            <a:normAutofit/>
-          </a:bodyPr>
-          <a:p>
             <a:pPr defTabSz="914400">
               <a:lnSpc>
-                <a:spcPts val="1681"/>
+                <a:spcPts val="1959"/>
               </a:lnSpc>
               <a:tabLst>
                 <a:tab pos="0" algn="l"/>
               </a:tabLst>
             </a:pPr>
             <a:r>
-              <a:rPr lang="en-US" sz="1200" b="0" u="none" strike="noStrike">
+              <a:rPr lang="en-US" sz="1400" b="0" u="none" strike="noStrike">
                 <a:solidFill>
                   <a:srgbClr val="4A5568"/>
                 </a:solidFill>
@@ -12120,9 +12497,9 @@
                 <a:latin typeface="IBM Plex Sans"/>
                 <a:ea typeface="IBM Plex Sans"/>
               </a:rPr>
-              <a:t>Вибір зберігається в NVS і переживає перезавантаження.</a:t>
+              <a:t>Кожна задача під наглядом; зависання — автоматичне перезавантаження.</a:t>
             </a:r>
-            <a:endParaRPr lang="uk-UA" sz="1200" b="0" u="none" strike="noStrike">
+            <a:endParaRPr lang="uk-UA" sz="1400" b="0" u="none" strike="noStrike">
               <a:solidFill>
                 <a:srgbClr val="000000"/>
               </a:solidFill>
@@ -12135,18 +12512,18 @@
       </p:sp>
       <p:sp>
         <p:nvSpPr>
-          <p:cNvPr id="120" name="Shape 6"/>
+          <p:cNvPr id="109" name="Shape 5"/>
           <p:cNvSpPr/>
           <p:nvPr/>
         </p:nvSpPr>
         <p:spPr>
           <a:xfrm>
             <a:off x="6200640" y="1938600"/>
-            <a:ext cx="5175000" cy="4103280"/>
+            <a:ext cx="5175000" cy="1392840"/>
           </a:xfrm>
           <a:prstGeom prst="roundRect">
             <a:avLst>
-              <a:gd name="adj" fmla="val 2399"/>
+              <a:gd name="adj" fmla="val 7066"/>
             </a:avLst>
           </a:prstGeom>
           <a:solidFill>
@@ -12182,16 +12559,40 @@
           </a:p>
         </p:txBody>
       </p:sp>
-      <p:sp>
-        <p:nvSpPr>
-          <p:cNvPr id="121" name="Text 7"/>
+      <p:pic>
+        <p:nvPicPr>
+          <p:cNvPr id="110" name="Image 1" descr="CheckCircle"/>
+          <p:cNvPicPr/>
+          <p:nvPr/>
+        </p:nvPicPr>
+        <p:blipFill>
+          <a:blip r:embed="rId2"/>
+          <a:stretch/>
+        </p:blipFill>
+        <p:spPr>
+          <a:xfrm>
+            <a:off x="6458040" y="2195640"/>
+            <a:ext cx="355320" cy="355320"/>
+          </a:xfrm>
+          <a:prstGeom prst="rect">
+            <a:avLst/>
+          </a:prstGeom>
+          <a:noFill/>
+          <a:ln w="0">
+            <a:noFill/>
+          </a:ln>
+        </p:spPr>
+      </p:pic>
+      <p:sp>
+        <p:nvSpPr>
+          <p:cNvPr id="111" name="Text 6"/>
           <p:cNvSpPr/>
           <p:nvPr/>
         </p:nvSpPr>
         <p:spPr>
           <a:xfrm>
-            <a:off x="6508800" y="2246400"/>
-            <a:ext cx="4695840" cy="329760"/>
+            <a:off x="7016760" y="2195640"/>
+            <a:ext cx="4224960" cy="329760"/>
           </a:xfrm>
           <a:prstGeom prst="rect">
             <a:avLst/>
@@ -12230,7 +12631,7 @@
                 <a:latin typeface="IBM Plex Sans"/>
                 <a:ea typeface="IBM Plex Sans"/>
               </a:rPr>
-              <a:t>Адаптивна яскравість</a:t>
+              <a:t>Валідація даних</a:t>
             </a:r>
             <a:endParaRPr lang="uk-UA" sz="2000" b="0" u="none" strike="noStrike">
               <a:solidFill>
@@ -12245,14 +12646,14 @@
       </p:sp>
       <p:sp>
         <p:nvSpPr>
-          <p:cNvPr id="122" name="Text 8"/>
+          <p:cNvPr id="112" name="Text 7"/>
           <p:cNvSpPr/>
           <p:nvPr/>
         </p:nvSpPr>
         <p:spPr>
           <a:xfrm>
-            <a:off x="6508800" y="2703600"/>
-            <a:ext cx="4695840" cy="594000"/>
+            <a:off x="7016760" y="2576880"/>
+            <a:ext cx="4224960" cy="522720"/>
           </a:xfrm>
           <a:prstGeom prst="rect">
             <a:avLst/>
@@ -12275,14 +12676,14 @@
           <a:p>
             <a:pPr defTabSz="914400">
               <a:lnSpc>
-                <a:spcPts val="2239"/>
+                <a:spcPts val="1959"/>
               </a:lnSpc>
               <a:tabLst>
                 <a:tab pos="0" algn="l"/>
               </a:tabLst>
             </a:pPr>
             <a:r>
-              <a:rPr lang="en-US" sz="1600" b="0" u="none" strike="noStrike">
+              <a:rPr lang="en-US" sz="1400" b="0" u="none" strike="noStrike">
                 <a:solidFill>
                   <a:srgbClr val="4A5568"/>
                 </a:solidFill>
@@ -12291,9 +12692,9 @@
                 <a:latin typeface="IBM Plex Sans"/>
                 <a:ea typeface="IBM Plex Sans"/>
               </a:rPr>
-              <a:t>ПІ-регулятор з anti-windup плавно підлаштовує підсвітку під освітлення в кімнаті.</a:t>
+              <a:t>Неправильна довжина, символ чи JSON — відповідь відхиляється.</a:t>
             </a:r>
-            <a:endParaRPr lang="uk-UA" sz="1600" b="0" u="none" strike="noStrike">
+            <a:endParaRPr lang="uk-UA" sz="1400" b="0" u="none" strike="noStrike">
               <a:solidFill>
                 <a:srgbClr val="000000"/>
               </a:solidFill>
@@ -12306,25 +12707,28 @@
       </p:sp>
       <p:sp>
         <p:nvSpPr>
-          <p:cNvPr id="123" name="Shape 9"/>
+          <p:cNvPr id="113" name="Shape 8"/>
           <p:cNvSpPr/>
           <p:nvPr/>
         </p:nvSpPr>
         <p:spPr>
           <a:xfrm>
-            <a:off x="6508800" y="3425040"/>
-            <a:ext cx="4559040" cy="466920"/>
+            <a:off x="816120" y="3540960"/>
+            <a:ext cx="5175000" cy="1392840"/>
           </a:xfrm>
           <a:prstGeom prst="roundRect">
             <a:avLst>
-              <a:gd name="adj" fmla="val 10870"/>
+              <a:gd name="adj" fmla="val 7066"/>
             </a:avLst>
           </a:prstGeom>
           <a:solidFill>
-            <a:srgbClr val="EAE5DA"/>
+            <a:srgbClr val="FFFDF8"/>
           </a:solidFill>
-          <a:ln w="0">
-            <a:noFill/>
+          <a:ln w="6350">
+            <a:solidFill>
+              <a:srgbClr val="DDD7CB"/>
+            </a:solidFill>
+            <a:round/>
           </a:ln>
         </p:spPr>
         <p:style>
@@ -12350,16 +12754,40 @@
           </a:p>
         </p:txBody>
       </p:sp>
-      <p:sp>
-        <p:nvSpPr>
-          <p:cNvPr id="124" name="Text 10"/>
+      <p:pic>
+        <p:nvPicPr>
+          <p:cNvPr id="114" name="Image 2" descr="Globe"/>
+          <p:cNvPicPr/>
+          <p:nvPr/>
+        </p:nvPicPr>
+        <p:blipFill>
+          <a:blip r:embed="rId3"/>
+          <a:stretch/>
+        </p:blipFill>
+        <p:spPr>
+          <a:xfrm>
+            <a:off x="1073160" y="3798360"/>
+            <a:ext cx="355320" cy="355320"/>
+          </a:xfrm>
+          <a:prstGeom prst="rect">
+            <a:avLst/>
+          </a:prstGeom>
+          <a:noFill/>
+          <a:ln w="0">
+            <a:noFill/>
+          </a:ln>
+        </p:spPr>
+      </p:pic>
+      <p:sp>
+        <p:nvSpPr>
+          <p:cNvPr id="115" name="Text 9"/>
           <p:cNvSpPr/>
           <p:nvPr/>
         </p:nvSpPr>
         <p:spPr>
           <a:xfrm>
-            <a:off x="6635880" y="3552120"/>
-            <a:ext cx="4434120" cy="238320"/>
+            <a:off x="1631880" y="3798360"/>
+            <a:ext cx="4224960" cy="329760"/>
           </a:xfrm>
           <a:prstGeom prst="rect">
             <a:avLst/>
@@ -12382,25 +12810,25 @@
           <a:p>
             <a:pPr defTabSz="914400">
               <a:lnSpc>
-                <a:spcPts val="1681"/>
+                <a:spcPts val="2401"/>
               </a:lnSpc>
               <a:tabLst>
                 <a:tab pos="0" algn="l"/>
               </a:tabLst>
             </a:pPr>
             <a:r>
-              <a:rPr lang="en-US" sz="1200" b="0" u="none" strike="noStrike">
+              <a:rPr lang="en-US" sz="2000" b="1" u="none" strike="noStrike">
                 <a:solidFill>
                   <a:srgbClr val="121821"/>
                 </a:solidFill>
                 <a:effectLst/>
                 <a:uFillTx/>
-                <a:latin typeface="JetBrains Mono"/>
-                <a:ea typeface="JetBrains Mono"/>
-              </a:rPr>
-              <a:t>setpoint = min + lux · (max − min)</a:t>
+                <a:latin typeface="IBM Plex Sans"/>
+                <a:ea typeface="IBM Plex Sans"/>
+              </a:rPr>
+              <a:t>Мережа</a:t>
             </a:r>
-            <a:endParaRPr lang="uk-UA" sz="1200" b="0" u="none" strike="noStrike">
+            <a:endParaRPr lang="uk-UA" sz="2000" b="0" u="none" strike="noStrike">
               <a:solidFill>
                 <a:srgbClr val="000000"/>
               </a:solidFill>
@@ -12413,14 +12841,14 @@
       </p:sp>
       <p:sp>
         <p:nvSpPr>
-          <p:cNvPr id="125" name="Text 11"/>
+          <p:cNvPr id="116" name="Text 10"/>
           <p:cNvSpPr/>
           <p:nvPr/>
         </p:nvSpPr>
         <p:spPr>
           <a:xfrm>
-            <a:off x="6508800" y="4044600"/>
-            <a:ext cx="4695840" cy="238320"/>
+            <a:off x="1631880" y="4179240"/>
+            <a:ext cx="4224960" cy="522720"/>
           </a:xfrm>
           <a:prstGeom prst="rect">
             <a:avLst/>
@@ -12443,14 +12871,14 @@
           <a:p>
             <a:pPr defTabSz="914400">
               <a:lnSpc>
-                <a:spcPts val="1681"/>
+                <a:spcPts val="1959"/>
               </a:lnSpc>
               <a:tabLst>
                 <a:tab pos="0" algn="l"/>
               </a:tabLst>
             </a:pPr>
             <a:r>
-              <a:rPr lang="en-US" sz="1200" b="0" u="none" strike="noStrike">
+              <a:rPr lang="en-US" sz="1400" b="0" u="none" strike="noStrike">
                 <a:solidFill>
                   <a:srgbClr val="4A5568"/>
                 </a:solidFill>
@@ -12459,9 +12887,204 @@
                 <a:latin typeface="IBM Plex Sans"/>
                 <a:ea typeface="IBM Plex Sans"/>
               </a:rPr>
-              <a:t>Вночі дисплей не сліпить, удень його добре видно.</a:t>
+              <a:t>Перепідключення із затримкою від 2 до 60 с, далі — режим налаштування.</a:t>
             </a:r>
-            <a:endParaRPr lang="uk-UA" sz="1200" b="0" u="none" strike="noStrike">
+            <a:endParaRPr lang="uk-UA" sz="1400" b="0" u="none" strike="noStrike">
+              <a:solidFill>
+                <a:srgbClr val="000000"/>
+              </a:solidFill>
+              <a:effectLst/>
+              <a:uFillTx/>
+              <a:latin typeface="Arial"/>
+            </a:endParaRPr>
+          </a:p>
+        </p:txBody>
+      </p:sp>
+      <p:sp>
+        <p:nvSpPr>
+          <p:cNvPr id="117" name="Shape 11"/>
+          <p:cNvSpPr/>
+          <p:nvPr/>
+        </p:nvSpPr>
+        <p:spPr>
+          <a:xfrm>
+            <a:off x="6200640" y="3540960"/>
+            <a:ext cx="5175000" cy="1392840"/>
+          </a:xfrm>
+          <a:prstGeom prst="roundRect">
+            <a:avLst>
+              <a:gd name="adj" fmla="val 7066"/>
+            </a:avLst>
+          </a:prstGeom>
+          <a:solidFill>
+            <a:srgbClr val="FFFDF8"/>
+          </a:solidFill>
+          <a:ln w="6350">
+            <a:solidFill>
+              <a:srgbClr val="DDD7CB"/>
+            </a:solidFill>
+            <a:round/>
+          </a:ln>
+        </p:spPr>
+        <p:style>
+          <a:lnRef idx="0"/>
+          <a:fillRef idx="0"/>
+          <a:effectRef idx="0"/>
+          <a:fontRef idx="minor"/>
+        </p:style>
+        <p:txBody>
+          <a:bodyPr lIns="90000" tIns="45000" rIns="90000" bIns="45000" anchor="t">
+            <a:noAutofit/>
+          </a:bodyPr>
+          <a:p>
+            <a:pPr/>
+            <a:endParaRPr lang="uk-UA" sz="1800" b="0" u="none" strike="noStrike">
+              <a:solidFill>
+                <a:srgbClr val="000000"/>
+              </a:solidFill>
+              <a:effectLst/>
+              <a:uFillTx/>
+              <a:latin typeface="Arial"/>
+            </a:endParaRPr>
+          </a:p>
+        </p:txBody>
+      </p:sp>
+      <p:pic>
+        <p:nvPicPr>
+          <p:cNvPr id="118" name="Image 3" descr="Lock"/>
+          <p:cNvPicPr/>
+          <p:nvPr/>
+        </p:nvPicPr>
+        <p:blipFill>
+          <a:blip r:embed="rId4"/>
+          <a:stretch/>
+        </p:blipFill>
+        <p:spPr>
+          <a:xfrm>
+            <a:off x="6458040" y="3798360"/>
+            <a:ext cx="355320" cy="355320"/>
+          </a:xfrm>
+          <a:prstGeom prst="rect">
+            <a:avLst/>
+          </a:prstGeom>
+          <a:noFill/>
+          <a:ln w="0">
+            <a:noFill/>
+          </a:ln>
+        </p:spPr>
+      </p:pic>
+      <p:sp>
+        <p:nvSpPr>
+          <p:cNvPr id="119" name="Text 12"/>
+          <p:cNvSpPr/>
+          <p:nvPr/>
+        </p:nvSpPr>
+        <p:spPr>
+          <a:xfrm>
+            <a:off x="7016760" y="3798360"/>
+            <a:ext cx="4224960" cy="329760"/>
+          </a:xfrm>
+          <a:prstGeom prst="rect">
+            <a:avLst/>
+          </a:prstGeom>
+          <a:noFill/>
+          <a:ln w="0">
+            <a:noFill/>
+          </a:ln>
+        </p:spPr>
+        <p:style>
+          <a:lnRef idx="0"/>
+          <a:fillRef idx="0"/>
+          <a:effectRef idx="0"/>
+          <a:fontRef idx="minor"/>
+        </p:style>
+        <p:txBody>
+          <a:bodyPr lIns="0" tIns="0" rIns="0" bIns="0" anchor="t">
+            <a:normAutofit/>
+          </a:bodyPr>
+          <a:p>
+            <a:pPr defTabSz="914400">
+              <a:lnSpc>
+                <a:spcPts val="2401"/>
+              </a:lnSpc>
+              <a:tabLst>
+                <a:tab pos="0" algn="l"/>
+              </a:tabLst>
+            </a:pPr>
+            <a:r>
+              <a:rPr lang="en-US" sz="2000" b="1" u="none" strike="noStrike">
+                <a:solidFill>
+                  <a:srgbClr val="121821"/>
+                </a:solidFill>
+                <a:effectLst/>
+                <a:uFillTx/>
+                <a:latin typeface="IBM Plex Sans"/>
+                <a:ea typeface="IBM Plex Sans"/>
+              </a:rPr>
+              <a:t>Безпека</a:t>
+            </a:r>
+            <a:endParaRPr lang="uk-UA" sz="2000" b="0" u="none" strike="noStrike">
+              <a:solidFill>
+                <a:srgbClr val="000000"/>
+              </a:solidFill>
+              <a:effectLst/>
+              <a:uFillTx/>
+              <a:latin typeface="Arial"/>
+            </a:endParaRPr>
+          </a:p>
+        </p:txBody>
+      </p:sp>
+      <p:sp>
+        <p:nvSpPr>
+          <p:cNvPr id="120" name="Text 13"/>
+          <p:cNvSpPr/>
+          <p:nvPr/>
+        </p:nvSpPr>
+        <p:spPr>
+          <a:xfrm>
+            <a:off x="7016760" y="4179240"/>
+            <a:ext cx="4224960" cy="522720"/>
+          </a:xfrm>
+          <a:prstGeom prst="rect">
+            <a:avLst/>
+          </a:prstGeom>
+          <a:noFill/>
+          <a:ln w="0">
+            <a:noFill/>
+          </a:ln>
+        </p:spPr>
+        <p:style>
+          <a:lnRef idx="0"/>
+          <a:fillRef idx="0"/>
+          <a:effectRef idx="0"/>
+          <a:fontRef idx="minor"/>
+        </p:style>
+        <p:txBody>
+          <a:bodyPr lIns="0" tIns="0" rIns="0" bIns="0" anchor="t">
+            <a:normAutofit/>
+          </a:bodyPr>
+          <a:p>
+            <a:pPr defTabSz="914400">
+              <a:lnSpc>
+                <a:spcPts val="1959"/>
+              </a:lnSpc>
+              <a:tabLst>
+                <a:tab pos="0" algn="l"/>
+              </a:tabLst>
+            </a:pPr>
+            <a:r>
+              <a:rPr lang="en-US" sz="1400" b="0" u="none" strike="noStrike">
+                <a:solidFill>
+                  <a:srgbClr val="4A5568"/>
+                </a:solidFill>
+                <a:effectLst/>
+                <a:uFillTx/>
+                <a:latin typeface="IBM Plex Sans"/>
+                <a:ea typeface="IBM Plex Sans"/>
+              </a:rPr>
+              <a:t>TLS з перевіркою сертифіката; токен у файлі .env, поза git.</a:t>
+            </a:r>
+            <a:endParaRPr lang="uk-UA" sz="1400" b="0" u="none" strike="noStrike">
               <a:solidFill>
                 <a:srgbClr val="000000"/>
               </a:solidFill>
@@ -12491,7 +13114,7 @@
     <p:bg>
       <p:bgPr>
         <a:solidFill>
-          <a:srgbClr val="121821"/>
+          <a:srgbClr val="F5F2EC"/>
         </a:solidFill>
       </p:bgPr>
     </p:bg>
@@ -12511,7 +13134,7 @@
       </p:grpSpPr>
       <p:sp>
         <p:nvSpPr>
-          <p:cNvPr id="126" name="Text 0"/>
+          <p:cNvPr id="121" name="Text 0"/>
           <p:cNvSpPr/>
           <p:nvPr/>
         </p:nvSpPr>
@@ -12550,29 +13173,29 @@
             <a:r>
               <a:rPr lang="en-US" sz="1200" b="0" u="none" spc="99" strike="noStrike">
                 <a:solidFill>
-                  <a:srgbClr val="E8A33D"/>
+                  <a:srgbClr val="B8322B"/>
                 </a:solidFill>
                 <a:effectLst/>
                 <a:uFillTx/>
                 <a:latin typeface="JetBrains Mono"/>
                 <a:ea typeface="JetBrains Mono"/>
               </a:rPr>
-              <a:t>ТЕСТУВАННЯ</a:t>
+              <a:t>НАЛАШТУВАННЯ І ЯСКРАВІСТЬ</a:t>
             </a:r>
             <a:endParaRPr lang="uk-UA" sz="1200" b="0" u="none" strike="noStrike">
               <a:solidFill>
-                <a:srgbClr val="FFFFFF"/>
-              </a:solidFill>
-              <a:effectLst/>
-              <a:uFillTx/>
-              <a:latin typeface="Arial"/>
-            </a:endParaRPr>
-          </a:p>
-        </p:txBody>
-      </p:sp>
-      <p:sp>
-        <p:nvSpPr>
-          <p:cNvPr id="127" name="Text 1"/>
+                <a:srgbClr val="000000"/>
+              </a:solidFill>
+              <a:effectLst/>
+              <a:uFillTx/>
+              <a:latin typeface="Arial"/>
+            </a:endParaRPr>
+          </a:p>
+        </p:txBody>
+      </p:sp>
+      <p:sp>
+        <p:nvSpPr>
+          <p:cNvPr id="122" name="Text 1"/>
           <p:cNvSpPr/>
           <p:nvPr/>
         </p:nvSpPr>
@@ -12611,43 +13234,48 @@
             <a:r>
               <a:rPr lang="en-US" sz="3600" b="1" u="none" strike="noStrike">
                 <a:solidFill>
-                  <a:srgbClr val="F5F2EC"/>
+                  <a:srgbClr val="121821"/>
                 </a:solidFill>
                 <a:effectLst/>
                 <a:uFillTx/>
                 <a:latin typeface="IBM Plex Sans"/>
                 <a:ea typeface="IBM Plex Sans"/>
               </a:rPr>
-              <a:t>Ключова логіка покрита тестами Unity</a:t>
+              <a:t>Без програмування й без перепрошивки</a:t>
             </a:r>
             <a:endParaRPr lang="uk-UA" sz="3600" b="0" u="none" strike="noStrike">
               <a:solidFill>
-                <a:srgbClr val="FFFFFF"/>
-              </a:solidFill>
-              <a:effectLst/>
-              <a:uFillTx/>
-              <a:latin typeface="Arial"/>
-            </a:endParaRPr>
-          </a:p>
-        </p:txBody>
-      </p:sp>
-      <p:sp>
-        <p:nvSpPr>
-          <p:cNvPr id="128" name="Shape 2"/>
+                <a:srgbClr val="000000"/>
+              </a:solidFill>
+              <a:effectLst/>
+              <a:uFillTx/>
+              <a:latin typeface="Arial"/>
+            </a:endParaRPr>
+          </a:p>
+        </p:txBody>
+      </p:sp>
+      <p:sp>
+        <p:nvSpPr>
+          <p:cNvPr id="123" name="Shape 2"/>
           <p:cNvSpPr/>
           <p:nvPr/>
         </p:nvSpPr>
         <p:spPr>
           <a:xfrm>
-            <a:off x="812520" y="1998720"/>
-            <a:ext cx="3386880" cy="360"/>
-          </a:xfrm>
-          <a:prstGeom prst="line">
-            <a:avLst/>
-          </a:prstGeom>
-          <a:ln w="25400">
+            <a:off x="816120" y="1938600"/>
+            <a:ext cx="5175000" cy="4103280"/>
+          </a:xfrm>
+          <a:prstGeom prst="roundRect">
+            <a:avLst>
+              <a:gd name="adj" fmla="val 2399"/>
+            </a:avLst>
+          </a:prstGeom>
+          <a:solidFill>
+            <a:srgbClr val="FFFDF8"/>
+          </a:solidFill>
+          <a:ln w="6350">
             <a:solidFill>
-              <a:srgbClr val="E8A33D"/>
+              <a:srgbClr val="DDD7CB"/>
             </a:solidFill>
             <a:round/>
           </a:ln>
@@ -12659,32 +13287,32 @@
           <a:fontRef idx="minor"/>
         </p:style>
         <p:txBody>
-          <a:bodyPr lIns="90000" tIns="-44640" rIns="90000" bIns="-44640" anchor="t" anchorCtr="1">
+          <a:bodyPr lIns="90000" tIns="45000" rIns="90000" bIns="45000" anchor="t">
             <a:noAutofit/>
           </a:bodyPr>
           <a:p>
             <a:pPr/>
             <a:endParaRPr lang="uk-UA" sz="1800" b="0" u="none" strike="noStrike">
               <a:solidFill>
-                <a:srgbClr val="FFFFFF"/>
-              </a:solidFill>
-              <a:effectLst/>
-              <a:uFillTx/>
-              <a:latin typeface="Arial"/>
-            </a:endParaRPr>
-          </a:p>
-        </p:txBody>
-      </p:sp>
-      <p:sp>
-        <p:nvSpPr>
-          <p:cNvPr id="129" name="Text 3"/>
+                <a:srgbClr val="000000"/>
+              </a:solidFill>
+              <a:effectLst/>
+              <a:uFillTx/>
+              <a:latin typeface="Arial"/>
+            </a:endParaRPr>
+          </a:p>
+        </p:txBody>
+      </p:sp>
+      <p:sp>
+        <p:nvSpPr>
+          <p:cNvPr id="124" name="Text 3"/>
           <p:cNvSpPr/>
           <p:nvPr/>
         </p:nvSpPr>
         <p:spPr>
           <a:xfrm>
-            <a:off x="812880" y="2214720"/>
-            <a:ext cx="3488040" cy="1041120"/>
+            <a:off x="1123920" y="2246400"/>
+            <a:ext cx="4695840" cy="329760"/>
           </a:xfrm>
           <a:prstGeom prst="rect">
             <a:avLst/>
@@ -12707,45 +13335,45 @@
           <a:p>
             <a:pPr defTabSz="914400">
               <a:lnSpc>
-                <a:spcPts val="7999"/>
+                <a:spcPts val="2401"/>
               </a:lnSpc>
               <a:tabLst>
                 <a:tab pos="0" algn="l"/>
               </a:tabLst>
             </a:pPr>
             <a:r>
-              <a:rPr lang="en-US" sz="8000" b="1" u="none" strike="noStrike">
-                <a:solidFill>
-                  <a:srgbClr val="E8A33D"/>
+              <a:rPr lang="en-US" sz="2000" b="1" u="none" strike="noStrike">
+                <a:solidFill>
+                  <a:srgbClr val="121821"/>
                 </a:solidFill>
                 <a:effectLst/>
                 <a:uFillTx/>
                 <a:latin typeface="IBM Plex Sans"/>
                 <a:ea typeface="IBM Plex Sans"/>
               </a:rPr>
-              <a:t>16</a:t>
+              <a:t>Веб-налаштування</a:t>
             </a:r>
-            <a:endParaRPr lang="uk-UA" sz="8000" b="0" u="none" strike="noStrike">
-              <a:solidFill>
-                <a:srgbClr val="FFFFFF"/>
-              </a:solidFill>
-              <a:effectLst/>
-              <a:uFillTx/>
-              <a:latin typeface="Arial"/>
-            </a:endParaRPr>
-          </a:p>
-        </p:txBody>
-      </p:sp>
-      <p:sp>
-        <p:nvSpPr>
-          <p:cNvPr id="130" name="Text 4"/>
+            <a:endParaRPr lang="uk-UA" sz="2000" b="0" u="none" strike="noStrike">
+              <a:solidFill>
+                <a:srgbClr val="000000"/>
+              </a:solidFill>
+              <a:effectLst/>
+              <a:uFillTx/>
+              <a:latin typeface="Arial"/>
+            </a:endParaRPr>
+          </a:p>
+        </p:txBody>
+      </p:sp>
+      <p:sp>
+        <p:nvSpPr>
+          <p:cNvPr id="125" name="Text 4"/>
           <p:cNvSpPr/>
           <p:nvPr/>
         </p:nvSpPr>
         <p:spPr>
           <a:xfrm>
-            <a:off x="812880" y="3306960"/>
-            <a:ext cx="3488040" cy="289080"/>
+            <a:off x="1123920" y="2703600"/>
+            <a:ext cx="4695840" cy="1244160"/>
           </a:xfrm>
           <a:prstGeom prst="rect">
             <a:avLst/>
@@ -12766,56 +13394,152 @@
             <a:normAutofit/>
           </a:bodyPr>
           <a:p>
-            <a:pPr defTabSz="914400">
-              <a:lnSpc>
-                <a:spcPts val="2081"/>
-              </a:lnSpc>
-              <a:tabLst>
-                <a:tab pos="0" algn="l"/>
-              </a:tabLst>
+            <a:pPr marL="243720" indent="-243720" defTabSz="914400">
+              <a:lnSpc>
+                <a:spcPts val="2401"/>
+              </a:lnSpc>
+              <a:buClr>
+                <a:srgbClr val="4A5568"/>
+              </a:buClr>
+              <a:buFont typeface="OpenSymbol"/>
+              <a:buAutoNum type="arabicPeriod"/>
             </a:pPr>
             <a:r>
               <a:rPr lang="en-US" sz="1600" b="0" u="none" strike="noStrike">
                 <a:solidFill>
-                  <a:srgbClr val="C9D1DC"/>
+                  <a:srgbClr val="4A5568"/>
                 </a:solidFill>
                 <a:effectLst/>
                 <a:uFillTx/>
                 <a:latin typeface="IBM Plex Sans"/>
                 <a:ea typeface="IBM Plex Sans"/>
               </a:rPr>
-              <a:t>тестів парсера відповіді API</a:t>
+              <a:t>Утримати кнопку BOOT 3 с</a:t>
             </a:r>
             <a:endParaRPr lang="uk-UA" sz="1600" b="0" u="none" strike="noStrike">
               <a:solidFill>
-                <a:srgbClr val="FFFFFF"/>
-              </a:solidFill>
-              <a:effectLst/>
-              <a:uFillTx/>
-              <a:latin typeface="Arial"/>
-            </a:endParaRPr>
-          </a:p>
-        </p:txBody>
-      </p:sp>
-      <p:sp>
-        <p:nvSpPr>
-          <p:cNvPr id="131" name="Shape 5"/>
+                <a:srgbClr val="000000"/>
+              </a:solidFill>
+              <a:effectLst/>
+              <a:uFillTx/>
+              <a:latin typeface="Arial"/>
+            </a:endParaRPr>
+          </a:p>
+          <a:p>
+            <a:pPr marL="243720" indent="-243720" defTabSz="914400">
+              <a:lnSpc>
+                <a:spcPts val="2401"/>
+              </a:lnSpc>
+              <a:buClr>
+                <a:srgbClr val="4A5568"/>
+              </a:buClr>
+              <a:buFont typeface="OpenSymbol"/>
+              <a:buAutoNum type="arabicPeriod"/>
+            </a:pPr>
+            <a:r>
+              <a:rPr lang="en-US" sz="1600" b="0" u="none" strike="noStrike">
+                <a:solidFill>
+                  <a:srgbClr val="4A5568"/>
+                </a:solidFill>
+                <a:effectLst/>
+                <a:uFillTx/>
+                <a:latin typeface="IBM Plex Sans"/>
+                <a:ea typeface="IBM Plex Sans"/>
+              </a:rPr>
+              <a:t>Підключитися до мережі «ESP32-Setup»</a:t>
+            </a:r>
+            <a:endParaRPr lang="uk-UA" sz="1600" b="0" u="none" strike="noStrike">
+              <a:solidFill>
+                <a:srgbClr val="000000"/>
+              </a:solidFill>
+              <a:effectLst/>
+              <a:uFillTx/>
+              <a:latin typeface="Arial"/>
+            </a:endParaRPr>
+          </a:p>
+          <a:p>
+            <a:pPr marL="243720" indent="-243720" defTabSz="914400">
+              <a:lnSpc>
+                <a:spcPts val="2401"/>
+              </a:lnSpc>
+              <a:buClr>
+                <a:srgbClr val="4A5568"/>
+              </a:buClr>
+              <a:buFont typeface="OpenSymbol"/>
+              <a:buAutoNum type="arabicPeriod"/>
+            </a:pPr>
+            <a:r>
+              <a:rPr lang="en-US" sz="1600" b="0" u="none" strike="noStrike">
+                <a:solidFill>
+                  <a:srgbClr val="4A5568"/>
+                </a:solidFill>
+                <a:effectLst/>
+                <a:uFillTx/>
+                <a:latin typeface="IBM Plex Sans"/>
+                <a:ea typeface="IBM Plex Sans"/>
+              </a:rPr>
+              <a:t>Відкрити 192.168.4.1</a:t>
+            </a:r>
+            <a:endParaRPr lang="uk-UA" sz="1600" b="0" u="none" strike="noStrike">
+              <a:solidFill>
+                <a:srgbClr val="000000"/>
+              </a:solidFill>
+              <a:effectLst/>
+              <a:uFillTx/>
+              <a:latin typeface="Arial"/>
+            </a:endParaRPr>
+          </a:p>
+          <a:p>
+            <a:pPr marL="243720" indent="-243720" defTabSz="914400">
+              <a:lnSpc>
+                <a:spcPts val="2401"/>
+              </a:lnSpc>
+              <a:buClr>
+                <a:srgbClr val="4A5568"/>
+              </a:buClr>
+              <a:buFont typeface="OpenSymbol"/>
+              <a:buAutoNum type="arabicPeriod"/>
+            </a:pPr>
+            <a:r>
+              <a:rPr lang="en-US" sz="1600" b="0" u="none" strike="noStrike">
+                <a:solidFill>
+                  <a:srgbClr val="4A5568"/>
+                </a:solidFill>
+                <a:effectLst/>
+                <a:uFillTx/>
+                <a:latin typeface="IBM Plex Sans"/>
+                <a:ea typeface="IBM Plex Sans"/>
+              </a:rPr>
+              <a:t>Вибрати область і Wi-Fi</a:t>
+            </a:r>
+            <a:endParaRPr lang="uk-UA" sz="1600" b="0" u="none" strike="noStrike">
+              <a:solidFill>
+                <a:srgbClr val="000000"/>
+              </a:solidFill>
+              <a:effectLst/>
+              <a:uFillTx/>
+              <a:latin typeface="Arial"/>
+            </a:endParaRPr>
+          </a:p>
+        </p:txBody>
+      </p:sp>
+      <p:sp>
+        <p:nvSpPr>
+          <p:cNvPr id="126" name="Text 5"/>
           <p:cNvSpPr/>
           <p:nvPr/>
         </p:nvSpPr>
         <p:spPr>
           <a:xfrm>
-            <a:off x="4402440" y="1998720"/>
-            <a:ext cx="3386880" cy="360"/>
-          </a:xfrm>
-          <a:prstGeom prst="line">
-            <a:avLst/>
-          </a:prstGeom>
-          <a:ln w="25400">
-            <a:solidFill>
-              <a:srgbClr val="E8A33D"/>
-            </a:solidFill>
-            <a:round/>
+            <a:off x="1123920" y="4075200"/>
+            <a:ext cx="4695840" cy="238320"/>
+          </a:xfrm>
+          <a:prstGeom prst="rect">
+            <a:avLst/>
+          </a:prstGeom>
+          <a:noFill/>
+          <a:ln w="0">
+            <a:noFill/>
           </a:ln>
         </p:spPr>
         <p:style>
@@ -12825,39 +13549,65 @@
           <a:fontRef idx="minor"/>
         </p:style>
         <p:txBody>
-          <a:bodyPr lIns="90000" tIns="-44640" rIns="90000" bIns="-44640" anchor="t" anchorCtr="1">
-            <a:noAutofit/>
-          </a:bodyPr>
-          <a:p>
-            <a:pPr/>
-            <a:endParaRPr lang="uk-UA" sz="1800" b="0" u="none" strike="noStrike">
-              <a:solidFill>
-                <a:srgbClr val="FFFFFF"/>
-              </a:solidFill>
-              <a:effectLst/>
-              <a:uFillTx/>
-              <a:latin typeface="Arial"/>
-            </a:endParaRPr>
-          </a:p>
-        </p:txBody>
-      </p:sp>
-      <p:sp>
-        <p:nvSpPr>
-          <p:cNvPr id="132" name="Text 6"/>
+          <a:bodyPr lIns="0" tIns="0" rIns="0" bIns="0" anchor="t">
+            <a:normAutofit/>
+          </a:bodyPr>
+          <a:p>
+            <a:pPr defTabSz="914400">
+              <a:lnSpc>
+                <a:spcPts val="1681"/>
+              </a:lnSpc>
+              <a:tabLst>
+                <a:tab pos="0" algn="l"/>
+              </a:tabLst>
+            </a:pPr>
+            <a:r>
+              <a:rPr lang="en-US" sz="1200" b="0" u="none" strike="noStrike">
+                <a:solidFill>
+                  <a:srgbClr val="4A5568"/>
+                </a:solidFill>
+                <a:effectLst/>
+                <a:uFillTx/>
+                <a:latin typeface="IBM Plex Sans"/>
+                <a:ea typeface="IBM Plex Sans"/>
+              </a:rPr>
+              <a:t>Вибір зберігається в NVS і переживає перезавантаження.</a:t>
+            </a:r>
+            <a:endParaRPr lang="uk-UA" sz="1200" b="0" u="none" strike="noStrike">
+              <a:solidFill>
+                <a:srgbClr val="000000"/>
+              </a:solidFill>
+              <a:effectLst/>
+              <a:uFillTx/>
+              <a:latin typeface="Arial"/>
+            </a:endParaRPr>
+          </a:p>
+        </p:txBody>
+      </p:sp>
+      <p:sp>
+        <p:nvSpPr>
+          <p:cNvPr id="127" name="Shape 6"/>
           <p:cNvSpPr/>
           <p:nvPr/>
         </p:nvSpPr>
         <p:spPr>
           <a:xfrm>
-            <a:off x="4402800" y="2214720"/>
-            <a:ext cx="3488040" cy="1041120"/>
-          </a:xfrm>
-          <a:prstGeom prst="rect">
-            <a:avLst/>
-          </a:prstGeom>
-          <a:noFill/>
-          <a:ln w="0">
-            <a:noFill/>
+            <a:off x="6200640" y="1938600"/>
+            <a:ext cx="5175000" cy="4103280"/>
+          </a:xfrm>
+          <a:prstGeom prst="roundRect">
+            <a:avLst>
+              <a:gd name="adj" fmla="val 2399"/>
+            </a:avLst>
+          </a:prstGeom>
+          <a:solidFill>
+            <a:srgbClr val="FFFDF8"/>
+          </a:solidFill>
+          <a:ln w="6350">
+            <a:solidFill>
+              <a:srgbClr val="DDD7CB"/>
+            </a:solidFill>
+            <a:round/>
           </a:ln>
         </p:spPr>
         <p:style>
@@ -12867,51 +13617,32 @@
           <a:fontRef idx="minor"/>
         </p:style>
         <p:txBody>
-          <a:bodyPr lIns="0" tIns="0" rIns="0" bIns="0" anchor="t">
-            <a:normAutofit/>
-          </a:bodyPr>
-          <a:p>
-            <a:pPr defTabSz="914400">
-              <a:lnSpc>
-                <a:spcPts val="7999"/>
-              </a:lnSpc>
-              <a:tabLst>
-                <a:tab pos="0" algn="l"/>
-              </a:tabLst>
-            </a:pPr>
-            <a:r>
-              <a:rPr lang="en-US" sz="8000" b="1" u="none" strike="noStrike">
-                <a:solidFill>
-                  <a:srgbClr val="E8A33D"/>
-                </a:solidFill>
-                <a:effectLst/>
-                <a:uFillTx/>
-                <a:latin typeface="IBM Plex Sans"/>
-                <a:ea typeface="IBM Plex Sans"/>
-              </a:rPr>
-              <a:t>9</a:t>
-            </a:r>
-            <a:endParaRPr lang="uk-UA" sz="8000" b="0" u="none" strike="noStrike">
-              <a:solidFill>
-                <a:srgbClr val="FFFFFF"/>
-              </a:solidFill>
-              <a:effectLst/>
-              <a:uFillTx/>
-              <a:latin typeface="Arial"/>
-            </a:endParaRPr>
-          </a:p>
-        </p:txBody>
-      </p:sp>
-      <p:sp>
-        <p:nvSpPr>
-          <p:cNvPr id="133" name="Text 7"/>
+          <a:bodyPr lIns="90000" tIns="45000" rIns="90000" bIns="45000" anchor="t">
+            <a:noAutofit/>
+          </a:bodyPr>
+          <a:p>
+            <a:pPr/>
+            <a:endParaRPr lang="uk-UA" sz="1800" b="0" u="none" strike="noStrike">
+              <a:solidFill>
+                <a:srgbClr val="000000"/>
+              </a:solidFill>
+              <a:effectLst/>
+              <a:uFillTx/>
+              <a:latin typeface="Arial"/>
+            </a:endParaRPr>
+          </a:p>
+        </p:txBody>
+      </p:sp>
+      <p:sp>
+        <p:nvSpPr>
+          <p:cNvPr id="128" name="Text 7"/>
           <p:cNvSpPr/>
           <p:nvPr/>
         </p:nvSpPr>
         <p:spPr>
           <a:xfrm>
-            <a:off x="4402800" y="3306960"/>
-            <a:ext cx="3488040" cy="289080"/>
+            <a:off x="6508800" y="2246400"/>
+            <a:ext cx="4695840" cy="329760"/>
           </a:xfrm>
           <a:prstGeom prst="rect">
             <a:avLst/>
@@ -12934,54 +13665,52 @@
           <a:p>
             <a:pPr defTabSz="914400">
               <a:lnSpc>
-                <a:spcPts val="2081"/>
+                <a:spcPts val="2401"/>
               </a:lnSpc>
               <a:tabLst>
                 <a:tab pos="0" algn="l"/>
               </a:tabLst>
             </a:pPr>
             <a:r>
-              <a:rPr lang="en-US" sz="1600" b="0" u="none" strike="noStrike">
-                <a:solidFill>
-                  <a:srgbClr val="C9D1DC"/>
+              <a:rPr lang="en-US" sz="2000" b="1" u="none" strike="noStrike">
+                <a:solidFill>
+                  <a:srgbClr val="121821"/>
                 </a:solidFill>
                 <a:effectLst/>
                 <a:uFillTx/>
                 <a:latin typeface="IBM Plex Sans"/>
                 <a:ea typeface="IBM Plex Sans"/>
               </a:rPr>
-              <a:t>тестів ПІ-регулятора яскравості</a:t>
+              <a:t>Адаптивна яскравість</a:t>
             </a:r>
-            <a:endParaRPr lang="uk-UA" sz="1600" b="0" u="none" strike="noStrike">
-              <a:solidFill>
-                <a:srgbClr val="FFFFFF"/>
-              </a:solidFill>
-              <a:effectLst/>
-              <a:uFillTx/>
-              <a:latin typeface="Arial"/>
-            </a:endParaRPr>
-          </a:p>
-        </p:txBody>
-      </p:sp>
-      <p:sp>
-        <p:nvSpPr>
-          <p:cNvPr id="134" name="Shape 8"/>
+            <a:endParaRPr lang="uk-UA" sz="2000" b="0" u="none" strike="noStrike">
+              <a:solidFill>
+                <a:srgbClr val="000000"/>
+              </a:solidFill>
+              <a:effectLst/>
+              <a:uFillTx/>
+              <a:latin typeface="Arial"/>
+            </a:endParaRPr>
+          </a:p>
+        </p:txBody>
+      </p:sp>
+      <p:sp>
+        <p:nvSpPr>
+          <p:cNvPr id="129" name="Text 8"/>
           <p:cNvSpPr/>
           <p:nvPr/>
         </p:nvSpPr>
         <p:spPr>
           <a:xfrm>
-            <a:off x="7992360" y="1998720"/>
-            <a:ext cx="3386520" cy="360"/>
-          </a:xfrm>
-          <a:prstGeom prst="line">
-            <a:avLst/>
-          </a:prstGeom>
-          <a:ln w="25400">
-            <a:solidFill>
-              <a:srgbClr val="E8A33D"/>
-            </a:solidFill>
-            <a:round/>
+            <a:off x="6508800" y="2703600"/>
+            <a:ext cx="4695840" cy="594000"/>
+          </a:xfrm>
+          <a:prstGeom prst="rect">
+            <a:avLst/>
+          </a:prstGeom>
+          <a:noFill/>
+          <a:ln w="0">
+            <a:noFill/>
           </a:ln>
         </p:spPr>
         <p:style>
@@ -12991,37 +13720,60 @@
           <a:fontRef idx="minor"/>
         </p:style>
         <p:txBody>
-          <a:bodyPr lIns="90000" tIns="-44640" rIns="90000" bIns="-44640" anchor="t" anchorCtr="1">
-            <a:noAutofit/>
-          </a:bodyPr>
-          <a:p>
-            <a:pPr/>
-            <a:endParaRPr lang="uk-UA" sz="1800" b="0" u="none" strike="noStrike">
-              <a:solidFill>
-                <a:srgbClr val="FFFFFF"/>
-              </a:solidFill>
-              <a:effectLst/>
-              <a:uFillTx/>
-              <a:latin typeface="Arial"/>
-            </a:endParaRPr>
-          </a:p>
-        </p:txBody>
-      </p:sp>
-      <p:sp>
-        <p:nvSpPr>
-          <p:cNvPr id="135" name="Text 9"/>
+          <a:bodyPr lIns="0" tIns="0" rIns="0" bIns="0" anchor="t">
+            <a:normAutofit/>
+          </a:bodyPr>
+          <a:p>
+            <a:pPr defTabSz="914400">
+              <a:lnSpc>
+                <a:spcPts val="2239"/>
+              </a:lnSpc>
+              <a:tabLst>
+                <a:tab pos="0" algn="l"/>
+              </a:tabLst>
+            </a:pPr>
+            <a:r>
+              <a:rPr lang="en-US" sz="1600" b="0" u="none" strike="noStrike">
+                <a:solidFill>
+                  <a:srgbClr val="4A5568"/>
+                </a:solidFill>
+                <a:effectLst/>
+                <a:uFillTx/>
+                <a:latin typeface="IBM Plex Sans"/>
+                <a:ea typeface="IBM Plex Sans"/>
+              </a:rPr>
+              <a:t>ПІ-регулятор з anti-windup плавно підлаштовує підсвітку під освітлення в кімнаті.</a:t>
+            </a:r>
+            <a:endParaRPr lang="uk-UA" sz="1600" b="0" u="none" strike="noStrike">
+              <a:solidFill>
+                <a:srgbClr val="000000"/>
+              </a:solidFill>
+              <a:effectLst/>
+              <a:uFillTx/>
+              <a:latin typeface="Arial"/>
+            </a:endParaRPr>
+          </a:p>
+        </p:txBody>
+      </p:sp>
+      <p:sp>
+        <p:nvSpPr>
+          <p:cNvPr id="130" name="Shape 9"/>
           <p:cNvSpPr/>
           <p:nvPr/>
         </p:nvSpPr>
         <p:spPr>
           <a:xfrm>
-            <a:off x="7992720" y="2214720"/>
-            <a:ext cx="3488040" cy="1041120"/>
-          </a:xfrm>
-          <a:prstGeom prst="rect">
-            <a:avLst/>
-          </a:prstGeom>
-          <a:noFill/>
+            <a:off x="6508800" y="3425040"/>
+            <a:ext cx="4559040" cy="466920"/>
+          </a:xfrm>
+          <a:prstGeom prst="roundRect">
+            <a:avLst>
+              <a:gd name="adj" fmla="val 10870"/>
+            </a:avLst>
+          </a:prstGeom>
+          <a:solidFill>
+            <a:srgbClr val="EAE5DA"/>
+          </a:solidFill>
           <a:ln w="0">
             <a:noFill/>
           </a:ln>
@@ -13033,51 +13785,32 @@
           <a:fontRef idx="minor"/>
         </p:style>
         <p:txBody>
-          <a:bodyPr lIns="0" tIns="0" rIns="0" bIns="0" anchor="t">
-            <a:normAutofit/>
-          </a:bodyPr>
-          <a:p>
-            <a:pPr defTabSz="914400">
-              <a:lnSpc>
-                <a:spcPts val="7999"/>
-              </a:lnSpc>
-              <a:tabLst>
-                <a:tab pos="0" algn="l"/>
-              </a:tabLst>
-            </a:pPr>
-            <a:r>
-              <a:rPr lang="en-US" sz="8000" b="1" u="none" strike="noStrike">
-                <a:solidFill>
-                  <a:srgbClr val="E8A33D"/>
-                </a:solidFill>
-                <a:effectLst/>
-                <a:uFillTx/>
-                <a:latin typeface="IBM Plex Sans"/>
-                <a:ea typeface="IBM Plex Sans"/>
-              </a:rPr>
-              <a:t>25/25</a:t>
-            </a:r>
-            <a:endParaRPr lang="uk-UA" sz="8000" b="0" u="none" strike="noStrike">
-              <a:solidFill>
-                <a:srgbClr val="FFFFFF"/>
-              </a:solidFill>
-              <a:effectLst/>
-              <a:uFillTx/>
-              <a:latin typeface="Arial"/>
-            </a:endParaRPr>
-          </a:p>
-        </p:txBody>
-      </p:sp>
-      <p:sp>
-        <p:nvSpPr>
-          <p:cNvPr id="136" name="Text 10"/>
+          <a:bodyPr lIns="90000" tIns="45000" rIns="90000" bIns="45000" anchor="t">
+            <a:noAutofit/>
+          </a:bodyPr>
+          <a:p>
+            <a:pPr/>
+            <a:endParaRPr lang="uk-UA" sz="1800" b="0" u="none" strike="noStrike">
+              <a:solidFill>
+                <a:srgbClr val="000000"/>
+              </a:solidFill>
+              <a:effectLst/>
+              <a:uFillTx/>
+              <a:latin typeface="Arial"/>
+            </a:endParaRPr>
+          </a:p>
+        </p:txBody>
+      </p:sp>
+      <p:sp>
+        <p:nvSpPr>
+          <p:cNvPr id="131" name="Text 10"/>
           <p:cNvSpPr/>
           <p:nvPr/>
         </p:nvSpPr>
         <p:spPr>
           <a:xfrm>
-            <a:off x="7992720" y="3306960"/>
-            <a:ext cx="3488040" cy="289080"/>
+            <a:off x="6635880" y="3552120"/>
+            <a:ext cx="4434120" cy="238320"/>
           </a:xfrm>
           <a:prstGeom prst="rect">
             <a:avLst/>
@@ -13100,45 +13833,45 @@
           <a:p>
             <a:pPr defTabSz="914400">
               <a:lnSpc>
-                <a:spcPts val="2081"/>
+                <a:spcPts val="1681"/>
               </a:lnSpc>
               <a:tabLst>
                 <a:tab pos="0" algn="l"/>
               </a:tabLst>
             </a:pPr>
             <a:r>
-              <a:rPr lang="en-US" sz="1600" b="0" u="none" strike="noStrike">
-                <a:solidFill>
-                  <a:srgbClr val="C9D1DC"/>
-                </a:solidFill>
-                <a:effectLst/>
-                <a:uFillTx/>
-                <a:latin typeface="IBM Plex Sans"/>
-                <a:ea typeface="IBM Plex Sans"/>
-              </a:rPr>
-              <a:t>проходять успішно</a:t>
+              <a:rPr lang="en-US" sz="1200" b="0" u="none" strike="noStrike">
+                <a:solidFill>
+                  <a:srgbClr val="121821"/>
+                </a:solidFill>
+                <a:effectLst/>
+                <a:uFillTx/>
+                <a:latin typeface="JetBrains Mono"/>
+                <a:ea typeface="JetBrains Mono"/>
+              </a:rPr>
+              <a:t>setpoint = min + lux · (max − min)</a:t>
             </a:r>
-            <a:endParaRPr lang="uk-UA" sz="1600" b="0" u="none" strike="noStrike">
-              <a:solidFill>
-                <a:srgbClr val="FFFFFF"/>
-              </a:solidFill>
-              <a:effectLst/>
-              <a:uFillTx/>
-              <a:latin typeface="Arial"/>
-            </a:endParaRPr>
-          </a:p>
-        </p:txBody>
-      </p:sp>
-      <p:sp>
-        <p:nvSpPr>
-          <p:cNvPr id="137" name="Text 11"/>
+            <a:endParaRPr lang="uk-UA" sz="1200" b="0" u="none" strike="noStrike">
+              <a:solidFill>
+                <a:srgbClr val="000000"/>
+              </a:solidFill>
+              <a:effectLst/>
+              <a:uFillTx/>
+              <a:latin typeface="Arial"/>
+            </a:endParaRPr>
+          </a:p>
+        </p:txBody>
+      </p:sp>
+      <p:sp>
+        <p:nvSpPr>
+          <p:cNvPr id="132" name="Text 11"/>
           <p:cNvSpPr/>
           <p:nvPr/>
         </p:nvSpPr>
         <p:spPr>
           <a:xfrm>
-            <a:off x="812880" y="3926520"/>
-            <a:ext cx="10883160" cy="273960"/>
+            <a:off x="6508800" y="4044600"/>
+            <a:ext cx="4695840" cy="238320"/>
           </a:xfrm>
           <a:prstGeom prst="rect">
             <a:avLst/>
@@ -13161,27 +13894,27 @@
           <a:p>
             <a:pPr defTabSz="914400">
               <a:lnSpc>
-                <a:spcPts val="1959"/>
+                <a:spcPts val="1681"/>
               </a:lnSpc>
               <a:tabLst>
                 <a:tab pos="0" algn="l"/>
               </a:tabLst>
             </a:pPr>
             <a:r>
-              <a:rPr lang="en-US" sz="1400" b="0" u="none" strike="noStrike">
-                <a:solidFill>
-                  <a:srgbClr val="9AA5B4"/>
+              <a:rPr lang="en-US" sz="1200" b="0" u="none" strike="noStrike">
+                <a:solidFill>
+                  <a:srgbClr val="4A5568"/>
                 </a:solidFill>
                 <a:effectLst/>
                 <a:uFillTx/>
                 <a:latin typeface="IBM Plex Sans"/>
                 <a:ea typeface="IBM Plex Sans"/>
               </a:rPr>
-              <a:t>Логіка винесена в «чисті» функції без залежності від обладнання: тести йдуть на комп'ютері, окремий набір — на самій платі.</a:t>
+              <a:t>Вночі дисплей не сліпить, удень його добре видно.</a:t>
             </a:r>
-            <a:endParaRPr lang="uk-UA" sz="1400" b="0" u="none" strike="noStrike">
-              <a:solidFill>
-                <a:srgbClr val="FFFFFF"/>
+            <a:endParaRPr lang="uk-UA" sz="1200" b="0" u="none" strike="noStrike">
+              <a:solidFill>
+                <a:srgbClr val="000000"/>
               </a:solidFill>
               <a:effectLst/>
               <a:uFillTx/>
